--- a/site-assets/sources/day1/fig-ja-en.pptx
+++ b/site-assets/sources/day1/fig-ja-en.pptx
@@ -2115,6 +2115,1295 @@
           <a:chExt cx="0" cy="0"/>
         </a:xfrm>
       </p:grpSpPr>
+      <p:sp>
+        <p:nvSpPr>
+          <p:cNvPr id="31" name="正方形/長方形 30">
+            <a:extLst>
+              <a:ext uri="{FF2B5EF4-FFF2-40B4-BE49-F238E27FC236}">
+                <a16:creationId xmlns:a16="http://schemas.microsoft.com/office/drawing/2014/main" id="{D19B024A-361D-7A48-B45A-C686F18B3373}"/>
+              </a:ext>
+            </a:extLst>
+          </p:cNvPr>
+          <p:cNvSpPr/>
+          <p:nvPr/>
+        </p:nvSpPr>
+        <p:spPr>
+          <a:xfrm>
+            <a:off x="172720" y="325120"/>
+            <a:ext cx="8879840" cy="4572000"/>
+          </a:xfrm>
+          <a:prstGeom prst="rect">
+            <a:avLst/>
+          </a:prstGeom>
+          <a:solidFill>
+            <a:schemeClr val="accent2">
+              <a:lumMod val="20000"/>
+              <a:lumOff val="80000"/>
+            </a:schemeClr>
+          </a:solidFill>
+        </p:spPr>
+        <p:style>
+          <a:lnRef idx="2">
+            <a:schemeClr val="accent1">
+              <a:shade val="50000"/>
+            </a:schemeClr>
+          </a:lnRef>
+          <a:fillRef idx="1">
+            <a:schemeClr val="accent1"/>
+          </a:fillRef>
+          <a:effectRef idx="0">
+            <a:schemeClr val="accent1"/>
+          </a:effectRef>
+          <a:fontRef idx="minor">
+            <a:schemeClr val="lt1"/>
+          </a:fontRef>
+        </p:style>
+        <p:txBody>
+          <a:bodyPr rtlCol="0" anchor="ctr"/>
+          <a:lstStyle/>
+          <a:p>
+            <a:pPr algn="ctr"/>
+            <a:endParaRPr kumimoji="1" lang="ja-JP" altLang="en-US"/>
+          </a:p>
+        </p:txBody>
+      </p:sp>
+      <p:grpSp>
+        <p:nvGrpSpPr>
+          <p:cNvPr id="18" name="グループ化 17">
+            <a:extLst>
+              <a:ext uri="{FF2B5EF4-FFF2-40B4-BE49-F238E27FC236}">
+                <a16:creationId xmlns:a16="http://schemas.microsoft.com/office/drawing/2014/main" id="{E122872C-5000-8F4D-ACEB-B34853919A56}"/>
+              </a:ext>
+            </a:extLst>
+          </p:cNvPr>
+          <p:cNvGrpSpPr/>
+          <p:nvPr/>
+        </p:nvGrpSpPr>
+        <p:grpSpPr>
+          <a:xfrm>
+            <a:off x="609600" y="1127760"/>
+            <a:ext cx="3738880" cy="3281680"/>
+            <a:chOff x="802640" y="538480"/>
+            <a:chExt cx="3738880" cy="3281680"/>
+          </a:xfrm>
+        </p:grpSpPr>
+        <p:sp>
+          <p:nvSpPr>
+            <p:cNvPr id="2" name="正方形/長方形 1">
+              <a:extLst>
+                <a:ext uri="{FF2B5EF4-FFF2-40B4-BE49-F238E27FC236}">
+                  <a16:creationId xmlns:a16="http://schemas.microsoft.com/office/drawing/2014/main" id="{BDD1ABDC-C21D-7D46-994A-1AADC722A4B6}"/>
+                </a:ext>
+              </a:extLst>
+            </p:cNvPr>
+            <p:cNvSpPr/>
+            <p:nvPr/>
+          </p:nvSpPr>
+          <p:spPr>
+            <a:xfrm>
+              <a:off x="802640" y="548640"/>
+              <a:ext cx="3738880" cy="3271520"/>
+            </a:xfrm>
+            <a:prstGeom prst="rect">
+              <a:avLst/>
+            </a:prstGeom>
+            <a:solidFill>
+              <a:schemeClr val="accent1">
+                <a:lumMod val="20000"/>
+                <a:lumOff val="80000"/>
+              </a:schemeClr>
+            </a:solidFill>
+            <a:ln>
+              <a:solidFill>
+                <a:schemeClr val="tx1"/>
+              </a:solidFill>
+            </a:ln>
+          </p:spPr>
+          <p:style>
+            <a:lnRef idx="2">
+              <a:schemeClr val="accent1">
+                <a:shade val="50000"/>
+              </a:schemeClr>
+            </a:lnRef>
+            <a:fillRef idx="1">
+              <a:schemeClr val="accent1"/>
+            </a:fillRef>
+            <a:effectRef idx="0">
+              <a:schemeClr val="accent1"/>
+            </a:effectRef>
+            <a:fontRef idx="minor">
+              <a:schemeClr val="lt1"/>
+            </a:fontRef>
+          </p:style>
+          <p:txBody>
+            <a:bodyPr rtlCol="0" anchor="ctr"/>
+            <a:lstStyle/>
+            <a:p>
+              <a:pPr algn="ctr"/>
+              <a:endParaRPr kumimoji="1" lang="ja-JP" altLang="en-US" sz="3600">
+                <a:solidFill>
+                  <a:schemeClr val="tx1"/>
+                </a:solidFill>
+              </a:endParaRPr>
+            </a:p>
+          </p:txBody>
+        </p:sp>
+        <p:sp>
+          <p:nvSpPr>
+            <p:cNvPr id="4" name="角丸四角形 3">
+              <a:extLst>
+                <a:ext uri="{FF2B5EF4-FFF2-40B4-BE49-F238E27FC236}">
+                  <a16:creationId xmlns:a16="http://schemas.microsoft.com/office/drawing/2014/main" id="{D64EEFDB-0A07-8A40-82F2-8B551E44D5E6}"/>
+                </a:ext>
+              </a:extLst>
+            </p:cNvPr>
+            <p:cNvSpPr/>
+            <p:nvPr/>
+          </p:nvSpPr>
+          <p:spPr>
+            <a:xfrm>
+              <a:off x="2611120" y="1148080"/>
+              <a:ext cx="1808480" cy="528320"/>
+            </a:xfrm>
+            <a:prstGeom prst="roundRect">
+              <a:avLst/>
+            </a:prstGeom>
+            <a:solidFill>
+              <a:schemeClr val="accent4">
+                <a:lumMod val="20000"/>
+                <a:lumOff val="80000"/>
+              </a:schemeClr>
+            </a:solidFill>
+          </p:spPr>
+          <p:style>
+            <a:lnRef idx="2">
+              <a:schemeClr val="accent1">
+                <a:shade val="50000"/>
+              </a:schemeClr>
+            </a:lnRef>
+            <a:fillRef idx="1">
+              <a:schemeClr val="accent1"/>
+            </a:fillRef>
+            <a:effectRef idx="0">
+              <a:schemeClr val="accent1"/>
+            </a:effectRef>
+            <a:fontRef idx="minor">
+              <a:schemeClr val="lt1"/>
+            </a:fontRef>
+          </p:style>
+          <p:txBody>
+            <a:bodyPr rtlCol="0" anchor="ctr"/>
+            <a:lstStyle/>
+            <a:p>
+              <a:pPr algn="ctr">
+                <a:defRPr/>
+              </a:pPr>
+              <a:r>
+                <a:rPr kumimoji="1" lang="ja-JP" altLang="en-US">
+                  <a:solidFill>
+                    <a:schemeClr val="tx1"/>
+                  </a:solidFill>
+                </a:rPr>
+                <a:t>Thread</a:t>
+              </a:r>
+            </a:p>
+          </p:txBody>
+        </p:sp>
+        <p:sp>
+          <p:nvSpPr>
+            <p:cNvPr id="5" name="テキスト ボックス 4">
+              <a:extLst>
+                <a:ext uri="{FF2B5EF4-FFF2-40B4-BE49-F238E27FC236}">
+                  <a16:creationId xmlns:a16="http://schemas.microsoft.com/office/drawing/2014/main" id="{71224024-A681-4140-8AB1-DEFB806C77E8}"/>
+                </a:ext>
+              </a:extLst>
+            </p:cNvPr>
+            <p:cNvSpPr txBox="1"/>
+            <p:nvPr/>
+          </p:nvSpPr>
+          <p:spPr>
+            <a:xfrm>
+              <a:off x="812800" y="538480"/>
+              <a:ext cx="3718560" cy="523220"/>
+            </a:xfrm>
+            <a:prstGeom prst="rect">
+              <a:avLst/>
+            </a:prstGeom>
+            <a:noFill/>
+          </p:spPr>
+          <p:txBody>
+            <a:bodyPr wrap="square" rtlCol="0"/>
+            <a:lstStyle/>
+            <a:p>
+              <a:pPr algn="ctr">
+                <a:defRPr sz="2600"/>
+              </a:pPr>
+              <a:r>
+                <a:rPr kumimoji="1" lang="ja-JP" altLang="en-US" sz="2600"/>
+                <a:t>Process</a:t>
+              </a:r>
+            </a:p>
+          </p:txBody>
+        </p:sp>
+        <p:sp>
+          <p:nvSpPr>
+            <p:cNvPr id="6" name="角丸四角形 5">
+              <a:extLst>
+                <a:ext uri="{FF2B5EF4-FFF2-40B4-BE49-F238E27FC236}">
+                  <a16:creationId xmlns:a16="http://schemas.microsoft.com/office/drawing/2014/main" id="{5B05438C-CD2D-1C46-A718-B9A09B716168}"/>
+                </a:ext>
+              </a:extLst>
+            </p:cNvPr>
+            <p:cNvSpPr/>
+            <p:nvPr/>
+          </p:nvSpPr>
+          <p:spPr>
+            <a:xfrm>
+              <a:off x="2611120" y="1757680"/>
+              <a:ext cx="1808480" cy="528320"/>
+            </a:xfrm>
+            <a:prstGeom prst="roundRect">
+              <a:avLst/>
+            </a:prstGeom>
+            <a:solidFill>
+              <a:schemeClr val="accent4">
+                <a:lumMod val="20000"/>
+                <a:lumOff val="80000"/>
+              </a:schemeClr>
+            </a:solidFill>
+          </p:spPr>
+          <p:style>
+            <a:lnRef idx="2">
+              <a:schemeClr val="accent1">
+                <a:shade val="50000"/>
+              </a:schemeClr>
+            </a:lnRef>
+            <a:fillRef idx="1">
+              <a:schemeClr val="accent1"/>
+            </a:fillRef>
+            <a:effectRef idx="0">
+              <a:schemeClr val="accent1"/>
+            </a:effectRef>
+            <a:fontRef idx="minor">
+              <a:schemeClr val="lt1"/>
+            </a:fontRef>
+          </p:style>
+          <p:txBody>
+            <a:bodyPr rtlCol="0" anchor="ctr"/>
+            <a:lstStyle/>
+            <a:p>
+              <a:pPr algn="ctr">
+                <a:defRPr/>
+              </a:pPr>
+              <a:r>
+                <a:rPr kumimoji="1" lang="ja-JP" altLang="en-US">
+                  <a:solidFill>
+                    <a:schemeClr val="tx1"/>
+                  </a:solidFill>
+                </a:rPr>
+                <a:t>Thread</a:t>
+              </a:r>
+            </a:p>
+          </p:txBody>
+        </p:sp>
+        <p:sp>
+          <p:nvSpPr>
+            <p:cNvPr id="7" name="角丸四角形 6">
+              <a:extLst>
+                <a:ext uri="{FF2B5EF4-FFF2-40B4-BE49-F238E27FC236}">
+                  <a16:creationId xmlns:a16="http://schemas.microsoft.com/office/drawing/2014/main" id="{42E4E2F0-C26C-5A4D-B3C9-989634459DA6}"/>
+                </a:ext>
+              </a:extLst>
+            </p:cNvPr>
+            <p:cNvSpPr/>
+            <p:nvPr/>
+          </p:nvSpPr>
+          <p:spPr>
+            <a:xfrm>
+              <a:off x="2600960" y="2407920"/>
+              <a:ext cx="1808480" cy="528320"/>
+            </a:xfrm>
+            <a:prstGeom prst="roundRect">
+              <a:avLst/>
+            </a:prstGeom>
+            <a:solidFill>
+              <a:schemeClr val="accent4">
+                <a:lumMod val="20000"/>
+                <a:lumOff val="80000"/>
+              </a:schemeClr>
+            </a:solidFill>
+          </p:spPr>
+          <p:style>
+            <a:lnRef idx="2">
+              <a:schemeClr val="accent1">
+                <a:shade val="50000"/>
+              </a:schemeClr>
+            </a:lnRef>
+            <a:fillRef idx="1">
+              <a:schemeClr val="accent1"/>
+            </a:fillRef>
+            <a:effectRef idx="0">
+              <a:schemeClr val="accent1"/>
+            </a:effectRef>
+            <a:fontRef idx="minor">
+              <a:schemeClr val="lt1"/>
+            </a:fontRef>
+          </p:style>
+          <p:txBody>
+            <a:bodyPr rtlCol="0" anchor="ctr"/>
+            <a:lstStyle/>
+            <a:p>
+              <a:pPr algn="ctr">
+                <a:defRPr/>
+              </a:pPr>
+              <a:r>
+                <a:rPr kumimoji="1" lang="ja-JP" altLang="en-US">
+                  <a:solidFill>
+                    <a:schemeClr val="tx1"/>
+                  </a:solidFill>
+                </a:rPr>
+                <a:t>Thread</a:t>
+              </a:r>
+            </a:p>
+          </p:txBody>
+        </p:sp>
+        <p:sp>
+          <p:nvSpPr>
+            <p:cNvPr id="8" name="角丸四角形 7">
+              <a:extLst>
+                <a:ext uri="{FF2B5EF4-FFF2-40B4-BE49-F238E27FC236}">
+                  <a16:creationId xmlns:a16="http://schemas.microsoft.com/office/drawing/2014/main" id="{F02A1299-E947-5C40-AD48-DE6F214428CD}"/>
+                </a:ext>
+              </a:extLst>
+            </p:cNvPr>
+            <p:cNvSpPr/>
+            <p:nvPr/>
+          </p:nvSpPr>
+          <p:spPr>
+            <a:xfrm>
+              <a:off x="2600960" y="3017520"/>
+              <a:ext cx="1808480" cy="528320"/>
+            </a:xfrm>
+            <a:prstGeom prst="roundRect">
+              <a:avLst/>
+            </a:prstGeom>
+            <a:solidFill>
+              <a:schemeClr val="accent4">
+                <a:lumMod val="20000"/>
+                <a:lumOff val="80000"/>
+              </a:schemeClr>
+            </a:solidFill>
+          </p:spPr>
+          <p:style>
+            <a:lnRef idx="2">
+              <a:schemeClr val="accent1">
+                <a:shade val="50000"/>
+              </a:schemeClr>
+            </a:lnRef>
+            <a:fillRef idx="1">
+              <a:schemeClr val="accent1"/>
+            </a:fillRef>
+            <a:effectRef idx="0">
+              <a:schemeClr val="accent1"/>
+            </a:effectRef>
+            <a:fontRef idx="minor">
+              <a:schemeClr val="lt1"/>
+            </a:fontRef>
+          </p:style>
+          <p:txBody>
+            <a:bodyPr rtlCol="0" anchor="ctr"/>
+            <a:lstStyle/>
+            <a:p>
+              <a:pPr algn="ctr">
+                <a:defRPr/>
+              </a:pPr>
+              <a:r>
+                <a:rPr kumimoji="1" lang="ja-JP" altLang="en-US">
+                  <a:solidFill>
+                    <a:schemeClr val="tx1"/>
+                  </a:solidFill>
+                </a:rPr>
+                <a:t>Thread</a:t>
+              </a:r>
+            </a:p>
+          </p:txBody>
+        </p:sp>
+        <p:sp>
+          <p:nvSpPr>
+            <p:cNvPr id="9" name="正方形/長方形 8">
+              <a:extLst>
+                <a:ext uri="{FF2B5EF4-FFF2-40B4-BE49-F238E27FC236}">
+                  <a16:creationId xmlns:a16="http://schemas.microsoft.com/office/drawing/2014/main" id="{B7462198-F07D-B54E-B107-6F742409A5CE}"/>
+                </a:ext>
+              </a:extLst>
+            </p:cNvPr>
+            <p:cNvSpPr/>
+            <p:nvPr/>
+          </p:nvSpPr>
+          <p:spPr>
+            <a:xfrm>
+              <a:off x="914400" y="1422400"/>
+              <a:ext cx="1209040" cy="1717040"/>
+            </a:xfrm>
+            <a:prstGeom prst="rect">
+              <a:avLst/>
+            </a:prstGeom>
+            <a:solidFill>
+              <a:schemeClr val="accent6">
+                <a:lumMod val="20000"/>
+                <a:lumOff val="80000"/>
+              </a:schemeClr>
+            </a:solidFill>
+          </p:spPr>
+          <p:style>
+            <a:lnRef idx="2">
+              <a:schemeClr val="accent1">
+                <a:shade val="50000"/>
+              </a:schemeClr>
+            </a:lnRef>
+            <a:fillRef idx="1">
+              <a:schemeClr val="accent1"/>
+            </a:fillRef>
+            <a:effectRef idx="0">
+              <a:schemeClr val="accent1"/>
+            </a:effectRef>
+            <a:fontRef idx="minor">
+              <a:schemeClr val="lt1"/>
+            </a:fontRef>
+          </p:style>
+          <p:txBody>
+            <a:bodyPr rtlCol="0" anchor="ctr"/>
+            <a:lstStyle/>
+            <a:p>
+              <a:pPr algn="ctr">
+                <a:defRPr/>
+              </a:pPr>
+              <a:r>
+                <a:rPr kumimoji="1" lang="ja-JP" altLang="en-US">
+                  <a:solidFill>
+                    <a:schemeClr val="tx1"/>
+                  </a:solidFill>
+                </a:rPr>
+                <a:t>Memory</a:t>
+              </a:r>
+            </a:p>
+          </p:txBody>
+        </p:sp>
+        <p:cxnSp>
+          <p:nvCxnSpPr>
+            <p:cNvPr id="11" name="直線矢印コネクタ 10">
+              <a:extLst>
+                <a:ext uri="{FF2B5EF4-FFF2-40B4-BE49-F238E27FC236}">
+                  <a16:creationId xmlns:a16="http://schemas.microsoft.com/office/drawing/2014/main" id="{A4F226BF-5C02-2F48-85DB-4D55D3BC2EFC}"/>
+                </a:ext>
+              </a:extLst>
+            </p:cNvPr>
+            <p:cNvCxnSpPr>
+              <a:stCxn id="4" idx="1"/>
+            </p:cNvCxnSpPr>
+            <p:nvPr/>
+          </p:nvCxnSpPr>
+          <p:spPr>
+            <a:xfrm flipH="1">
+              <a:off x="2123440" y="1412240"/>
+              <a:ext cx="487680" cy="345440"/>
+            </a:xfrm>
+            <a:prstGeom prst="straightConnector1">
+              <a:avLst/>
+            </a:prstGeom>
+            <a:ln>
+              <a:tailEnd type="triangle"/>
+            </a:ln>
+          </p:spPr>
+          <p:style>
+            <a:lnRef idx="1">
+              <a:schemeClr val="accent1"/>
+            </a:lnRef>
+            <a:fillRef idx="0">
+              <a:schemeClr val="accent1"/>
+            </a:fillRef>
+            <a:effectRef idx="0">
+              <a:schemeClr val="accent1"/>
+            </a:effectRef>
+            <a:fontRef idx="minor">
+              <a:schemeClr val="tx1"/>
+            </a:fontRef>
+          </p:style>
+        </p:cxnSp>
+        <p:cxnSp>
+          <p:nvCxnSpPr>
+            <p:cNvPr id="13" name="直線矢印コネクタ 12">
+              <a:extLst>
+                <a:ext uri="{FF2B5EF4-FFF2-40B4-BE49-F238E27FC236}">
+                  <a16:creationId xmlns:a16="http://schemas.microsoft.com/office/drawing/2014/main" id="{3D4046DB-3352-F84D-AF42-ABCBB51F11EC}"/>
+                </a:ext>
+              </a:extLst>
+            </p:cNvPr>
+            <p:cNvCxnSpPr>
+              <a:stCxn id="6" idx="1"/>
+            </p:cNvCxnSpPr>
+            <p:nvPr/>
+          </p:nvCxnSpPr>
+          <p:spPr>
+            <a:xfrm flipH="1">
+              <a:off x="2123440" y="2021840"/>
+              <a:ext cx="487680" cy="101600"/>
+            </a:xfrm>
+            <a:prstGeom prst="straightConnector1">
+              <a:avLst/>
+            </a:prstGeom>
+            <a:ln>
+              <a:tailEnd type="triangle"/>
+            </a:ln>
+          </p:spPr>
+          <p:style>
+            <a:lnRef idx="1">
+              <a:schemeClr val="accent1"/>
+            </a:lnRef>
+            <a:fillRef idx="0">
+              <a:schemeClr val="accent1"/>
+            </a:fillRef>
+            <a:effectRef idx="0">
+              <a:schemeClr val="accent1"/>
+            </a:effectRef>
+            <a:fontRef idx="minor">
+              <a:schemeClr val="tx1"/>
+            </a:fontRef>
+          </p:style>
+        </p:cxnSp>
+        <p:cxnSp>
+          <p:nvCxnSpPr>
+            <p:cNvPr id="15" name="直線矢印コネクタ 14">
+              <a:extLst>
+                <a:ext uri="{FF2B5EF4-FFF2-40B4-BE49-F238E27FC236}">
+                  <a16:creationId xmlns:a16="http://schemas.microsoft.com/office/drawing/2014/main" id="{5D3A5D73-F00B-9648-A6B9-BE10B823E95D}"/>
+                </a:ext>
+              </a:extLst>
+            </p:cNvPr>
+            <p:cNvCxnSpPr>
+              <a:stCxn id="7" idx="1"/>
+            </p:cNvCxnSpPr>
+            <p:nvPr/>
+          </p:nvCxnSpPr>
+          <p:spPr>
+            <a:xfrm flipH="1" flipV="1">
+              <a:off x="2113280" y="2560320"/>
+              <a:ext cx="487680" cy="111760"/>
+            </a:xfrm>
+            <a:prstGeom prst="straightConnector1">
+              <a:avLst/>
+            </a:prstGeom>
+            <a:ln>
+              <a:tailEnd type="triangle"/>
+            </a:ln>
+          </p:spPr>
+          <p:style>
+            <a:lnRef idx="1">
+              <a:schemeClr val="accent1"/>
+            </a:lnRef>
+            <a:fillRef idx="0">
+              <a:schemeClr val="accent1"/>
+            </a:fillRef>
+            <a:effectRef idx="0">
+              <a:schemeClr val="accent1"/>
+            </a:effectRef>
+            <a:fontRef idx="minor">
+              <a:schemeClr val="tx1"/>
+            </a:fontRef>
+          </p:style>
+        </p:cxnSp>
+        <p:cxnSp>
+          <p:nvCxnSpPr>
+            <p:cNvPr id="17" name="直線矢印コネクタ 16">
+              <a:extLst>
+                <a:ext uri="{FF2B5EF4-FFF2-40B4-BE49-F238E27FC236}">
+                  <a16:creationId xmlns:a16="http://schemas.microsoft.com/office/drawing/2014/main" id="{55973968-38A2-4447-9F52-0E7304E751D1}"/>
+                </a:ext>
+              </a:extLst>
+            </p:cNvPr>
+            <p:cNvCxnSpPr/>
+            <p:nvPr/>
+          </p:nvCxnSpPr>
+          <p:spPr>
+            <a:xfrm flipH="1" flipV="1">
+              <a:off x="2153920" y="2936240"/>
+              <a:ext cx="436880" cy="365760"/>
+            </a:xfrm>
+            <a:prstGeom prst="straightConnector1">
+              <a:avLst/>
+            </a:prstGeom>
+            <a:ln>
+              <a:tailEnd type="triangle"/>
+            </a:ln>
+          </p:spPr>
+          <p:style>
+            <a:lnRef idx="1">
+              <a:schemeClr val="accent1"/>
+            </a:lnRef>
+            <a:fillRef idx="0">
+              <a:schemeClr val="accent1"/>
+            </a:fillRef>
+            <a:effectRef idx="0">
+              <a:schemeClr val="accent1"/>
+            </a:effectRef>
+            <a:fontRef idx="minor">
+              <a:schemeClr val="tx1"/>
+            </a:fontRef>
+          </p:style>
+        </p:cxnSp>
+      </p:grpSp>
+      <p:grpSp>
+        <p:nvGrpSpPr>
+          <p:cNvPr id="19" name="グループ化 18">
+            <a:extLst>
+              <a:ext uri="{FF2B5EF4-FFF2-40B4-BE49-F238E27FC236}">
+                <a16:creationId xmlns:a16="http://schemas.microsoft.com/office/drawing/2014/main" id="{088BCE67-2FB4-7846-9899-8B5F0BE946B6}"/>
+              </a:ext>
+            </a:extLst>
+          </p:cNvPr>
+          <p:cNvGrpSpPr/>
+          <p:nvPr/>
+        </p:nvGrpSpPr>
+        <p:grpSpPr>
+          <a:xfrm>
+            <a:off x="4795520" y="1127760"/>
+            <a:ext cx="3738880" cy="3281680"/>
+            <a:chOff x="802640" y="538480"/>
+            <a:chExt cx="3738880" cy="3281680"/>
+          </a:xfrm>
+        </p:grpSpPr>
+        <p:sp>
+          <p:nvSpPr>
+            <p:cNvPr id="20" name="正方形/長方形 19">
+              <a:extLst>
+                <a:ext uri="{FF2B5EF4-FFF2-40B4-BE49-F238E27FC236}">
+                  <a16:creationId xmlns:a16="http://schemas.microsoft.com/office/drawing/2014/main" id="{DBA80B25-73FD-1649-B42A-1A40945944AC}"/>
+                </a:ext>
+              </a:extLst>
+            </p:cNvPr>
+            <p:cNvSpPr/>
+            <p:nvPr/>
+          </p:nvSpPr>
+          <p:spPr>
+            <a:xfrm>
+              <a:off x="802640" y="548640"/>
+              <a:ext cx="3738880" cy="3271520"/>
+            </a:xfrm>
+            <a:prstGeom prst="rect">
+              <a:avLst/>
+            </a:prstGeom>
+            <a:solidFill>
+              <a:schemeClr val="accent1">
+                <a:lumMod val="20000"/>
+                <a:lumOff val="80000"/>
+              </a:schemeClr>
+            </a:solidFill>
+            <a:ln>
+              <a:solidFill>
+                <a:schemeClr val="tx1"/>
+              </a:solidFill>
+            </a:ln>
+          </p:spPr>
+          <p:style>
+            <a:lnRef idx="2">
+              <a:schemeClr val="accent1">
+                <a:shade val="50000"/>
+              </a:schemeClr>
+            </a:lnRef>
+            <a:fillRef idx="1">
+              <a:schemeClr val="accent1"/>
+            </a:fillRef>
+            <a:effectRef idx="0">
+              <a:schemeClr val="accent1"/>
+            </a:effectRef>
+            <a:fontRef idx="minor">
+              <a:schemeClr val="lt1"/>
+            </a:fontRef>
+          </p:style>
+          <p:txBody>
+            <a:bodyPr rtlCol="0" anchor="ctr"/>
+            <a:lstStyle/>
+            <a:p>
+              <a:pPr algn="ctr"/>
+              <a:endParaRPr kumimoji="1" lang="ja-JP" altLang="en-US" sz="3600">
+                <a:solidFill>
+                  <a:schemeClr val="tx1"/>
+                </a:solidFill>
+              </a:endParaRPr>
+            </a:p>
+          </p:txBody>
+        </p:sp>
+        <p:sp>
+          <p:nvSpPr>
+            <p:cNvPr id="21" name="角丸四角形 20">
+              <a:extLst>
+                <a:ext uri="{FF2B5EF4-FFF2-40B4-BE49-F238E27FC236}">
+                  <a16:creationId xmlns:a16="http://schemas.microsoft.com/office/drawing/2014/main" id="{4835A501-1A22-0344-A9A9-28FF2B8F0BBD}"/>
+                </a:ext>
+              </a:extLst>
+            </p:cNvPr>
+            <p:cNvSpPr/>
+            <p:nvPr/>
+          </p:nvSpPr>
+          <p:spPr>
+            <a:xfrm>
+              <a:off x="2611120" y="1148080"/>
+              <a:ext cx="1808480" cy="528320"/>
+            </a:xfrm>
+            <a:prstGeom prst="roundRect">
+              <a:avLst/>
+            </a:prstGeom>
+            <a:solidFill>
+              <a:schemeClr val="accent4">
+                <a:lumMod val="20000"/>
+                <a:lumOff val="80000"/>
+              </a:schemeClr>
+            </a:solidFill>
+          </p:spPr>
+          <p:style>
+            <a:lnRef idx="2">
+              <a:schemeClr val="accent1">
+                <a:shade val="50000"/>
+              </a:schemeClr>
+            </a:lnRef>
+            <a:fillRef idx="1">
+              <a:schemeClr val="accent1"/>
+            </a:fillRef>
+            <a:effectRef idx="0">
+              <a:schemeClr val="accent1"/>
+            </a:effectRef>
+            <a:fontRef idx="minor">
+              <a:schemeClr val="lt1"/>
+            </a:fontRef>
+          </p:style>
+          <p:txBody>
+            <a:bodyPr rtlCol="0" anchor="ctr"/>
+            <a:lstStyle/>
+            <a:p>
+              <a:pPr algn="ctr">
+                <a:defRPr/>
+              </a:pPr>
+              <a:r>
+                <a:rPr kumimoji="1" lang="ja-JP" altLang="en-US">
+                  <a:solidFill>
+                    <a:schemeClr val="tx1"/>
+                  </a:solidFill>
+                </a:rPr>
+                <a:t>Thread</a:t>
+              </a:r>
+            </a:p>
+          </p:txBody>
+        </p:sp>
+        <p:sp>
+          <p:nvSpPr>
+            <p:cNvPr id="22" name="テキスト ボックス 21">
+              <a:extLst>
+                <a:ext uri="{FF2B5EF4-FFF2-40B4-BE49-F238E27FC236}">
+                  <a16:creationId xmlns:a16="http://schemas.microsoft.com/office/drawing/2014/main" id="{C95FFB1D-036D-0F41-9EA3-400E2283972F}"/>
+                </a:ext>
+              </a:extLst>
+            </p:cNvPr>
+            <p:cNvSpPr txBox="1"/>
+            <p:nvPr/>
+          </p:nvSpPr>
+          <p:spPr>
+            <a:xfrm>
+              <a:off x="812800" y="538480"/>
+              <a:ext cx="3718560" cy="523220"/>
+            </a:xfrm>
+            <a:prstGeom prst="rect">
+              <a:avLst/>
+            </a:prstGeom>
+            <a:noFill/>
+          </p:spPr>
+          <p:txBody>
+            <a:bodyPr wrap="square" rtlCol="0"/>
+            <a:lstStyle/>
+            <a:p>
+              <a:pPr algn="ctr">
+                <a:defRPr sz="2600"/>
+              </a:pPr>
+              <a:r>
+                <a:rPr kumimoji="1" lang="ja-JP" altLang="en-US" sz="2600"/>
+                <a:t>Process</a:t>
+              </a:r>
+            </a:p>
+          </p:txBody>
+        </p:sp>
+        <p:sp>
+          <p:nvSpPr>
+            <p:cNvPr id="23" name="角丸四角形 22">
+              <a:extLst>
+                <a:ext uri="{FF2B5EF4-FFF2-40B4-BE49-F238E27FC236}">
+                  <a16:creationId xmlns:a16="http://schemas.microsoft.com/office/drawing/2014/main" id="{48727B67-063F-9243-ADB6-CD8DB7003367}"/>
+                </a:ext>
+              </a:extLst>
+            </p:cNvPr>
+            <p:cNvSpPr/>
+            <p:nvPr/>
+          </p:nvSpPr>
+          <p:spPr>
+            <a:xfrm>
+              <a:off x="2611120" y="1757680"/>
+              <a:ext cx="1808480" cy="528320"/>
+            </a:xfrm>
+            <a:prstGeom prst="roundRect">
+              <a:avLst/>
+            </a:prstGeom>
+            <a:solidFill>
+              <a:schemeClr val="accent4">
+                <a:lumMod val="20000"/>
+                <a:lumOff val="80000"/>
+              </a:schemeClr>
+            </a:solidFill>
+          </p:spPr>
+          <p:style>
+            <a:lnRef idx="2">
+              <a:schemeClr val="accent1">
+                <a:shade val="50000"/>
+              </a:schemeClr>
+            </a:lnRef>
+            <a:fillRef idx="1">
+              <a:schemeClr val="accent1"/>
+            </a:fillRef>
+            <a:effectRef idx="0">
+              <a:schemeClr val="accent1"/>
+            </a:effectRef>
+            <a:fontRef idx="minor">
+              <a:schemeClr val="lt1"/>
+            </a:fontRef>
+          </p:style>
+          <p:txBody>
+            <a:bodyPr rtlCol="0" anchor="ctr"/>
+            <a:lstStyle/>
+            <a:p>
+              <a:pPr algn="ctr">
+                <a:defRPr/>
+              </a:pPr>
+              <a:r>
+                <a:rPr kumimoji="1" lang="ja-JP" altLang="en-US">
+                  <a:solidFill>
+                    <a:schemeClr val="tx1"/>
+                  </a:solidFill>
+                </a:rPr>
+                <a:t>Thread</a:t>
+              </a:r>
+            </a:p>
+          </p:txBody>
+        </p:sp>
+        <p:sp>
+          <p:nvSpPr>
+            <p:cNvPr id="24" name="角丸四角形 23">
+              <a:extLst>
+                <a:ext uri="{FF2B5EF4-FFF2-40B4-BE49-F238E27FC236}">
+                  <a16:creationId xmlns:a16="http://schemas.microsoft.com/office/drawing/2014/main" id="{0E677A89-CC83-1F4B-9F3B-221931D4013A}"/>
+                </a:ext>
+              </a:extLst>
+            </p:cNvPr>
+            <p:cNvSpPr/>
+            <p:nvPr/>
+          </p:nvSpPr>
+          <p:spPr>
+            <a:xfrm>
+              <a:off x="2600960" y="2407920"/>
+              <a:ext cx="1808480" cy="528320"/>
+            </a:xfrm>
+            <a:prstGeom prst="roundRect">
+              <a:avLst/>
+            </a:prstGeom>
+            <a:solidFill>
+              <a:schemeClr val="accent4">
+                <a:lumMod val="20000"/>
+                <a:lumOff val="80000"/>
+              </a:schemeClr>
+            </a:solidFill>
+          </p:spPr>
+          <p:style>
+            <a:lnRef idx="2">
+              <a:schemeClr val="accent1">
+                <a:shade val="50000"/>
+              </a:schemeClr>
+            </a:lnRef>
+            <a:fillRef idx="1">
+              <a:schemeClr val="accent1"/>
+            </a:fillRef>
+            <a:effectRef idx="0">
+              <a:schemeClr val="accent1"/>
+            </a:effectRef>
+            <a:fontRef idx="minor">
+              <a:schemeClr val="lt1"/>
+            </a:fontRef>
+          </p:style>
+          <p:txBody>
+            <a:bodyPr rtlCol="0" anchor="ctr"/>
+            <a:lstStyle/>
+            <a:p>
+              <a:pPr algn="ctr">
+                <a:defRPr/>
+              </a:pPr>
+              <a:r>
+                <a:rPr kumimoji="1" lang="ja-JP" altLang="en-US">
+                  <a:solidFill>
+                    <a:schemeClr val="tx1"/>
+                  </a:solidFill>
+                </a:rPr>
+                <a:t>Thread</a:t>
+              </a:r>
+            </a:p>
+          </p:txBody>
+        </p:sp>
+        <p:sp>
+          <p:nvSpPr>
+            <p:cNvPr id="25" name="角丸四角形 24">
+              <a:extLst>
+                <a:ext uri="{FF2B5EF4-FFF2-40B4-BE49-F238E27FC236}">
+                  <a16:creationId xmlns:a16="http://schemas.microsoft.com/office/drawing/2014/main" id="{D9048C0A-F44F-B64A-AC34-F94FAD139451}"/>
+                </a:ext>
+              </a:extLst>
+            </p:cNvPr>
+            <p:cNvSpPr/>
+            <p:nvPr/>
+          </p:nvSpPr>
+          <p:spPr>
+            <a:xfrm>
+              <a:off x="2600960" y="3017520"/>
+              <a:ext cx="1808480" cy="528320"/>
+            </a:xfrm>
+            <a:prstGeom prst="roundRect">
+              <a:avLst/>
+            </a:prstGeom>
+            <a:solidFill>
+              <a:schemeClr val="accent4">
+                <a:lumMod val="20000"/>
+                <a:lumOff val="80000"/>
+              </a:schemeClr>
+            </a:solidFill>
+          </p:spPr>
+          <p:style>
+            <a:lnRef idx="2">
+              <a:schemeClr val="accent1">
+                <a:shade val="50000"/>
+              </a:schemeClr>
+            </a:lnRef>
+            <a:fillRef idx="1">
+              <a:schemeClr val="accent1"/>
+            </a:fillRef>
+            <a:effectRef idx="0">
+              <a:schemeClr val="accent1"/>
+            </a:effectRef>
+            <a:fontRef idx="minor">
+              <a:schemeClr val="lt1"/>
+            </a:fontRef>
+          </p:style>
+          <p:txBody>
+            <a:bodyPr rtlCol="0" anchor="ctr"/>
+            <a:lstStyle/>
+            <a:p>
+              <a:pPr algn="ctr">
+                <a:defRPr/>
+              </a:pPr>
+              <a:r>
+                <a:rPr kumimoji="1" lang="ja-JP" altLang="en-US">
+                  <a:solidFill>
+                    <a:schemeClr val="tx1"/>
+                  </a:solidFill>
+                </a:rPr>
+                <a:t>Thread</a:t>
+              </a:r>
+            </a:p>
+          </p:txBody>
+        </p:sp>
+        <p:sp>
+          <p:nvSpPr>
+            <p:cNvPr id="26" name="正方形/長方形 25">
+              <a:extLst>
+                <a:ext uri="{FF2B5EF4-FFF2-40B4-BE49-F238E27FC236}">
+                  <a16:creationId xmlns:a16="http://schemas.microsoft.com/office/drawing/2014/main" id="{330FA818-5C9C-114B-A680-E9EC7CEDF796}"/>
+                </a:ext>
+              </a:extLst>
+            </p:cNvPr>
+            <p:cNvSpPr/>
+            <p:nvPr/>
+          </p:nvSpPr>
+          <p:spPr>
+            <a:xfrm>
+              <a:off x="914400" y="1422400"/>
+              <a:ext cx="1209040" cy="1717040"/>
+            </a:xfrm>
+            <a:prstGeom prst="rect">
+              <a:avLst/>
+            </a:prstGeom>
+            <a:solidFill>
+              <a:schemeClr val="accent6">
+                <a:lumMod val="20000"/>
+                <a:lumOff val="80000"/>
+              </a:schemeClr>
+            </a:solidFill>
+          </p:spPr>
+          <p:style>
+            <a:lnRef idx="2">
+              <a:schemeClr val="accent1">
+                <a:shade val="50000"/>
+              </a:schemeClr>
+            </a:lnRef>
+            <a:fillRef idx="1">
+              <a:schemeClr val="accent1"/>
+            </a:fillRef>
+            <a:effectRef idx="0">
+              <a:schemeClr val="accent1"/>
+            </a:effectRef>
+            <a:fontRef idx="minor">
+              <a:schemeClr val="lt1"/>
+            </a:fontRef>
+          </p:style>
+          <p:txBody>
+            <a:bodyPr rtlCol="0" anchor="ctr"/>
+            <a:lstStyle/>
+            <a:p>
+              <a:pPr algn="ctr">
+                <a:defRPr/>
+              </a:pPr>
+              <a:r>
+                <a:rPr kumimoji="1" lang="ja-JP" altLang="en-US">
+                  <a:solidFill>
+                    <a:schemeClr val="tx1"/>
+                  </a:solidFill>
+                </a:rPr>
+                <a:t>Memory</a:t>
+              </a:r>
+            </a:p>
+          </p:txBody>
+        </p:sp>
+        <p:cxnSp>
+          <p:nvCxnSpPr>
+            <p:cNvPr id="27" name="直線矢印コネクタ 26">
+              <a:extLst>
+                <a:ext uri="{FF2B5EF4-FFF2-40B4-BE49-F238E27FC236}">
+                  <a16:creationId xmlns:a16="http://schemas.microsoft.com/office/drawing/2014/main" id="{5A00E4D0-82DB-4643-91C1-5D572B862321}"/>
+                </a:ext>
+              </a:extLst>
+            </p:cNvPr>
+            <p:cNvCxnSpPr>
+              <a:stCxn id="21" idx="1"/>
+            </p:cNvCxnSpPr>
+            <p:nvPr/>
+          </p:nvCxnSpPr>
+          <p:spPr>
+            <a:xfrm flipH="1">
+              <a:off x="2123440" y="1412240"/>
+              <a:ext cx="487680" cy="345440"/>
+            </a:xfrm>
+            <a:prstGeom prst="straightConnector1">
+              <a:avLst/>
+            </a:prstGeom>
+            <a:ln>
+              <a:tailEnd type="triangle"/>
+            </a:ln>
+          </p:spPr>
+          <p:style>
+            <a:lnRef idx="1">
+              <a:schemeClr val="accent1"/>
+            </a:lnRef>
+            <a:fillRef idx="0">
+              <a:schemeClr val="accent1"/>
+            </a:fillRef>
+            <a:effectRef idx="0">
+              <a:schemeClr val="accent1"/>
+            </a:effectRef>
+            <a:fontRef idx="minor">
+              <a:schemeClr val="tx1"/>
+            </a:fontRef>
+          </p:style>
+        </p:cxnSp>
+        <p:cxnSp>
+          <p:nvCxnSpPr>
+            <p:cNvPr id="28" name="直線矢印コネクタ 27">
+              <a:extLst>
+                <a:ext uri="{FF2B5EF4-FFF2-40B4-BE49-F238E27FC236}">
+                  <a16:creationId xmlns:a16="http://schemas.microsoft.com/office/drawing/2014/main" id="{FA4F4795-0A53-124A-98A4-2DFA4D2F3A0A}"/>
+                </a:ext>
+              </a:extLst>
+            </p:cNvPr>
+            <p:cNvCxnSpPr>
+              <a:stCxn id="23" idx="1"/>
+            </p:cNvCxnSpPr>
+            <p:nvPr/>
+          </p:nvCxnSpPr>
+          <p:spPr>
+            <a:xfrm flipH="1">
+              <a:off x="2123440" y="2021840"/>
+              <a:ext cx="487680" cy="101600"/>
+            </a:xfrm>
+            <a:prstGeom prst="straightConnector1">
+              <a:avLst/>
+            </a:prstGeom>
+            <a:ln>
+              <a:tailEnd type="triangle"/>
+            </a:ln>
+          </p:spPr>
+          <p:style>
+            <a:lnRef idx="1">
+              <a:schemeClr val="accent1"/>
+            </a:lnRef>
+            <a:fillRef idx="0">
+              <a:schemeClr val="accent1"/>
+            </a:fillRef>
+            <a:effectRef idx="0">
+              <a:schemeClr val="accent1"/>
+            </a:effectRef>
+            <a:fontRef idx="minor">
+              <a:schemeClr val="tx1"/>
+            </a:fontRef>
+          </p:style>
+        </p:cxnSp>
+        <p:cxnSp>
+          <p:nvCxnSpPr>
+            <p:cNvPr id="29" name="直線矢印コネクタ 28">
+              <a:extLst>
+                <a:ext uri="{FF2B5EF4-FFF2-40B4-BE49-F238E27FC236}">
+                  <a16:creationId xmlns:a16="http://schemas.microsoft.com/office/drawing/2014/main" id="{6BAA0578-D656-394E-AD8C-D23C0F114548}"/>
+                </a:ext>
+              </a:extLst>
+            </p:cNvPr>
+            <p:cNvCxnSpPr>
+              <a:stCxn id="24" idx="1"/>
+            </p:cNvCxnSpPr>
+            <p:nvPr/>
+          </p:nvCxnSpPr>
+          <p:spPr>
+            <a:xfrm flipH="1" flipV="1">
+              <a:off x="2113280" y="2560320"/>
+              <a:ext cx="487680" cy="111760"/>
+            </a:xfrm>
+            <a:prstGeom prst="straightConnector1">
+              <a:avLst/>
+            </a:prstGeom>
+            <a:ln>
+              <a:tailEnd type="triangle"/>
+            </a:ln>
+          </p:spPr>
+          <p:style>
+            <a:lnRef idx="1">
+              <a:schemeClr val="accent1"/>
+            </a:lnRef>
+            <a:fillRef idx="0">
+              <a:schemeClr val="accent1"/>
+            </a:fillRef>
+            <a:effectRef idx="0">
+              <a:schemeClr val="accent1"/>
+            </a:effectRef>
+            <a:fontRef idx="minor">
+              <a:schemeClr val="tx1"/>
+            </a:fontRef>
+          </p:style>
+        </p:cxnSp>
+        <p:cxnSp>
+          <p:nvCxnSpPr>
+            <p:cNvPr id="30" name="直線矢印コネクタ 29">
+              <a:extLst>
+                <a:ext uri="{FF2B5EF4-FFF2-40B4-BE49-F238E27FC236}">
+                  <a16:creationId xmlns:a16="http://schemas.microsoft.com/office/drawing/2014/main" id="{E064F325-A9E2-9049-9921-239E07261BB6}"/>
+                </a:ext>
+              </a:extLst>
+            </p:cNvPr>
+            <p:cNvCxnSpPr/>
+            <p:nvPr/>
+          </p:nvCxnSpPr>
+          <p:spPr>
+            <a:xfrm flipH="1" flipV="1">
+              <a:off x="2153920" y="2936240"/>
+              <a:ext cx="436880" cy="365760"/>
+            </a:xfrm>
+            <a:prstGeom prst="straightConnector1">
+              <a:avLst/>
+            </a:prstGeom>
+            <a:ln>
+              <a:tailEnd type="triangle"/>
+            </a:ln>
+          </p:spPr>
+          <p:style>
+            <a:lnRef idx="1">
+              <a:schemeClr val="accent1"/>
+            </a:lnRef>
+            <a:fillRef idx="0">
+              <a:schemeClr val="accent1"/>
+            </a:fillRef>
+            <a:effectRef idx="0">
+              <a:schemeClr val="accent1"/>
+            </a:effectRef>
+            <a:fontRef idx="minor">
+              <a:schemeClr val="tx1"/>
+            </a:fontRef>
+          </p:style>
+        </p:cxnSp>
+      </p:grpSp>
+      <p:sp>
+        <p:nvSpPr>
+          <p:cNvPr id="32" name="テキスト ボックス 31">
+            <a:extLst>
+              <a:ext uri="{FF2B5EF4-FFF2-40B4-BE49-F238E27FC236}">
+                <a16:creationId xmlns:a16="http://schemas.microsoft.com/office/drawing/2014/main" id="{D5E00358-5100-2241-9388-54364F76C123}"/>
+              </a:ext>
+            </a:extLst>
+          </p:cNvPr>
+          <p:cNvSpPr txBox="1"/>
+          <p:nvPr/>
+        </p:nvSpPr>
+        <p:spPr>
+          <a:xfrm>
+            <a:off x="152400" y="375920"/>
+            <a:ext cx="8879840" cy="461665"/>
+          </a:xfrm>
+          <a:prstGeom prst="rect">
+            <a:avLst/>
+          </a:prstGeom>
+          <a:noFill/>
+        </p:spPr>
+        <p:txBody>
+          <a:bodyPr wrap="square" rtlCol="0"/>
+          <a:lstStyle/>
+          <a:p>
+            <a:pPr algn="ctr">
+              <a:defRPr sz="2300"/>
+            </a:pPr>
+            <a:r>
+              <a:rPr kumimoji="1" lang="ja-JP" altLang="en-US" sz="2300"/>
+              <a:t>Operating system (OS)</a:t>
+            </a:r>
+            <a:endParaRPr kumimoji="1" lang="ja-JP" altLang="en-US" sz="2400"/>
+          </a:p>
+        </p:txBody>
+      </p:sp>
+    </p:spTree>
+    <p:extLst>
+      <p:ext uri="{BB962C8B-B14F-4D97-AF65-F5344CB8AC3E}">
+        <p14:creationId xmlns:p14="http://schemas.microsoft.com/office/powerpoint/2010/main" val="2411882396"/>
+      </p:ext>
+    </p:extLst>
+  </p:cSld>
+  <p:clrMapOvr>
+    <a:masterClrMapping/>
+  </p:clrMapOvr>
+</p:sld>
+</file>
+
+<file path=ppt/slides/slide3.xml><?xml version="1.0" encoding="utf-8"?>
+<p:sld xmlns:a="http://schemas.openxmlformats.org/drawingml/2006/main" xmlns:r="http://schemas.openxmlformats.org/officeDocument/2006/relationships" xmlns:p="http://schemas.openxmlformats.org/presentationml/2006/main">
+  <p:cSld>
+    <p:spTree>
+      <p:nvGrpSpPr>
+        <p:cNvPr id="1" name=""/>
+        <p:cNvGrpSpPr/>
+        <p:nvPr/>
+      </p:nvGrpSpPr>
+      <p:grpSpPr>
+        <a:xfrm>
+          <a:off x="0" y="0"/>
+          <a:ext cx="0" cy="0"/>
+          <a:chOff x="0" y="0"/>
+          <a:chExt cx="0" cy="0"/>
+        </a:xfrm>
+      </p:grpSpPr>
       <p:grpSp>
         <p:nvGrpSpPr>
           <p:cNvPr id="16" name="グループ化 15">
@@ -4035,7 +5324,2008 @@
 </p:sld>
 </file>
 
-<file path=ppt/slides/slide3.xml><?xml version="1.0" encoding="utf-8"?>
+<file path=ppt/slides/slide4.xml><?xml version="1.0" encoding="utf-8"?>
+<p:sld xmlns:a="http://schemas.openxmlformats.org/drawingml/2006/main" xmlns:r="http://schemas.openxmlformats.org/officeDocument/2006/relationships" xmlns:p="http://schemas.openxmlformats.org/presentationml/2006/main">
+  <p:cSld>
+    <p:spTree>
+      <p:nvGrpSpPr>
+        <p:cNvPr id="1" name=""/>
+        <p:cNvGrpSpPr/>
+        <p:nvPr/>
+      </p:nvGrpSpPr>
+      <p:grpSpPr>
+        <a:xfrm>
+          <a:off x="0" y="0"/>
+          <a:ext cx="0" cy="0"/>
+          <a:chOff x="0" y="0"/>
+          <a:chExt cx="0" cy="0"/>
+        </a:xfrm>
+      </p:grpSpPr>
+      <p:grpSp>
+        <p:nvGrpSpPr>
+          <p:cNvPr id="16" name="グループ化 15">
+            <a:extLst>
+              <a:ext uri="{FF2B5EF4-FFF2-40B4-BE49-F238E27FC236}">
+                <a16:creationId xmlns:a16="http://schemas.microsoft.com/office/drawing/2014/main" id="{AEE8C4B8-9868-054A-9A8A-207681878AC6}"/>
+              </a:ext>
+            </a:extLst>
+          </p:cNvPr>
+          <p:cNvGrpSpPr/>
+          <p:nvPr/>
+        </p:nvGrpSpPr>
+        <p:grpSpPr>
+          <a:xfrm>
+            <a:off x="497840" y="629920"/>
+            <a:ext cx="3627842" cy="3535680"/>
+            <a:chOff x="152400" y="325120"/>
+            <a:chExt cx="4399280" cy="4287520"/>
+          </a:xfrm>
+        </p:grpSpPr>
+        <p:sp>
+          <p:nvSpPr>
+            <p:cNvPr id="15" name="正方形/長方形 14">
+              <a:extLst>
+                <a:ext uri="{FF2B5EF4-FFF2-40B4-BE49-F238E27FC236}">
+                  <a16:creationId xmlns:a16="http://schemas.microsoft.com/office/drawing/2014/main" id="{3F28E56B-46F7-894F-8C58-467006BB23CB}"/>
+                </a:ext>
+              </a:extLst>
+            </p:cNvPr>
+            <p:cNvSpPr/>
+            <p:nvPr/>
+          </p:nvSpPr>
+          <p:spPr>
+            <a:xfrm>
+              <a:off x="172720" y="325120"/>
+              <a:ext cx="4378960" cy="4287520"/>
+            </a:xfrm>
+            <a:prstGeom prst="rect">
+              <a:avLst/>
+            </a:prstGeom>
+            <a:solidFill>
+              <a:schemeClr val="accent2">
+                <a:lumMod val="20000"/>
+                <a:lumOff val="80000"/>
+              </a:schemeClr>
+            </a:solidFill>
+          </p:spPr>
+          <p:style>
+            <a:lnRef idx="2">
+              <a:schemeClr val="accent1">
+                <a:shade val="50000"/>
+              </a:schemeClr>
+            </a:lnRef>
+            <a:fillRef idx="1">
+              <a:schemeClr val="accent1"/>
+            </a:fillRef>
+            <a:effectRef idx="0">
+              <a:schemeClr val="accent1"/>
+            </a:effectRef>
+            <a:fontRef idx="minor">
+              <a:schemeClr val="lt1"/>
+            </a:fontRef>
+          </p:style>
+          <p:txBody>
+            <a:bodyPr rtlCol="0" anchor="ctr"/>
+            <a:lstStyle/>
+            <a:p>
+              <a:pPr algn="ctr"/>
+              <a:endParaRPr kumimoji="1" lang="ja-JP" altLang="en-US" sz="1600"/>
+            </a:p>
+          </p:txBody>
+        </p:sp>
+        <p:grpSp>
+          <p:nvGrpSpPr>
+            <p:cNvPr id="2" name="グループ化 1">
+              <a:extLst>
+                <a:ext uri="{FF2B5EF4-FFF2-40B4-BE49-F238E27FC236}">
+                  <a16:creationId xmlns:a16="http://schemas.microsoft.com/office/drawing/2014/main" id="{C9E00260-194B-5242-A410-A730F5BB1C27}"/>
+                </a:ext>
+              </a:extLst>
+            </p:cNvPr>
+            <p:cNvGrpSpPr/>
+            <p:nvPr/>
+          </p:nvGrpSpPr>
+          <p:grpSpPr>
+            <a:xfrm>
+              <a:off x="609600" y="1127760"/>
+              <a:ext cx="3738880" cy="3281680"/>
+              <a:chOff x="802640" y="538480"/>
+              <a:chExt cx="3738880" cy="3281680"/>
+            </a:xfrm>
+          </p:grpSpPr>
+          <p:sp>
+            <p:nvSpPr>
+              <p:cNvPr id="3" name="正方形/長方形 2">
+                <a:extLst>
+                  <a:ext uri="{FF2B5EF4-FFF2-40B4-BE49-F238E27FC236}">
+                    <a16:creationId xmlns:a16="http://schemas.microsoft.com/office/drawing/2014/main" id="{E068502C-7BB1-874B-97CC-6832231A681E}"/>
+                  </a:ext>
+                </a:extLst>
+              </p:cNvPr>
+              <p:cNvSpPr/>
+              <p:nvPr/>
+            </p:nvSpPr>
+            <p:spPr>
+              <a:xfrm>
+                <a:off x="802640" y="548640"/>
+                <a:ext cx="3738880" cy="3271520"/>
+              </a:xfrm>
+              <a:prstGeom prst="rect">
+                <a:avLst/>
+              </a:prstGeom>
+              <a:solidFill>
+                <a:schemeClr val="accent1">
+                  <a:lumMod val="20000"/>
+                  <a:lumOff val="80000"/>
+                </a:schemeClr>
+              </a:solidFill>
+              <a:ln>
+                <a:solidFill>
+                  <a:schemeClr val="tx1"/>
+                </a:solidFill>
+              </a:ln>
+            </p:spPr>
+            <p:style>
+              <a:lnRef idx="2">
+                <a:schemeClr val="accent1">
+                  <a:shade val="50000"/>
+                </a:schemeClr>
+              </a:lnRef>
+              <a:fillRef idx="1">
+                <a:schemeClr val="accent1"/>
+              </a:fillRef>
+              <a:effectRef idx="0">
+                <a:schemeClr val="accent1"/>
+              </a:effectRef>
+              <a:fontRef idx="minor">
+                <a:schemeClr val="lt1"/>
+              </a:fontRef>
+            </p:style>
+            <p:txBody>
+              <a:bodyPr rtlCol="0" anchor="ctr"/>
+              <a:lstStyle/>
+              <a:p>
+                <a:pPr algn="ctr"/>
+                <a:endParaRPr kumimoji="1" lang="ja-JP" altLang="en-US" sz="3200">
+                  <a:solidFill>
+                    <a:schemeClr val="tx1"/>
+                  </a:solidFill>
+                </a:endParaRPr>
+              </a:p>
+            </p:txBody>
+          </p:sp>
+          <p:sp>
+            <p:nvSpPr>
+              <p:cNvPr id="4" name="角丸四角形 3">
+                <a:extLst>
+                  <a:ext uri="{FF2B5EF4-FFF2-40B4-BE49-F238E27FC236}">
+                    <a16:creationId xmlns:a16="http://schemas.microsoft.com/office/drawing/2014/main" id="{3F355A3C-F8D1-2947-89D3-EB88CF82A7F3}"/>
+                  </a:ext>
+                </a:extLst>
+              </p:cNvPr>
+              <p:cNvSpPr/>
+              <p:nvPr/>
+            </p:nvSpPr>
+            <p:spPr>
+              <a:xfrm>
+                <a:off x="2611120" y="1148080"/>
+                <a:ext cx="1808480" cy="528320"/>
+              </a:xfrm>
+              <a:prstGeom prst="roundRect">
+                <a:avLst/>
+              </a:prstGeom>
+              <a:solidFill>
+                <a:schemeClr val="accent4">
+                  <a:lumMod val="20000"/>
+                  <a:lumOff val="80000"/>
+                </a:schemeClr>
+              </a:solidFill>
+            </p:spPr>
+            <p:style>
+              <a:lnRef idx="2">
+                <a:schemeClr val="accent1">
+                  <a:shade val="50000"/>
+                </a:schemeClr>
+              </a:lnRef>
+              <a:fillRef idx="1">
+                <a:schemeClr val="accent1"/>
+              </a:fillRef>
+              <a:effectRef idx="0">
+                <a:schemeClr val="accent1"/>
+              </a:effectRef>
+              <a:fontRef idx="minor">
+                <a:schemeClr val="lt1"/>
+              </a:fontRef>
+            </p:style>
+            <p:txBody>
+              <a:bodyPr rtlCol="0" anchor="ctr"/>
+              <a:lstStyle/>
+              <a:p>
+                <a:pPr algn="ctr">
+                  <a:defRPr/>
+                </a:pPr>
+                <a:r>
+                  <a:rPr kumimoji="1" lang="ja-JP" altLang="en-US" sz="1600">
+                    <a:solidFill>
+                      <a:schemeClr val="tx1"/>
+                    </a:solidFill>
+                  </a:rPr>
+                  <a:t>Thread</a:t>
+                </a:r>
+              </a:p>
+            </p:txBody>
+          </p:sp>
+          <p:sp>
+            <p:nvSpPr>
+              <p:cNvPr id="5" name="テキスト ボックス 4">
+                <a:extLst>
+                  <a:ext uri="{FF2B5EF4-FFF2-40B4-BE49-F238E27FC236}">
+                    <a16:creationId xmlns:a16="http://schemas.microsoft.com/office/drawing/2014/main" id="{FC74CAE7-82B7-E749-A2C4-25FB75978E62}"/>
+                  </a:ext>
+                </a:extLst>
+              </p:cNvPr>
+              <p:cNvSpPr txBox="1"/>
+              <p:nvPr/>
+            </p:nvSpPr>
+            <p:spPr>
+              <a:xfrm>
+                <a:off x="812800" y="538480"/>
+                <a:ext cx="3718560" cy="559835"/>
+              </a:xfrm>
+              <a:prstGeom prst="rect">
+                <a:avLst/>
+              </a:prstGeom>
+              <a:noFill/>
+            </p:spPr>
+            <p:txBody>
+              <a:bodyPr wrap="square" rtlCol="0">
+                <a:spAutoFit/>
+              </a:bodyPr>
+              <a:lstStyle/>
+              <a:p>
+                <a:pPr algn="ctr">
+                  <a:defRPr/>
+                </a:pPr>
+                <a:r>
+                  <a:rPr kumimoji="1" lang="ja-JP" altLang="en-US" sz="2400"/>
+                  <a:t>Process</a:t>
+                </a:r>
+              </a:p>
+            </p:txBody>
+          </p:sp>
+          <p:sp>
+            <p:nvSpPr>
+              <p:cNvPr id="6" name="角丸四角形 5">
+                <a:extLst>
+                  <a:ext uri="{FF2B5EF4-FFF2-40B4-BE49-F238E27FC236}">
+                    <a16:creationId xmlns:a16="http://schemas.microsoft.com/office/drawing/2014/main" id="{FB1D3261-FE03-A045-9428-5B752DA3BFE2}"/>
+                  </a:ext>
+                </a:extLst>
+              </p:cNvPr>
+              <p:cNvSpPr/>
+              <p:nvPr/>
+            </p:nvSpPr>
+            <p:spPr>
+              <a:xfrm>
+                <a:off x="2611120" y="1757680"/>
+                <a:ext cx="1808480" cy="528320"/>
+              </a:xfrm>
+              <a:prstGeom prst="roundRect">
+                <a:avLst/>
+              </a:prstGeom>
+              <a:solidFill>
+                <a:schemeClr val="accent4">
+                  <a:lumMod val="20000"/>
+                  <a:lumOff val="80000"/>
+                </a:schemeClr>
+              </a:solidFill>
+            </p:spPr>
+            <p:style>
+              <a:lnRef idx="2">
+                <a:schemeClr val="accent1">
+                  <a:shade val="50000"/>
+                </a:schemeClr>
+              </a:lnRef>
+              <a:fillRef idx="1">
+                <a:schemeClr val="accent1"/>
+              </a:fillRef>
+              <a:effectRef idx="0">
+                <a:schemeClr val="accent1"/>
+              </a:effectRef>
+              <a:fontRef idx="minor">
+                <a:schemeClr val="lt1"/>
+              </a:fontRef>
+            </p:style>
+            <p:txBody>
+              <a:bodyPr rtlCol="0" anchor="ctr"/>
+              <a:lstStyle/>
+              <a:p>
+                <a:pPr algn="ctr">
+                  <a:defRPr/>
+                </a:pPr>
+                <a:r>
+                  <a:rPr kumimoji="1" lang="ja-JP" altLang="en-US" sz="1600">
+                    <a:solidFill>
+                      <a:schemeClr val="tx1"/>
+                    </a:solidFill>
+                  </a:rPr>
+                  <a:t>Thread</a:t>
+                </a:r>
+              </a:p>
+            </p:txBody>
+          </p:sp>
+          <p:sp>
+            <p:nvSpPr>
+              <p:cNvPr id="7" name="角丸四角形 6">
+                <a:extLst>
+                  <a:ext uri="{FF2B5EF4-FFF2-40B4-BE49-F238E27FC236}">
+                    <a16:creationId xmlns:a16="http://schemas.microsoft.com/office/drawing/2014/main" id="{CBC1103E-EF20-4B46-AA6C-B5C5176E2165}"/>
+                  </a:ext>
+                </a:extLst>
+              </p:cNvPr>
+              <p:cNvSpPr/>
+              <p:nvPr/>
+            </p:nvSpPr>
+            <p:spPr>
+              <a:xfrm>
+                <a:off x="2600960" y="2407920"/>
+                <a:ext cx="1808480" cy="528320"/>
+              </a:xfrm>
+              <a:prstGeom prst="roundRect">
+                <a:avLst/>
+              </a:prstGeom>
+              <a:solidFill>
+                <a:schemeClr val="accent4">
+                  <a:lumMod val="20000"/>
+                  <a:lumOff val="80000"/>
+                </a:schemeClr>
+              </a:solidFill>
+            </p:spPr>
+            <p:style>
+              <a:lnRef idx="2">
+                <a:schemeClr val="accent1">
+                  <a:shade val="50000"/>
+                </a:schemeClr>
+              </a:lnRef>
+              <a:fillRef idx="1">
+                <a:schemeClr val="accent1"/>
+              </a:fillRef>
+              <a:effectRef idx="0">
+                <a:schemeClr val="accent1"/>
+              </a:effectRef>
+              <a:fontRef idx="minor">
+                <a:schemeClr val="lt1"/>
+              </a:fontRef>
+            </p:style>
+            <p:txBody>
+              <a:bodyPr rtlCol="0" anchor="ctr"/>
+              <a:lstStyle/>
+              <a:p>
+                <a:pPr algn="ctr">
+                  <a:defRPr/>
+                </a:pPr>
+                <a:r>
+                  <a:rPr kumimoji="1" lang="ja-JP" altLang="en-US" sz="1600">
+                    <a:solidFill>
+                      <a:schemeClr val="tx1"/>
+                    </a:solidFill>
+                  </a:rPr>
+                  <a:t>Thread</a:t>
+                </a:r>
+              </a:p>
+            </p:txBody>
+          </p:sp>
+          <p:sp>
+            <p:nvSpPr>
+              <p:cNvPr id="8" name="角丸四角形 7">
+                <a:extLst>
+                  <a:ext uri="{FF2B5EF4-FFF2-40B4-BE49-F238E27FC236}">
+                    <a16:creationId xmlns:a16="http://schemas.microsoft.com/office/drawing/2014/main" id="{0FB6D8BD-BC47-6341-BB2D-E1F1DBE342A7}"/>
+                  </a:ext>
+                </a:extLst>
+              </p:cNvPr>
+              <p:cNvSpPr/>
+              <p:nvPr/>
+            </p:nvSpPr>
+            <p:spPr>
+              <a:xfrm>
+                <a:off x="2600960" y="3017520"/>
+                <a:ext cx="1808480" cy="528320"/>
+              </a:xfrm>
+              <a:prstGeom prst="roundRect">
+                <a:avLst/>
+              </a:prstGeom>
+              <a:solidFill>
+                <a:schemeClr val="accent4">
+                  <a:lumMod val="20000"/>
+                  <a:lumOff val="80000"/>
+                </a:schemeClr>
+              </a:solidFill>
+            </p:spPr>
+            <p:style>
+              <a:lnRef idx="2">
+                <a:schemeClr val="accent1">
+                  <a:shade val="50000"/>
+                </a:schemeClr>
+              </a:lnRef>
+              <a:fillRef idx="1">
+                <a:schemeClr val="accent1"/>
+              </a:fillRef>
+              <a:effectRef idx="0">
+                <a:schemeClr val="accent1"/>
+              </a:effectRef>
+              <a:fontRef idx="minor">
+                <a:schemeClr val="lt1"/>
+              </a:fontRef>
+            </p:style>
+            <p:txBody>
+              <a:bodyPr rtlCol="0" anchor="ctr"/>
+              <a:lstStyle/>
+              <a:p>
+                <a:pPr algn="ctr">
+                  <a:defRPr/>
+                </a:pPr>
+                <a:r>
+                  <a:rPr kumimoji="1" lang="ja-JP" altLang="en-US" sz="1600">
+                    <a:solidFill>
+                      <a:schemeClr val="tx1"/>
+                    </a:solidFill>
+                  </a:rPr>
+                  <a:t>Thread</a:t>
+                </a:r>
+              </a:p>
+            </p:txBody>
+          </p:sp>
+          <p:sp>
+            <p:nvSpPr>
+              <p:cNvPr id="9" name="正方形/長方形 8">
+                <a:extLst>
+                  <a:ext uri="{FF2B5EF4-FFF2-40B4-BE49-F238E27FC236}">
+                    <a16:creationId xmlns:a16="http://schemas.microsoft.com/office/drawing/2014/main" id="{408221E3-C623-6847-BC0D-9D33B06EA2EA}"/>
+                  </a:ext>
+                </a:extLst>
+              </p:cNvPr>
+              <p:cNvSpPr/>
+              <p:nvPr/>
+            </p:nvSpPr>
+            <p:spPr>
+              <a:xfrm>
+                <a:off x="914400" y="1422400"/>
+                <a:ext cx="1209040" cy="1717040"/>
+              </a:xfrm>
+              <a:prstGeom prst="rect">
+                <a:avLst/>
+              </a:prstGeom>
+              <a:solidFill>
+                <a:schemeClr val="accent6">
+                  <a:lumMod val="20000"/>
+                  <a:lumOff val="80000"/>
+                </a:schemeClr>
+              </a:solidFill>
+            </p:spPr>
+            <p:style>
+              <a:lnRef idx="2">
+                <a:schemeClr val="accent1">
+                  <a:shade val="50000"/>
+                </a:schemeClr>
+              </a:lnRef>
+              <a:fillRef idx="1">
+                <a:schemeClr val="accent1"/>
+              </a:fillRef>
+              <a:effectRef idx="0">
+                <a:schemeClr val="accent1"/>
+              </a:effectRef>
+              <a:fontRef idx="minor">
+                <a:schemeClr val="lt1"/>
+              </a:fontRef>
+            </p:style>
+            <p:txBody>
+              <a:bodyPr rtlCol="0" anchor="ctr"/>
+              <a:lstStyle/>
+              <a:p>
+                <a:pPr algn="ctr">
+                  <a:defRPr/>
+                </a:pPr>
+                <a:r>
+                  <a:rPr kumimoji="1" lang="ja-JP" altLang="en-US" sz="1600">
+                    <a:solidFill>
+                      <a:schemeClr val="tx1"/>
+                    </a:solidFill>
+                  </a:rPr>
+                  <a:t>Memory</a:t>
+                </a:r>
+              </a:p>
+            </p:txBody>
+          </p:sp>
+          <p:cxnSp>
+            <p:nvCxnSpPr>
+              <p:cNvPr id="10" name="直線矢印コネクタ 9">
+                <a:extLst>
+                  <a:ext uri="{FF2B5EF4-FFF2-40B4-BE49-F238E27FC236}">
+                    <a16:creationId xmlns:a16="http://schemas.microsoft.com/office/drawing/2014/main" id="{B5612549-49EF-1546-B145-697FEEE343CD}"/>
+                  </a:ext>
+                </a:extLst>
+              </p:cNvPr>
+              <p:cNvCxnSpPr>
+                <a:stCxn id="4" idx="1"/>
+              </p:cNvCxnSpPr>
+              <p:nvPr/>
+            </p:nvCxnSpPr>
+            <p:spPr>
+              <a:xfrm flipH="1">
+                <a:off x="2123440" y="1412240"/>
+                <a:ext cx="487680" cy="345440"/>
+              </a:xfrm>
+              <a:prstGeom prst="straightConnector1">
+                <a:avLst/>
+              </a:prstGeom>
+              <a:ln>
+                <a:tailEnd type="triangle"/>
+              </a:ln>
+            </p:spPr>
+            <p:style>
+              <a:lnRef idx="1">
+                <a:schemeClr val="accent1"/>
+              </a:lnRef>
+              <a:fillRef idx="0">
+                <a:schemeClr val="accent1"/>
+              </a:fillRef>
+              <a:effectRef idx="0">
+                <a:schemeClr val="accent1"/>
+              </a:effectRef>
+              <a:fontRef idx="minor">
+                <a:schemeClr val="tx1"/>
+              </a:fontRef>
+            </p:style>
+          </p:cxnSp>
+          <p:cxnSp>
+            <p:nvCxnSpPr>
+              <p:cNvPr id="11" name="直線矢印コネクタ 10">
+                <a:extLst>
+                  <a:ext uri="{FF2B5EF4-FFF2-40B4-BE49-F238E27FC236}">
+                    <a16:creationId xmlns:a16="http://schemas.microsoft.com/office/drawing/2014/main" id="{71A96666-5166-2D43-90CD-53C7711EB536}"/>
+                  </a:ext>
+                </a:extLst>
+              </p:cNvPr>
+              <p:cNvCxnSpPr>
+                <a:stCxn id="6" idx="1"/>
+              </p:cNvCxnSpPr>
+              <p:nvPr/>
+            </p:nvCxnSpPr>
+            <p:spPr>
+              <a:xfrm flipH="1">
+                <a:off x="2123440" y="2021840"/>
+                <a:ext cx="487680" cy="101600"/>
+              </a:xfrm>
+              <a:prstGeom prst="straightConnector1">
+                <a:avLst/>
+              </a:prstGeom>
+              <a:ln>
+                <a:tailEnd type="triangle"/>
+              </a:ln>
+            </p:spPr>
+            <p:style>
+              <a:lnRef idx="1">
+                <a:schemeClr val="accent1"/>
+              </a:lnRef>
+              <a:fillRef idx="0">
+                <a:schemeClr val="accent1"/>
+              </a:fillRef>
+              <a:effectRef idx="0">
+                <a:schemeClr val="accent1"/>
+              </a:effectRef>
+              <a:fontRef idx="minor">
+                <a:schemeClr val="tx1"/>
+              </a:fontRef>
+            </p:style>
+          </p:cxnSp>
+          <p:cxnSp>
+            <p:nvCxnSpPr>
+              <p:cNvPr id="12" name="直線矢印コネクタ 11">
+                <a:extLst>
+                  <a:ext uri="{FF2B5EF4-FFF2-40B4-BE49-F238E27FC236}">
+                    <a16:creationId xmlns:a16="http://schemas.microsoft.com/office/drawing/2014/main" id="{6C931A63-9819-4444-BDE1-7CEA60A45EFE}"/>
+                  </a:ext>
+                </a:extLst>
+              </p:cNvPr>
+              <p:cNvCxnSpPr>
+                <a:stCxn id="7" idx="1"/>
+              </p:cNvCxnSpPr>
+              <p:nvPr/>
+            </p:nvCxnSpPr>
+            <p:spPr>
+              <a:xfrm flipH="1" flipV="1">
+                <a:off x="2113280" y="2560320"/>
+                <a:ext cx="487680" cy="111760"/>
+              </a:xfrm>
+              <a:prstGeom prst="straightConnector1">
+                <a:avLst/>
+              </a:prstGeom>
+              <a:ln>
+                <a:tailEnd type="triangle"/>
+              </a:ln>
+            </p:spPr>
+            <p:style>
+              <a:lnRef idx="1">
+                <a:schemeClr val="accent1"/>
+              </a:lnRef>
+              <a:fillRef idx="0">
+                <a:schemeClr val="accent1"/>
+              </a:fillRef>
+              <a:effectRef idx="0">
+                <a:schemeClr val="accent1"/>
+              </a:effectRef>
+              <a:fontRef idx="minor">
+                <a:schemeClr val="tx1"/>
+              </a:fontRef>
+            </p:style>
+          </p:cxnSp>
+          <p:cxnSp>
+            <p:nvCxnSpPr>
+              <p:cNvPr id="13" name="直線矢印コネクタ 12">
+                <a:extLst>
+                  <a:ext uri="{FF2B5EF4-FFF2-40B4-BE49-F238E27FC236}">
+                    <a16:creationId xmlns:a16="http://schemas.microsoft.com/office/drawing/2014/main" id="{1682C217-9496-9048-ACFE-33B938197C91}"/>
+                  </a:ext>
+                </a:extLst>
+              </p:cNvPr>
+              <p:cNvCxnSpPr/>
+              <p:nvPr/>
+            </p:nvCxnSpPr>
+            <p:spPr>
+              <a:xfrm flipH="1" flipV="1">
+                <a:off x="2153920" y="2936240"/>
+                <a:ext cx="436880" cy="365760"/>
+              </a:xfrm>
+              <a:prstGeom prst="straightConnector1">
+                <a:avLst/>
+              </a:prstGeom>
+              <a:ln>
+                <a:tailEnd type="triangle"/>
+              </a:ln>
+            </p:spPr>
+            <p:style>
+              <a:lnRef idx="1">
+                <a:schemeClr val="accent1"/>
+              </a:lnRef>
+              <a:fillRef idx="0">
+                <a:schemeClr val="accent1"/>
+              </a:fillRef>
+              <a:effectRef idx="0">
+                <a:schemeClr val="accent1"/>
+              </a:effectRef>
+              <a:fontRef idx="minor">
+                <a:schemeClr val="tx1"/>
+              </a:fontRef>
+            </p:style>
+          </p:cxnSp>
+        </p:grpSp>
+        <p:sp>
+          <p:nvSpPr>
+            <p:cNvPr id="14" name="テキスト ボックス 13">
+              <a:extLst>
+                <a:ext uri="{FF2B5EF4-FFF2-40B4-BE49-F238E27FC236}">
+                  <a16:creationId xmlns:a16="http://schemas.microsoft.com/office/drawing/2014/main" id="{3ABDFB2A-FFE3-C34F-8842-9E86A76AB72A}"/>
+                </a:ext>
+              </a:extLst>
+            </p:cNvPr>
+            <p:cNvSpPr txBox="1"/>
+            <p:nvPr/>
+          </p:nvSpPr>
+          <p:spPr>
+            <a:xfrm>
+              <a:off x="152400" y="375920"/>
+              <a:ext cx="4358639" cy="485191"/>
+            </a:xfrm>
+            <a:prstGeom prst="rect">
+              <a:avLst/>
+            </a:prstGeom>
+            <a:noFill/>
+          </p:spPr>
+          <p:txBody>
+            <a:bodyPr wrap="square" rtlCol="0">
+              <a:spAutoFit/>
+            </a:bodyPr>
+            <a:lstStyle/>
+            <a:p>
+              <a:pPr algn="ctr">
+                <a:defRPr/>
+              </a:pPr>
+              <a:r>
+                <a:rPr kumimoji="1" lang="en-US" altLang="ja-JP" sz="2000"/>
+                <a:t>OS</a:t>
+              </a:r>
+              <a:endParaRPr kumimoji="1" lang="ja-JP" altLang="en-US" sz="2000"/>
+            </a:p>
+          </p:txBody>
+        </p:sp>
+      </p:grpSp>
+      <p:sp>
+        <p:nvSpPr>
+          <p:cNvPr id="17" name="テキスト ボックス 16">
+            <a:extLst>
+              <a:ext uri="{FF2B5EF4-FFF2-40B4-BE49-F238E27FC236}">
+                <a16:creationId xmlns:a16="http://schemas.microsoft.com/office/drawing/2014/main" id="{05839114-3F9D-2F41-A69D-B17642279861}"/>
+              </a:ext>
+            </a:extLst>
+          </p:cNvPr>
+          <p:cNvSpPr txBox="1"/>
+          <p:nvPr/>
+        </p:nvSpPr>
+        <p:spPr>
+          <a:xfrm>
+            <a:off x="1300480" y="101600"/>
+            <a:ext cx="2031325" cy="461665"/>
+          </a:xfrm>
+          <a:prstGeom prst="rect">
+            <a:avLst/>
+          </a:prstGeom>
+          <a:noFill/>
+        </p:spPr>
+        <p:txBody>
+          <a:bodyPr wrap="square" rtlCol="0">
+            <a:normAutofit/>
+          </a:bodyPr>
+          <a:lstStyle/>
+          <a:p>
+            <a:pPr>
+              <a:defRPr/>
+            </a:pPr>
+            <a:r>
+              <a:rPr kumimoji="1" lang="ja-JP" altLang="en-US" sz="2400"/>
+              <a:t>Thread parallelism</a:t>
+            </a:r>
+          </a:p>
+        </p:txBody>
+      </p:sp>
+      <p:pic>
+        <p:nvPicPr>
+          <p:cNvPr id="19" name="図 18">
+            <a:extLst>
+              <a:ext uri="{FF2B5EF4-FFF2-40B4-BE49-F238E27FC236}">
+                <a16:creationId xmlns:a16="http://schemas.microsoft.com/office/drawing/2014/main" id="{D7C7935E-7383-B445-95C0-511C2C889591}"/>
+              </a:ext>
+            </a:extLst>
+          </p:cNvPr>
+          <p:cNvPicPr>
+            <a:picLocks noChangeAspect="1"/>
+          </p:cNvPicPr>
+          <p:nvPr/>
+        </p:nvPicPr>
+        <p:blipFill>
+          <a:blip r:embed="rId2"/>
+          <a:stretch>
+            <a:fillRect/>
+          </a:stretch>
+        </p:blipFill>
+        <p:spPr>
+          <a:xfrm>
+            <a:off x="482600" y="4360544"/>
+            <a:ext cx="584200" cy="569595"/>
+          </a:xfrm>
+          <a:prstGeom prst="rect">
+            <a:avLst/>
+          </a:prstGeom>
+        </p:spPr>
+      </p:pic>
+      <p:pic>
+        <p:nvPicPr>
+          <p:cNvPr id="20" name="図 19">
+            <a:extLst>
+              <a:ext uri="{FF2B5EF4-FFF2-40B4-BE49-F238E27FC236}">
+                <a16:creationId xmlns:a16="http://schemas.microsoft.com/office/drawing/2014/main" id="{BF743EA6-FF9E-9B4E-A62A-10480E6ADB9E}"/>
+              </a:ext>
+            </a:extLst>
+          </p:cNvPr>
+          <p:cNvPicPr>
+            <a:picLocks noChangeAspect="1"/>
+          </p:cNvPicPr>
+          <p:nvPr/>
+        </p:nvPicPr>
+        <p:blipFill>
+          <a:blip r:embed="rId3"/>
+          <a:stretch>
+            <a:fillRect/>
+          </a:stretch>
+        </p:blipFill>
+        <p:spPr>
+          <a:xfrm>
+            <a:off x="492760" y="5384800"/>
+            <a:ext cx="554892" cy="541020"/>
+          </a:xfrm>
+          <a:prstGeom prst="rect">
+            <a:avLst/>
+          </a:prstGeom>
+        </p:spPr>
+      </p:pic>
+      <p:sp>
+        <p:nvSpPr>
+          <p:cNvPr id="21" name="テキスト ボックス 20">
+            <a:extLst>
+              <a:ext uri="{FF2B5EF4-FFF2-40B4-BE49-F238E27FC236}">
+                <a16:creationId xmlns:a16="http://schemas.microsoft.com/office/drawing/2014/main" id="{C88D5FBC-5E86-8049-875A-5DDA0F579E44}"/>
+              </a:ext>
+            </a:extLst>
+          </p:cNvPr>
+          <p:cNvSpPr txBox="1"/>
+          <p:nvPr/>
+        </p:nvSpPr>
+        <p:spPr>
+          <a:xfrm>
+            <a:off x="1198880" y="4378960"/>
+            <a:ext cx="2723823" cy="646331"/>
+          </a:xfrm>
+          <a:prstGeom prst="rect">
+            <a:avLst/>
+          </a:prstGeom>
+          <a:noFill/>
+        </p:spPr>
+        <p:txBody>
+          <a:bodyPr wrap="square" rtlCol="0"/>
+          <a:lstStyle/>
+          <a:p>
+            <a:pPr>
+              <a:defRPr sz="1600"/>
+            </a:pPr>
+            <a:r>
+              <a:rPr kumimoji="1" lang="ja-JP" altLang="en-US" sz="1600"/>
+              <a:t>Easy to try casually</a:t>
+            </a:r>
+            <a:endParaRPr kumimoji="1" lang="en-US" altLang="ja-JP"/>
+          </a:p>
+          <a:p>
+            <a:pPr>
+              <a:defRPr sz="1600"/>
+            </a:pPr>
+            <a:r>
+              <a:rPr kumimoji="1" lang="ja-JP" altLang="en-US" sz="1600"/>
+              <a:t>Simple when it is simple</a:t>
+            </a:r>
+            <a:endParaRPr kumimoji="1" lang="en-US" altLang="ja-JP"/>
+          </a:p>
+        </p:txBody>
+      </p:sp>
+      <p:sp>
+        <p:nvSpPr>
+          <p:cNvPr id="22" name="テキスト ボックス 21">
+            <a:extLst>
+              <a:ext uri="{FF2B5EF4-FFF2-40B4-BE49-F238E27FC236}">
+                <a16:creationId xmlns:a16="http://schemas.microsoft.com/office/drawing/2014/main" id="{D80AD358-B4FF-8C41-A97A-A4C243CD6EAB}"/>
+              </a:ext>
+            </a:extLst>
+          </p:cNvPr>
+          <p:cNvSpPr txBox="1"/>
+          <p:nvPr/>
+        </p:nvSpPr>
+        <p:spPr>
+          <a:xfrm>
+            <a:off x="1097280" y="5354320"/>
+            <a:ext cx="3416320" cy="646331"/>
+          </a:xfrm>
+          <a:prstGeom prst="rect">
+            <a:avLst/>
+          </a:prstGeom>
+          <a:noFill/>
+        </p:spPr>
+        <p:txBody>
+          <a:bodyPr wrap="square" rtlCol="0">
+            <a:normAutofit/>
+          </a:bodyPr>
+          <a:lstStyle/>
+          <a:p>
+            <a:pPr>
+              <a:defRPr/>
+            </a:pPr>
+            <a:r>
+              <a:rPr kumimoji="1" lang="ja-JP" altLang="en-US" b="1">
+                <a:solidFill>
+                  <a:srgbClr val="FF0000"/>
+                </a:solidFill>
+              </a:rPr>
+              <a:t>Cannot span multiple nodes</a:t>
+            </a:r>
+            <a:endParaRPr kumimoji="1" lang="en-US" altLang="ja-JP" b="1">
+              <a:solidFill>
+                <a:srgbClr val="FF0000"/>
+              </a:solidFill>
+            </a:endParaRPr>
+          </a:p>
+          <a:p>
+            <a:pPr>
+              <a:defRPr/>
+            </a:pPr>
+            <a:r>
+              <a:rPr kumimoji="1" lang="ja-JP" altLang="en-US" b="1">
+                <a:solidFill>
+                  <a:srgbClr val="FF0000"/>
+                </a:solidFill>
+              </a:rPr>
+              <a:t>Getting performance is surprisingly hard</a:t>
+            </a:r>
+            <a:endParaRPr kumimoji="1" lang="en-US" altLang="ja-JP" b="1">
+              <a:solidFill>
+                <a:srgbClr val="FF0000"/>
+              </a:solidFill>
+            </a:endParaRPr>
+          </a:p>
+        </p:txBody>
+      </p:sp>
+      <p:sp>
+        <p:nvSpPr>
+          <p:cNvPr id="51" name="テキスト ボックス 50">
+            <a:extLst>
+              <a:ext uri="{FF2B5EF4-FFF2-40B4-BE49-F238E27FC236}">
+                <a16:creationId xmlns:a16="http://schemas.microsoft.com/office/drawing/2014/main" id="{14389323-333F-4249-9372-E6355BC30F3F}"/>
+              </a:ext>
+            </a:extLst>
+          </p:cNvPr>
+          <p:cNvSpPr txBox="1"/>
+          <p:nvPr/>
+        </p:nvSpPr>
+        <p:spPr>
+          <a:xfrm>
+            <a:off x="6136640" y="81280"/>
+            <a:ext cx="2031325" cy="461665"/>
+          </a:xfrm>
+          <a:prstGeom prst="rect">
+            <a:avLst/>
+          </a:prstGeom>
+          <a:noFill/>
+        </p:spPr>
+        <p:txBody>
+          <a:bodyPr wrap="square" rtlCol="0">
+            <a:normAutofit/>
+          </a:bodyPr>
+          <a:lstStyle/>
+          <a:p>
+            <a:pPr>
+              <a:defRPr/>
+            </a:pPr>
+            <a:r>
+              <a:rPr kumimoji="1" lang="ja-JP" altLang="en-US" sz="2400"/>
+              <a:t>Process parallelism</a:t>
+            </a:r>
+          </a:p>
+        </p:txBody>
+      </p:sp>
+      <p:grpSp>
+        <p:nvGrpSpPr>
+          <p:cNvPr id="53" name="グループ化 52">
+            <a:extLst>
+              <a:ext uri="{FF2B5EF4-FFF2-40B4-BE49-F238E27FC236}">
+                <a16:creationId xmlns:a16="http://schemas.microsoft.com/office/drawing/2014/main" id="{422E7C5D-4C23-014E-AD9D-AF26F105F2E5}"/>
+              </a:ext>
+            </a:extLst>
+          </p:cNvPr>
+          <p:cNvGrpSpPr/>
+          <p:nvPr/>
+        </p:nvGrpSpPr>
+        <p:grpSpPr>
+          <a:xfrm>
+            <a:off x="4822437" y="619760"/>
+            <a:ext cx="1984763" cy="3556000"/>
+            <a:chOff x="4822437" y="619760"/>
+            <a:chExt cx="1984763" cy="3556000"/>
+          </a:xfrm>
+        </p:grpSpPr>
+        <p:sp>
+          <p:nvSpPr>
+            <p:cNvPr id="24" name="正方形/長方形 23">
+              <a:extLst>
+                <a:ext uri="{FF2B5EF4-FFF2-40B4-BE49-F238E27FC236}">
+                  <a16:creationId xmlns:a16="http://schemas.microsoft.com/office/drawing/2014/main" id="{80C1AF87-D94B-3741-86E7-7670B0E6F18C}"/>
+                </a:ext>
+              </a:extLst>
+            </p:cNvPr>
+            <p:cNvSpPr/>
+            <p:nvPr/>
+          </p:nvSpPr>
+          <p:spPr>
+            <a:xfrm>
+              <a:off x="4822437" y="619760"/>
+              <a:ext cx="1984763" cy="3556000"/>
+            </a:xfrm>
+            <a:prstGeom prst="rect">
+              <a:avLst/>
+            </a:prstGeom>
+            <a:solidFill>
+              <a:schemeClr val="accent2">
+                <a:lumMod val="20000"/>
+                <a:lumOff val="80000"/>
+              </a:schemeClr>
+            </a:solidFill>
+          </p:spPr>
+          <p:style>
+            <a:lnRef idx="2">
+              <a:schemeClr val="accent1">
+                <a:shade val="50000"/>
+              </a:schemeClr>
+            </a:lnRef>
+            <a:fillRef idx="1">
+              <a:schemeClr val="accent1"/>
+            </a:fillRef>
+            <a:effectRef idx="0">
+              <a:schemeClr val="accent1"/>
+            </a:effectRef>
+            <a:fontRef idx="minor">
+              <a:schemeClr val="lt1"/>
+            </a:fontRef>
+          </p:style>
+          <p:txBody>
+            <a:bodyPr rtlCol="0" anchor="ctr"/>
+            <a:lstStyle/>
+            <a:p>
+              <a:pPr algn="ctr"/>
+              <a:endParaRPr kumimoji="1" lang="ja-JP" altLang="en-US" sz="1600"/>
+            </a:p>
+          </p:txBody>
+        </p:sp>
+        <p:sp>
+          <p:nvSpPr>
+            <p:cNvPr id="26" name="テキスト ボックス 25">
+              <a:extLst>
+                <a:ext uri="{FF2B5EF4-FFF2-40B4-BE49-F238E27FC236}">
+                  <a16:creationId xmlns:a16="http://schemas.microsoft.com/office/drawing/2014/main" id="{C9391D23-6F20-5442-BFE5-65EE69623A80}"/>
+                </a:ext>
+              </a:extLst>
+            </p:cNvPr>
+            <p:cNvSpPr txBox="1"/>
+            <p:nvPr/>
+          </p:nvSpPr>
+          <p:spPr>
+            <a:xfrm>
+              <a:off x="4826000" y="671812"/>
+              <a:ext cx="1981200" cy="400110"/>
+            </a:xfrm>
+            <a:prstGeom prst="rect">
+              <a:avLst/>
+            </a:prstGeom>
+            <a:noFill/>
+          </p:spPr>
+          <p:txBody>
+            <a:bodyPr wrap="square" rtlCol="0"/>
+            <a:lstStyle/>
+            <a:p>
+              <a:pPr algn="ctr">
+                <a:defRPr sz="1950"/>
+              </a:pPr>
+              <a:r>
+                <a:rPr kumimoji="1" lang="en-US" altLang="ja-JP" sz="1950"/>
+                <a:t>OS</a:t>
+              </a:r>
+              <a:endParaRPr kumimoji="1" lang="ja-JP" altLang="en-US" sz="2000"/>
+            </a:p>
+          </p:txBody>
+        </p:sp>
+        <p:sp>
+          <p:nvSpPr>
+            <p:cNvPr id="39" name="正方形/長方形 38">
+              <a:extLst>
+                <a:ext uri="{FF2B5EF4-FFF2-40B4-BE49-F238E27FC236}">
+                  <a16:creationId xmlns:a16="http://schemas.microsoft.com/office/drawing/2014/main" id="{93F86033-95B5-BE41-A09F-EF9007A8B5EF}"/>
+                </a:ext>
+              </a:extLst>
+            </p:cNvPr>
+            <p:cNvSpPr/>
+            <p:nvPr/>
+          </p:nvSpPr>
+          <p:spPr>
+            <a:xfrm>
+              <a:off x="5008880" y="1656080"/>
+              <a:ext cx="1696720" cy="497840"/>
+            </a:xfrm>
+            <a:prstGeom prst="rect">
+              <a:avLst/>
+            </a:prstGeom>
+            <a:solidFill>
+              <a:schemeClr val="accent1">
+                <a:lumMod val="20000"/>
+                <a:lumOff val="80000"/>
+              </a:schemeClr>
+            </a:solidFill>
+            <a:ln>
+              <a:solidFill>
+                <a:schemeClr val="tx1"/>
+              </a:solidFill>
+            </a:ln>
+          </p:spPr>
+          <p:style>
+            <a:lnRef idx="2">
+              <a:schemeClr val="accent1">
+                <a:shade val="50000"/>
+              </a:schemeClr>
+            </a:lnRef>
+            <a:fillRef idx="1">
+              <a:schemeClr val="accent1"/>
+            </a:fillRef>
+            <a:effectRef idx="0">
+              <a:schemeClr val="accent1"/>
+            </a:effectRef>
+            <a:fontRef idx="minor">
+              <a:schemeClr val="lt1"/>
+            </a:fontRef>
+          </p:style>
+          <p:txBody>
+            <a:bodyPr rtlCol="0" anchor="ctr"/>
+            <a:lstStyle/>
+            <a:p>
+              <a:pPr algn="ctr">
+                <a:defRPr/>
+              </a:pPr>
+              <a:r>
+                <a:rPr lang="ja-JP" altLang="en-US" sz="2000">
+                  <a:solidFill>
+                    <a:schemeClr val="tx1"/>
+                  </a:solidFill>
+                </a:rPr>
+                <a:t>Process</a:t>
+              </a:r>
+            </a:p>
+          </p:txBody>
+        </p:sp>
+        <p:sp>
+          <p:nvSpPr>
+            <p:cNvPr id="50" name="正方形/長方形 49">
+              <a:extLst>
+                <a:ext uri="{FF2B5EF4-FFF2-40B4-BE49-F238E27FC236}">
+                  <a16:creationId xmlns:a16="http://schemas.microsoft.com/office/drawing/2014/main" id="{EF2359AD-C93F-C64E-8996-8189D6D9D908}"/>
+                </a:ext>
+              </a:extLst>
+            </p:cNvPr>
+            <p:cNvSpPr/>
+            <p:nvPr/>
+          </p:nvSpPr>
+          <p:spPr>
+            <a:xfrm>
+              <a:off x="4998720" y="2946400"/>
+              <a:ext cx="1696720" cy="497840"/>
+            </a:xfrm>
+            <a:prstGeom prst="rect">
+              <a:avLst/>
+            </a:prstGeom>
+            <a:solidFill>
+              <a:schemeClr val="accent1">
+                <a:lumMod val="20000"/>
+                <a:lumOff val="80000"/>
+              </a:schemeClr>
+            </a:solidFill>
+            <a:ln>
+              <a:solidFill>
+                <a:schemeClr val="tx1"/>
+              </a:solidFill>
+            </a:ln>
+          </p:spPr>
+          <p:style>
+            <a:lnRef idx="2">
+              <a:schemeClr val="accent1">
+                <a:shade val="50000"/>
+              </a:schemeClr>
+            </a:lnRef>
+            <a:fillRef idx="1">
+              <a:schemeClr val="accent1"/>
+            </a:fillRef>
+            <a:effectRef idx="0">
+              <a:schemeClr val="accent1"/>
+            </a:effectRef>
+            <a:fontRef idx="minor">
+              <a:schemeClr val="lt1"/>
+            </a:fontRef>
+          </p:style>
+          <p:txBody>
+            <a:bodyPr rtlCol="0" anchor="ctr"/>
+            <a:lstStyle/>
+            <a:p>
+              <a:pPr algn="ctr">
+                <a:defRPr/>
+              </a:pPr>
+              <a:r>
+                <a:rPr lang="ja-JP" altLang="en-US" sz="2000">
+                  <a:solidFill>
+                    <a:schemeClr val="tx1"/>
+                  </a:solidFill>
+                </a:rPr>
+                <a:t>Process</a:t>
+              </a:r>
+            </a:p>
+          </p:txBody>
+        </p:sp>
+        <p:sp>
+          <p:nvSpPr>
+            <p:cNvPr id="52" name="上下矢印 51">
+              <a:extLst>
+                <a:ext uri="{FF2B5EF4-FFF2-40B4-BE49-F238E27FC236}">
+                  <a16:creationId xmlns:a16="http://schemas.microsoft.com/office/drawing/2014/main" id="{8FF997E0-65F8-B447-AB4B-C661572BC61B}"/>
+                </a:ext>
+              </a:extLst>
+            </p:cNvPr>
+            <p:cNvSpPr/>
+            <p:nvPr/>
+          </p:nvSpPr>
+          <p:spPr>
+            <a:xfrm>
+              <a:off x="5638800" y="2225040"/>
+              <a:ext cx="355600" cy="670560"/>
+            </a:xfrm>
+            <a:prstGeom prst="upDownArrow">
+              <a:avLst/>
+            </a:prstGeom>
+            <a:solidFill>
+              <a:srgbClr val="FF0000"/>
+            </a:solidFill>
+            <a:ln>
+              <a:solidFill>
+                <a:schemeClr val="tx1"/>
+              </a:solidFill>
+            </a:ln>
+          </p:spPr>
+          <p:style>
+            <a:lnRef idx="2">
+              <a:schemeClr val="accent1">
+                <a:shade val="50000"/>
+              </a:schemeClr>
+            </a:lnRef>
+            <a:fillRef idx="1">
+              <a:schemeClr val="accent1"/>
+            </a:fillRef>
+            <a:effectRef idx="0">
+              <a:schemeClr val="accent1"/>
+            </a:effectRef>
+            <a:fontRef idx="minor">
+              <a:schemeClr val="lt1"/>
+            </a:fontRef>
+          </p:style>
+          <p:txBody>
+            <a:bodyPr rtlCol="0" anchor="ctr"/>
+            <a:lstStyle/>
+            <a:p>
+              <a:pPr algn="ctr"/>
+              <a:endParaRPr kumimoji="1" lang="ja-JP" altLang="en-US"/>
+            </a:p>
+          </p:txBody>
+        </p:sp>
+      </p:grpSp>
+      <p:grpSp>
+        <p:nvGrpSpPr>
+          <p:cNvPr id="55" name="グループ化 54">
+            <a:extLst>
+              <a:ext uri="{FF2B5EF4-FFF2-40B4-BE49-F238E27FC236}">
+                <a16:creationId xmlns:a16="http://schemas.microsoft.com/office/drawing/2014/main" id="{5468A919-4BC9-5E4F-8E54-FED383B3028B}"/>
+              </a:ext>
+            </a:extLst>
+          </p:cNvPr>
+          <p:cNvGrpSpPr/>
+          <p:nvPr/>
+        </p:nvGrpSpPr>
+        <p:grpSpPr>
+          <a:xfrm>
+            <a:off x="7606277" y="640080"/>
+            <a:ext cx="1984763" cy="3556000"/>
+            <a:chOff x="4822437" y="619760"/>
+            <a:chExt cx="1984763" cy="3556000"/>
+          </a:xfrm>
+        </p:grpSpPr>
+        <p:sp>
+          <p:nvSpPr>
+            <p:cNvPr id="56" name="正方形/長方形 55">
+              <a:extLst>
+                <a:ext uri="{FF2B5EF4-FFF2-40B4-BE49-F238E27FC236}">
+                  <a16:creationId xmlns:a16="http://schemas.microsoft.com/office/drawing/2014/main" id="{DB52FB18-8F7C-7E43-8086-B7F331643495}"/>
+                </a:ext>
+              </a:extLst>
+            </p:cNvPr>
+            <p:cNvSpPr/>
+            <p:nvPr/>
+          </p:nvSpPr>
+          <p:spPr>
+            <a:xfrm>
+              <a:off x="4822437" y="619760"/>
+              <a:ext cx="1984763" cy="3556000"/>
+            </a:xfrm>
+            <a:prstGeom prst="rect">
+              <a:avLst/>
+            </a:prstGeom>
+            <a:solidFill>
+              <a:schemeClr val="accent2">
+                <a:lumMod val="20000"/>
+                <a:lumOff val="80000"/>
+              </a:schemeClr>
+            </a:solidFill>
+          </p:spPr>
+          <p:style>
+            <a:lnRef idx="2">
+              <a:schemeClr val="accent1">
+                <a:shade val="50000"/>
+              </a:schemeClr>
+            </a:lnRef>
+            <a:fillRef idx="1">
+              <a:schemeClr val="accent1"/>
+            </a:fillRef>
+            <a:effectRef idx="0">
+              <a:schemeClr val="accent1"/>
+            </a:effectRef>
+            <a:fontRef idx="minor">
+              <a:schemeClr val="lt1"/>
+            </a:fontRef>
+          </p:style>
+          <p:txBody>
+            <a:bodyPr rtlCol="0" anchor="ctr"/>
+            <a:lstStyle/>
+            <a:p>
+              <a:pPr algn="ctr"/>
+              <a:endParaRPr kumimoji="1" lang="ja-JP" altLang="en-US" sz="1600"/>
+            </a:p>
+          </p:txBody>
+        </p:sp>
+        <p:sp>
+          <p:nvSpPr>
+            <p:cNvPr id="57" name="テキスト ボックス 56">
+              <a:extLst>
+                <a:ext uri="{FF2B5EF4-FFF2-40B4-BE49-F238E27FC236}">
+                  <a16:creationId xmlns:a16="http://schemas.microsoft.com/office/drawing/2014/main" id="{5424E1CC-DFB6-984C-B527-EF157F38292F}"/>
+                </a:ext>
+              </a:extLst>
+            </p:cNvPr>
+            <p:cNvSpPr txBox="1"/>
+            <p:nvPr/>
+          </p:nvSpPr>
+          <p:spPr>
+            <a:xfrm>
+              <a:off x="4826000" y="671812"/>
+              <a:ext cx="1981200" cy="400110"/>
+            </a:xfrm>
+            <a:prstGeom prst="rect">
+              <a:avLst/>
+            </a:prstGeom>
+            <a:noFill/>
+          </p:spPr>
+          <p:txBody>
+            <a:bodyPr wrap="square" rtlCol="0"/>
+            <a:lstStyle/>
+            <a:p>
+              <a:pPr algn="ctr">
+                <a:defRPr sz="1950"/>
+              </a:pPr>
+              <a:r>
+                <a:rPr kumimoji="1" lang="en-US" altLang="ja-JP" sz="1950"/>
+                <a:t>OS</a:t>
+              </a:r>
+              <a:endParaRPr kumimoji="1" lang="ja-JP" altLang="en-US" sz="2000"/>
+            </a:p>
+          </p:txBody>
+        </p:sp>
+        <p:sp>
+          <p:nvSpPr>
+            <p:cNvPr id="58" name="正方形/長方形 57">
+              <a:extLst>
+                <a:ext uri="{FF2B5EF4-FFF2-40B4-BE49-F238E27FC236}">
+                  <a16:creationId xmlns:a16="http://schemas.microsoft.com/office/drawing/2014/main" id="{184777AF-D532-3F42-B2D0-7FE42771BF0C}"/>
+                </a:ext>
+              </a:extLst>
+            </p:cNvPr>
+            <p:cNvSpPr/>
+            <p:nvPr/>
+          </p:nvSpPr>
+          <p:spPr>
+            <a:xfrm>
+              <a:off x="5008880" y="1656080"/>
+              <a:ext cx="1696720" cy="497840"/>
+            </a:xfrm>
+            <a:prstGeom prst="rect">
+              <a:avLst/>
+            </a:prstGeom>
+            <a:solidFill>
+              <a:schemeClr val="accent1">
+                <a:lumMod val="20000"/>
+                <a:lumOff val="80000"/>
+              </a:schemeClr>
+            </a:solidFill>
+            <a:ln>
+              <a:solidFill>
+                <a:schemeClr val="tx1"/>
+              </a:solidFill>
+            </a:ln>
+          </p:spPr>
+          <p:style>
+            <a:lnRef idx="2">
+              <a:schemeClr val="accent1">
+                <a:shade val="50000"/>
+              </a:schemeClr>
+            </a:lnRef>
+            <a:fillRef idx="1">
+              <a:schemeClr val="accent1"/>
+            </a:fillRef>
+            <a:effectRef idx="0">
+              <a:schemeClr val="accent1"/>
+            </a:effectRef>
+            <a:fontRef idx="minor">
+              <a:schemeClr val="lt1"/>
+            </a:fontRef>
+          </p:style>
+          <p:txBody>
+            <a:bodyPr rtlCol="0" anchor="ctr"/>
+            <a:lstStyle/>
+            <a:p>
+              <a:pPr algn="ctr">
+                <a:defRPr/>
+              </a:pPr>
+              <a:r>
+                <a:rPr lang="ja-JP" altLang="en-US" sz="2000">
+                  <a:solidFill>
+                    <a:schemeClr val="tx1"/>
+                  </a:solidFill>
+                </a:rPr>
+                <a:t>Process</a:t>
+              </a:r>
+            </a:p>
+          </p:txBody>
+        </p:sp>
+        <p:sp>
+          <p:nvSpPr>
+            <p:cNvPr id="59" name="正方形/長方形 58">
+              <a:extLst>
+                <a:ext uri="{FF2B5EF4-FFF2-40B4-BE49-F238E27FC236}">
+                  <a16:creationId xmlns:a16="http://schemas.microsoft.com/office/drawing/2014/main" id="{20B97EE5-C136-3745-820E-049A4448BE0A}"/>
+                </a:ext>
+              </a:extLst>
+            </p:cNvPr>
+            <p:cNvSpPr/>
+            <p:nvPr/>
+          </p:nvSpPr>
+          <p:spPr>
+            <a:xfrm>
+              <a:off x="4998720" y="2946400"/>
+              <a:ext cx="1696720" cy="497840"/>
+            </a:xfrm>
+            <a:prstGeom prst="rect">
+              <a:avLst/>
+            </a:prstGeom>
+            <a:solidFill>
+              <a:schemeClr val="accent1">
+                <a:lumMod val="20000"/>
+                <a:lumOff val="80000"/>
+              </a:schemeClr>
+            </a:solidFill>
+            <a:ln>
+              <a:solidFill>
+                <a:schemeClr val="tx1"/>
+              </a:solidFill>
+            </a:ln>
+          </p:spPr>
+          <p:style>
+            <a:lnRef idx="2">
+              <a:schemeClr val="accent1">
+                <a:shade val="50000"/>
+              </a:schemeClr>
+            </a:lnRef>
+            <a:fillRef idx="1">
+              <a:schemeClr val="accent1"/>
+            </a:fillRef>
+            <a:effectRef idx="0">
+              <a:schemeClr val="accent1"/>
+            </a:effectRef>
+            <a:fontRef idx="minor">
+              <a:schemeClr val="lt1"/>
+            </a:fontRef>
+          </p:style>
+          <p:txBody>
+            <a:bodyPr rtlCol="0" anchor="ctr"/>
+            <a:lstStyle/>
+            <a:p>
+              <a:pPr algn="ctr">
+                <a:defRPr/>
+              </a:pPr>
+              <a:r>
+                <a:rPr lang="ja-JP" altLang="en-US" sz="2000">
+                  <a:solidFill>
+                    <a:schemeClr val="tx1"/>
+                  </a:solidFill>
+                </a:rPr>
+                <a:t>Process</a:t>
+              </a:r>
+            </a:p>
+          </p:txBody>
+        </p:sp>
+        <p:sp>
+          <p:nvSpPr>
+            <p:cNvPr id="60" name="上下矢印 59">
+              <a:extLst>
+                <a:ext uri="{FF2B5EF4-FFF2-40B4-BE49-F238E27FC236}">
+                  <a16:creationId xmlns:a16="http://schemas.microsoft.com/office/drawing/2014/main" id="{FD59A557-FDE1-7F4A-AA4C-2DBBB79E47EB}"/>
+                </a:ext>
+              </a:extLst>
+            </p:cNvPr>
+            <p:cNvSpPr/>
+            <p:nvPr/>
+          </p:nvSpPr>
+          <p:spPr>
+            <a:xfrm>
+              <a:off x="5638800" y="2225040"/>
+              <a:ext cx="355600" cy="670560"/>
+            </a:xfrm>
+            <a:prstGeom prst="upDownArrow">
+              <a:avLst/>
+            </a:prstGeom>
+            <a:solidFill>
+              <a:srgbClr val="FF0000"/>
+            </a:solidFill>
+            <a:ln>
+              <a:solidFill>
+                <a:schemeClr val="tx1"/>
+              </a:solidFill>
+            </a:ln>
+          </p:spPr>
+          <p:style>
+            <a:lnRef idx="2">
+              <a:schemeClr val="accent1">
+                <a:shade val="50000"/>
+              </a:schemeClr>
+            </a:lnRef>
+            <a:fillRef idx="1">
+              <a:schemeClr val="accent1"/>
+            </a:fillRef>
+            <a:effectRef idx="0">
+              <a:schemeClr val="accent1"/>
+            </a:effectRef>
+            <a:fontRef idx="minor">
+              <a:schemeClr val="lt1"/>
+            </a:fontRef>
+          </p:style>
+          <p:txBody>
+            <a:bodyPr rtlCol="0" anchor="ctr"/>
+            <a:lstStyle/>
+            <a:p>
+              <a:pPr algn="ctr"/>
+              <a:endParaRPr kumimoji="1" lang="ja-JP" altLang="en-US"/>
+            </a:p>
+          </p:txBody>
+        </p:sp>
+      </p:grpSp>
+      <p:sp>
+        <p:nvSpPr>
+          <p:cNvPr id="61" name="上下矢印 60">
+            <a:extLst>
+              <a:ext uri="{FF2B5EF4-FFF2-40B4-BE49-F238E27FC236}">
+                <a16:creationId xmlns:a16="http://schemas.microsoft.com/office/drawing/2014/main" id="{43CAB16A-EFCD-C547-9E63-C813969FB8E4}"/>
+              </a:ext>
+            </a:extLst>
+          </p:cNvPr>
+          <p:cNvSpPr/>
+          <p:nvPr/>
+        </p:nvSpPr>
+        <p:spPr>
+          <a:xfrm rot="5400000">
+            <a:off x="7040880" y="1595120"/>
+            <a:ext cx="355600" cy="670560"/>
+          </a:xfrm>
+          <a:prstGeom prst="upDownArrow">
+            <a:avLst/>
+          </a:prstGeom>
+          <a:solidFill>
+            <a:srgbClr val="FF0000"/>
+          </a:solidFill>
+          <a:ln>
+            <a:solidFill>
+              <a:schemeClr val="tx1"/>
+            </a:solidFill>
+          </a:ln>
+        </p:spPr>
+        <p:style>
+          <a:lnRef idx="2">
+            <a:schemeClr val="accent1">
+              <a:shade val="50000"/>
+            </a:schemeClr>
+          </a:lnRef>
+          <a:fillRef idx="1">
+            <a:schemeClr val="accent1"/>
+          </a:fillRef>
+          <a:effectRef idx="0">
+            <a:schemeClr val="accent1"/>
+          </a:effectRef>
+          <a:fontRef idx="minor">
+            <a:schemeClr val="lt1"/>
+          </a:fontRef>
+        </p:style>
+        <p:txBody>
+          <a:bodyPr rtlCol="0" anchor="ctr"/>
+          <a:lstStyle/>
+          <a:p>
+            <a:pPr algn="ctr"/>
+            <a:endParaRPr kumimoji="1" lang="ja-JP" altLang="en-US"/>
+          </a:p>
+        </p:txBody>
+      </p:sp>
+      <p:sp>
+        <p:nvSpPr>
+          <p:cNvPr id="62" name="上下矢印 61">
+            <a:extLst>
+              <a:ext uri="{FF2B5EF4-FFF2-40B4-BE49-F238E27FC236}">
+                <a16:creationId xmlns:a16="http://schemas.microsoft.com/office/drawing/2014/main" id="{5EB2BD24-C5A1-0C4C-B7EE-760F5A1F05FB}"/>
+              </a:ext>
+            </a:extLst>
+          </p:cNvPr>
+          <p:cNvSpPr/>
+          <p:nvPr/>
+        </p:nvSpPr>
+        <p:spPr>
+          <a:xfrm rot="5400000">
+            <a:off x="7030720" y="2854960"/>
+            <a:ext cx="355600" cy="670560"/>
+          </a:xfrm>
+          <a:prstGeom prst="upDownArrow">
+            <a:avLst/>
+          </a:prstGeom>
+          <a:solidFill>
+            <a:srgbClr val="FF0000"/>
+          </a:solidFill>
+          <a:ln>
+            <a:solidFill>
+              <a:schemeClr val="tx1"/>
+            </a:solidFill>
+          </a:ln>
+        </p:spPr>
+        <p:style>
+          <a:lnRef idx="2">
+            <a:schemeClr val="accent1">
+              <a:shade val="50000"/>
+            </a:schemeClr>
+          </a:lnRef>
+          <a:fillRef idx="1">
+            <a:schemeClr val="accent1"/>
+          </a:fillRef>
+          <a:effectRef idx="0">
+            <a:schemeClr val="accent1"/>
+          </a:effectRef>
+          <a:fontRef idx="minor">
+            <a:schemeClr val="lt1"/>
+          </a:fontRef>
+        </p:style>
+        <p:txBody>
+          <a:bodyPr rtlCol="0" anchor="ctr"/>
+          <a:lstStyle/>
+          <a:p>
+            <a:pPr algn="ctr"/>
+            <a:endParaRPr kumimoji="1" lang="ja-JP" altLang="en-US"/>
+          </a:p>
+        </p:txBody>
+      </p:sp>
+      <p:sp>
+        <p:nvSpPr>
+          <p:cNvPr id="63" name="テキスト ボックス 62">
+            <a:extLst>
+              <a:ext uri="{FF2B5EF4-FFF2-40B4-BE49-F238E27FC236}">
+                <a16:creationId xmlns:a16="http://schemas.microsoft.com/office/drawing/2014/main" id="{73198895-B055-F64D-AFA4-D017CFE1DDA9}"/>
+              </a:ext>
+            </a:extLst>
+          </p:cNvPr>
+          <p:cNvSpPr txBox="1"/>
+          <p:nvPr/>
+        </p:nvSpPr>
+        <p:spPr>
+          <a:xfrm>
+            <a:off x="5913120" y="2377440"/>
+            <a:ext cx="646331" cy="369332"/>
+          </a:xfrm>
+          <a:prstGeom prst="rect">
+            <a:avLst/>
+          </a:prstGeom>
+          <a:noFill/>
+        </p:spPr>
+        <p:txBody>
+          <a:bodyPr wrap="square" rtlCol="0">
+            <a:normAutofit/>
+          </a:bodyPr>
+          <a:lstStyle/>
+          <a:p>
+            <a:pPr>
+              <a:defRPr/>
+            </a:pPr>
+            <a:r>
+              <a:rPr kumimoji="1" lang="ja-JP" altLang="en-US"/>
+              <a:t>Communication</a:t>
+            </a:r>
+          </a:p>
+        </p:txBody>
+      </p:sp>
+      <p:sp>
+        <p:nvSpPr>
+          <p:cNvPr id="64" name="テキスト ボックス 63">
+            <a:extLst>
+              <a:ext uri="{FF2B5EF4-FFF2-40B4-BE49-F238E27FC236}">
+                <a16:creationId xmlns:a16="http://schemas.microsoft.com/office/drawing/2014/main" id="{CFDC4B11-35AC-504B-A3AE-6357F65589A8}"/>
+              </a:ext>
+            </a:extLst>
+          </p:cNvPr>
+          <p:cNvSpPr txBox="1"/>
+          <p:nvPr/>
+        </p:nvSpPr>
+        <p:spPr>
+          <a:xfrm>
+            <a:off x="8788400" y="2407920"/>
+            <a:ext cx="646331" cy="369332"/>
+          </a:xfrm>
+          <a:prstGeom prst="rect">
+            <a:avLst/>
+          </a:prstGeom>
+          <a:noFill/>
+        </p:spPr>
+        <p:txBody>
+          <a:bodyPr wrap="square" rtlCol="0">
+            <a:normAutofit/>
+          </a:bodyPr>
+          <a:lstStyle/>
+          <a:p>
+            <a:pPr>
+              <a:defRPr/>
+            </a:pPr>
+            <a:r>
+              <a:rPr kumimoji="1" lang="ja-JP" altLang="en-US"/>
+              <a:t>Communication</a:t>
+            </a:r>
+          </a:p>
+        </p:txBody>
+      </p:sp>
+      <p:sp>
+        <p:nvSpPr>
+          <p:cNvPr id="65" name="テキスト ボックス 64">
+            <a:extLst>
+              <a:ext uri="{FF2B5EF4-FFF2-40B4-BE49-F238E27FC236}">
+                <a16:creationId xmlns:a16="http://schemas.microsoft.com/office/drawing/2014/main" id="{5F484C2D-C7E6-124E-9CDE-F865081091BC}"/>
+              </a:ext>
+            </a:extLst>
+          </p:cNvPr>
+          <p:cNvSpPr txBox="1"/>
+          <p:nvPr/>
+        </p:nvSpPr>
+        <p:spPr>
+          <a:xfrm>
+            <a:off x="6878320" y="1361440"/>
+            <a:ext cx="646331" cy="369332"/>
+          </a:xfrm>
+          <a:prstGeom prst="rect">
+            <a:avLst/>
+          </a:prstGeom>
+          <a:noFill/>
+        </p:spPr>
+        <p:txBody>
+          <a:bodyPr wrap="square" rtlCol="0">
+            <a:normAutofit/>
+          </a:bodyPr>
+          <a:lstStyle/>
+          <a:p>
+            <a:pPr>
+              <a:defRPr/>
+            </a:pPr>
+            <a:r>
+              <a:rPr kumimoji="1" lang="ja-JP" altLang="en-US"/>
+              <a:t>Communication</a:t>
+            </a:r>
+          </a:p>
+        </p:txBody>
+      </p:sp>
+      <p:sp>
+        <p:nvSpPr>
+          <p:cNvPr id="66" name="テキスト ボックス 65">
+            <a:extLst>
+              <a:ext uri="{FF2B5EF4-FFF2-40B4-BE49-F238E27FC236}">
+                <a16:creationId xmlns:a16="http://schemas.microsoft.com/office/drawing/2014/main" id="{AA592A2A-A288-9045-BDCA-0B08A956B73C}"/>
+              </a:ext>
+            </a:extLst>
+          </p:cNvPr>
+          <p:cNvSpPr txBox="1"/>
+          <p:nvPr/>
+        </p:nvSpPr>
+        <p:spPr>
+          <a:xfrm>
+            <a:off x="6898640" y="2611120"/>
+            <a:ext cx="646331" cy="369332"/>
+          </a:xfrm>
+          <a:prstGeom prst="rect">
+            <a:avLst/>
+          </a:prstGeom>
+          <a:noFill/>
+        </p:spPr>
+        <p:txBody>
+          <a:bodyPr wrap="square" rtlCol="0">
+            <a:normAutofit/>
+          </a:bodyPr>
+          <a:lstStyle/>
+          <a:p>
+            <a:pPr>
+              <a:defRPr/>
+            </a:pPr>
+            <a:r>
+              <a:rPr kumimoji="1" lang="ja-JP" altLang="en-US"/>
+              <a:t>Communication</a:t>
+            </a:r>
+          </a:p>
+        </p:txBody>
+      </p:sp>
+      <p:pic>
+        <p:nvPicPr>
+          <p:cNvPr id="67" name="図 66">
+            <a:extLst>
+              <a:ext uri="{FF2B5EF4-FFF2-40B4-BE49-F238E27FC236}">
+                <a16:creationId xmlns:a16="http://schemas.microsoft.com/office/drawing/2014/main" id="{558E4129-C645-7D4D-B39B-EABB813B168B}"/>
+              </a:ext>
+            </a:extLst>
+          </p:cNvPr>
+          <p:cNvPicPr>
+            <a:picLocks noChangeAspect="1"/>
+          </p:cNvPicPr>
+          <p:nvPr/>
+        </p:nvPicPr>
+        <p:blipFill>
+          <a:blip r:embed="rId2"/>
+          <a:stretch>
+            <a:fillRect/>
+          </a:stretch>
+        </p:blipFill>
+        <p:spPr>
+          <a:xfrm>
+            <a:off x="5064760" y="4319904"/>
+            <a:ext cx="584200" cy="569595"/>
+          </a:xfrm>
+          <a:prstGeom prst="rect">
+            <a:avLst/>
+          </a:prstGeom>
+        </p:spPr>
+      </p:pic>
+      <p:pic>
+        <p:nvPicPr>
+          <p:cNvPr id="68" name="図 67">
+            <a:extLst>
+              <a:ext uri="{FF2B5EF4-FFF2-40B4-BE49-F238E27FC236}">
+                <a16:creationId xmlns:a16="http://schemas.microsoft.com/office/drawing/2014/main" id="{4D5E76E2-7424-C749-8D98-1DA59BDC27F7}"/>
+              </a:ext>
+            </a:extLst>
+          </p:cNvPr>
+          <p:cNvPicPr>
+            <a:picLocks noChangeAspect="1"/>
+          </p:cNvPicPr>
+          <p:nvPr/>
+        </p:nvPicPr>
+        <p:blipFill>
+          <a:blip r:embed="rId3"/>
+          <a:stretch>
+            <a:fillRect/>
+          </a:stretch>
+        </p:blipFill>
+        <p:spPr>
+          <a:xfrm>
+            <a:off x="5074920" y="5344160"/>
+            <a:ext cx="554892" cy="541020"/>
+          </a:xfrm>
+          <a:prstGeom prst="rect">
+            <a:avLst/>
+          </a:prstGeom>
+        </p:spPr>
+      </p:pic>
+      <p:sp>
+        <p:nvSpPr>
+          <p:cNvPr id="69" name="テキスト ボックス 68">
+            <a:extLst>
+              <a:ext uri="{FF2B5EF4-FFF2-40B4-BE49-F238E27FC236}">
+                <a16:creationId xmlns:a16="http://schemas.microsoft.com/office/drawing/2014/main" id="{279DDBE8-16CE-1C46-A37A-197F87F96329}"/>
+              </a:ext>
+            </a:extLst>
+          </p:cNvPr>
+          <p:cNvSpPr txBox="1"/>
+          <p:nvPr/>
+        </p:nvSpPr>
+        <p:spPr>
+          <a:xfrm>
+            <a:off x="5628640" y="4307840"/>
+            <a:ext cx="3185487" cy="369332"/>
+          </a:xfrm>
+          <a:prstGeom prst="rect">
+            <a:avLst/>
+          </a:prstGeom>
+          <a:noFill/>
+        </p:spPr>
+        <p:txBody>
+          <a:bodyPr wrap="none" rtlCol="0">
+            <a:spAutoFit/>
+          </a:bodyPr>
+          <a:lstStyle/>
+          <a:p>
+            <a:pPr>
+              <a:defRPr/>
+            </a:pPr>
+            <a:r>
+              <a:rPr kumimoji="1" lang="ja-JP" altLang="en-US" b="1">
+                <a:solidFill>
+                  <a:srgbClr val="FF0000"/>
+                </a:solidFill>
+              </a:rPr>
+              <a:t>Can span multiple nodes</a:t>
+            </a:r>
+          </a:p>
+        </p:txBody>
+      </p:sp>
+      <p:sp>
+        <p:nvSpPr>
+          <p:cNvPr id="71" name="正方形/長方形 70">
+            <a:extLst>
+              <a:ext uri="{FF2B5EF4-FFF2-40B4-BE49-F238E27FC236}">
+                <a16:creationId xmlns:a16="http://schemas.microsoft.com/office/drawing/2014/main" id="{35EDFEB0-9D0E-1C4D-B66E-ED72450A8F28}"/>
+              </a:ext>
+            </a:extLst>
+          </p:cNvPr>
+          <p:cNvSpPr/>
+          <p:nvPr/>
+        </p:nvSpPr>
+        <p:spPr>
+          <a:xfrm>
+            <a:off x="5660072" y="4636254"/>
+            <a:ext cx="2954655" cy="369332"/>
+          </a:xfrm>
+          <a:prstGeom prst="rect">
+            <a:avLst/>
+          </a:prstGeom>
+        </p:spPr>
+        <p:txBody>
+          <a:bodyPr wrap="square"/>
+          <a:lstStyle/>
+          <a:p>
+            <a:pPr>
+              <a:defRPr sz="1350"/>
+            </a:pPr>
+            <a:r>
+              <a:rPr lang="ja-JP" altLang="en-US" sz="1350"/>
+              <a:t>Parallelized exactly as written</a:t>
+            </a:r>
+          </a:p>
+        </p:txBody>
+      </p:sp>
+      <p:sp>
+        <p:nvSpPr>
+          <p:cNvPr id="72" name="正方形/長方形 71">
+            <a:extLst>
+              <a:ext uri="{FF2B5EF4-FFF2-40B4-BE49-F238E27FC236}">
+                <a16:creationId xmlns:a16="http://schemas.microsoft.com/office/drawing/2014/main" id="{D7B1A7AD-79FB-EA43-8B54-5EAE186E8885}"/>
+              </a:ext>
+            </a:extLst>
+          </p:cNvPr>
+          <p:cNvSpPr/>
+          <p:nvPr/>
+        </p:nvSpPr>
+        <p:spPr>
+          <a:xfrm>
+            <a:off x="5609272" y="5438894"/>
+            <a:ext cx="4108817" cy="369332"/>
+          </a:xfrm>
+          <a:prstGeom prst="rect">
+            <a:avLst/>
+          </a:prstGeom>
+        </p:spPr>
+        <p:txBody>
+          <a:bodyPr wrap="square"/>
+          <a:lstStyle/>
+          <a:p>
+            <a:pPr>
+              <a:defRPr sz="1450"/>
+            </a:pPr>
+            <a:r>
+              <a:rPr lang="ja-JP" altLang="en-US" sz="1450"/>
+              <a:t>Communication must be written explicitly</a:t>
+            </a:r>
+          </a:p>
+        </p:txBody>
+      </p:sp>
+    </p:spTree>
+    <p:extLst>
+      <p:ext uri="{BB962C8B-B14F-4D97-AF65-F5344CB8AC3E}">
+        <p14:creationId xmlns:p14="http://schemas.microsoft.com/office/powerpoint/2010/main" val="2823907590"/>
+      </p:ext>
+    </p:extLst>
+  </p:cSld>
+  <p:clrMapOvr>
+    <a:masterClrMapping/>
+  </p:clrMapOvr>
+</p:sld>
+</file>
+
+<file path=ppt/slides/slide5.xml><?xml version="1.0" encoding="utf-8"?>
 <p:sld xmlns:a="http://schemas.openxmlformats.org/drawingml/2006/main" xmlns:r="http://schemas.openxmlformats.org/officeDocument/2006/relationships" xmlns:p="http://schemas.openxmlformats.org/presentationml/2006/main">
   <p:cSld>
     <p:spTree>
@@ -4263,7 +7553,236 @@
 </p:sld>
 </file>
 
-<file path=ppt/slides/slide4.xml><?xml version="1.0" encoding="utf-8"?>
+<file path=ppt/slides/slide6.xml><?xml version="1.0" encoding="utf-8"?>
+<p:sld xmlns:a="http://schemas.openxmlformats.org/drawingml/2006/main" xmlns:r="http://schemas.openxmlformats.org/officeDocument/2006/relationships" xmlns:p="http://schemas.openxmlformats.org/presentationml/2006/main">
+  <p:cSld>
+    <p:spTree>
+      <p:nvGrpSpPr>
+        <p:cNvPr id="1" name=""/>
+        <p:cNvGrpSpPr/>
+        <p:nvPr/>
+      </p:nvGrpSpPr>
+      <p:grpSpPr>
+        <a:xfrm>
+          <a:off x="0" y="0"/>
+          <a:ext cx="0" cy="0"/>
+          <a:chOff x="0" y="0"/>
+          <a:chExt cx="0" cy="0"/>
+        </a:xfrm>
+      </p:grpSpPr>
+      <p:pic>
+        <p:nvPicPr>
+          <p:cNvPr id="2" name="図 1">
+            <a:extLst>
+              <a:ext uri="{FF2B5EF4-FFF2-40B4-BE49-F238E27FC236}">
+                <a16:creationId xmlns:a16="http://schemas.microsoft.com/office/drawing/2014/main" id="{3677A06B-B589-8F4F-92E7-0B86823C5525}"/>
+              </a:ext>
+            </a:extLst>
+          </p:cNvPr>
+          <p:cNvPicPr>
+            <a:picLocks noChangeAspect="1"/>
+          </p:cNvPicPr>
+          <p:nvPr/>
+        </p:nvPicPr>
+        <p:blipFill>
+          <a:blip r:embed="rId2"/>
+          <a:stretch>
+            <a:fillRect/>
+          </a:stretch>
+        </p:blipFill>
+        <p:spPr>
+          <a:xfrm>
+            <a:off x="1412240" y="2255520"/>
+            <a:ext cx="1557223" cy="1996440"/>
+          </a:xfrm>
+          <a:prstGeom prst="rect">
+            <a:avLst/>
+          </a:prstGeom>
+        </p:spPr>
+      </p:pic>
+      <p:pic>
+        <p:nvPicPr>
+          <p:cNvPr id="3" name="図 2">
+            <a:extLst>
+              <a:ext uri="{FF2B5EF4-FFF2-40B4-BE49-F238E27FC236}">
+                <a16:creationId xmlns:a16="http://schemas.microsoft.com/office/drawing/2014/main" id="{2E5F2145-8B68-634A-8108-EB3F339E0B24}"/>
+              </a:ext>
+            </a:extLst>
+          </p:cNvPr>
+          <p:cNvPicPr>
+            <a:picLocks noChangeAspect="1"/>
+          </p:cNvPicPr>
+          <p:nvPr/>
+        </p:nvPicPr>
+        <p:blipFill>
+          <a:blip r:embed="rId3"/>
+          <a:stretch>
+            <a:fillRect/>
+          </a:stretch>
+        </p:blipFill>
+        <p:spPr>
+          <a:xfrm>
+            <a:off x="4211320" y="1798320"/>
+            <a:ext cx="2656840" cy="2656840"/>
+          </a:xfrm>
+          <a:prstGeom prst="rect">
+            <a:avLst/>
+          </a:prstGeom>
+        </p:spPr>
+      </p:pic>
+      <p:sp>
+        <p:nvSpPr>
+          <p:cNvPr id="4" name="角丸四角形吹き出し 3">
+            <a:extLst>
+              <a:ext uri="{FF2B5EF4-FFF2-40B4-BE49-F238E27FC236}">
+                <a16:creationId xmlns:a16="http://schemas.microsoft.com/office/drawing/2014/main" id="{767C01C5-EC1D-5140-80E4-BB5BF08A6FA0}"/>
+              </a:ext>
+            </a:extLst>
+          </p:cNvPr>
+          <p:cNvSpPr/>
+          <p:nvPr/>
+        </p:nvSpPr>
+        <p:spPr>
+          <a:xfrm>
+            <a:off x="2143760" y="1148080"/>
+            <a:ext cx="3281680" cy="853440"/>
+          </a:xfrm>
+          <a:prstGeom prst="wedgeRoundRectCallout">
+            <a:avLst>
+              <a:gd name="adj1" fmla="val -39961"/>
+              <a:gd name="adj2" fmla="val 73026"/>
+              <a:gd name="adj3" fmla="val 16667"/>
+            </a:avLst>
+          </a:prstGeom>
+          <a:noFill/>
+          <a:ln>
+            <a:solidFill>
+              <a:schemeClr val="tx1"/>
+            </a:solidFill>
+          </a:ln>
+        </p:spPr>
+        <p:style>
+          <a:lnRef idx="2">
+            <a:schemeClr val="accent1">
+              <a:shade val="50000"/>
+            </a:schemeClr>
+          </a:lnRef>
+          <a:fillRef idx="1">
+            <a:schemeClr val="accent1"/>
+          </a:fillRef>
+          <a:effectRef idx="0">
+            <a:schemeClr val="accent1"/>
+          </a:effectRef>
+          <a:fontRef idx="minor">
+            <a:schemeClr val="lt1"/>
+          </a:fontRef>
+        </p:style>
+        <p:txBody>
+          <a:bodyPr rtlCol="0" anchor="ctr"/>
+          <a:lstStyle/>
+          <a:p>
+            <a:pPr algn="ctr"/>
+            <a:endParaRPr kumimoji="1" lang="ja-JP" altLang="en-US"/>
+          </a:p>
+        </p:txBody>
+      </p:sp>
+      <p:sp>
+        <p:nvSpPr>
+          <p:cNvPr id="5" name="テキスト ボックス 4">
+            <a:extLst>
+              <a:ext uri="{FF2B5EF4-FFF2-40B4-BE49-F238E27FC236}">
+                <a16:creationId xmlns:a16="http://schemas.microsoft.com/office/drawing/2014/main" id="{E7C03675-205D-D148-B026-50B4FF131134}"/>
+              </a:ext>
+            </a:extLst>
+          </p:cNvPr>
+          <p:cNvSpPr txBox="1"/>
+          <p:nvPr/>
+        </p:nvSpPr>
+        <p:spPr>
+          <a:xfrm>
+            <a:off x="2346960" y="1239520"/>
+            <a:ext cx="2954655" cy="646331"/>
+          </a:xfrm>
+          <a:prstGeom prst="rect">
+            <a:avLst/>
+          </a:prstGeom>
+          <a:noFill/>
+        </p:spPr>
+        <p:txBody>
+          <a:bodyPr wrap="square" rtlCol="0"/>
+          <a:lstStyle/>
+          <a:p>
+            <a:pPr>
+              <a:defRPr sz="1500"/>
+            </a:pPr>
+            <a:r>
+              <a:rPr kumimoji="1" lang="ja-JP" altLang="en-US" sz="1500"/>
+              <a:t>That job running over there?</a:t>
+            </a:r>
+            <a:endParaRPr kumimoji="1" lang="en-US" altLang="ja-JP"/>
+          </a:p>
+          <a:p>
+            <a:pPr>
+              <a:defRPr sz="1500"/>
+            </a:pPr>
+            <a:r>
+              <a:rPr kumimoji="1" lang="ja-JP" altLang="en-US" sz="1500"/>
+              <a:t>It's mine, haha.</a:t>
+            </a:r>
+            <a:endParaRPr kumimoji="1" lang="en-US" altLang="ja-JP"/>
+          </a:p>
+        </p:txBody>
+      </p:sp>
+      <p:sp>
+        <p:nvSpPr>
+          <p:cNvPr id="6" name="テキスト ボックス 5">
+            <a:extLst>
+              <a:ext uri="{FF2B5EF4-FFF2-40B4-BE49-F238E27FC236}">
+                <a16:creationId xmlns:a16="http://schemas.microsoft.com/office/drawing/2014/main" id="{78612310-C3E5-9145-B279-69B89F96B852}"/>
+              </a:ext>
+            </a:extLst>
+          </p:cNvPr>
+          <p:cNvSpPr txBox="1"/>
+          <p:nvPr/>
+        </p:nvSpPr>
+        <p:spPr>
+          <a:xfrm>
+            <a:off x="1981200" y="4521200"/>
+            <a:ext cx="3877985" cy="461665"/>
+          </a:xfrm>
+          <a:prstGeom prst="rect">
+            <a:avLst/>
+          </a:prstGeom>
+          <a:noFill/>
+        </p:spPr>
+        <p:txBody>
+          <a:bodyPr wrap="square" rtlCol="0"/>
+          <a:lstStyle/>
+          <a:p>
+            <a:pPr>
+              <a:defRPr sz="1950"/>
+            </a:pPr>
+            <a:r>
+              <a:rPr kumimoji="1" lang="ja-JP" altLang="en-US" sz="1950"/>
+              <a:t>Using a supercomputer is fun</a:t>
+            </a:r>
+          </a:p>
+        </p:txBody>
+      </p:sp>
+    </p:spTree>
+    <p:extLst>
+      <p:ext uri="{BB962C8B-B14F-4D97-AF65-F5344CB8AC3E}">
+        <p14:creationId xmlns:p14="http://schemas.microsoft.com/office/powerpoint/2010/main" val="3383041225"/>
+      </p:ext>
+    </p:extLst>
+  </p:cSld>
+  <p:clrMapOvr>
+    <a:masterClrMapping/>
+  </p:clrMapOvr>
+</p:sld>
+</file>
+
+<file path=ppt/slides/slide7.xml><?xml version="1.0" encoding="utf-8"?>
 <p:sld xmlns:a="http://schemas.openxmlformats.org/drawingml/2006/main" xmlns:r="http://schemas.openxmlformats.org/officeDocument/2006/relationships" xmlns:p="http://schemas.openxmlformats.org/presentationml/2006/main">
   <p:cSld>
     <p:spTree>
@@ -4565,3445 +8084,6 @@
 </p:sld>
 </file>
 
-<file path=ppt/slides/slide5.xml><?xml version="1.0" encoding="utf-8"?>
-<p:sld xmlns:a="http://schemas.openxmlformats.org/drawingml/2006/main" xmlns:r="http://schemas.openxmlformats.org/officeDocument/2006/relationships" xmlns:p="http://schemas.openxmlformats.org/presentationml/2006/main">
-  <p:cSld>
-    <p:spTree>
-      <p:nvGrpSpPr>
-        <p:cNvPr id="1" name=""/>
-        <p:cNvGrpSpPr/>
-        <p:nvPr/>
-      </p:nvGrpSpPr>
-      <p:grpSpPr>
-        <a:xfrm>
-          <a:off x="0" y="0"/>
-          <a:ext cx="0" cy="0"/>
-          <a:chOff x="0" y="0"/>
-          <a:chExt cx="0" cy="0"/>
-        </a:xfrm>
-      </p:grpSpPr>
-      <p:sp>
-        <p:nvSpPr>
-          <p:cNvPr id="31" name="正方形/長方形 30">
-            <a:extLst>
-              <a:ext uri="{FF2B5EF4-FFF2-40B4-BE49-F238E27FC236}">
-                <a16:creationId xmlns:a16="http://schemas.microsoft.com/office/drawing/2014/main" id="{D19B024A-361D-7A48-B45A-C686F18B3373}"/>
-              </a:ext>
-            </a:extLst>
-          </p:cNvPr>
-          <p:cNvSpPr/>
-          <p:nvPr/>
-        </p:nvSpPr>
-        <p:spPr>
-          <a:xfrm>
-            <a:off x="172720" y="325120"/>
-            <a:ext cx="8879840" cy="4572000"/>
-          </a:xfrm>
-          <a:prstGeom prst="rect">
-            <a:avLst/>
-          </a:prstGeom>
-          <a:solidFill>
-            <a:schemeClr val="accent2">
-              <a:lumMod val="20000"/>
-              <a:lumOff val="80000"/>
-            </a:schemeClr>
-          </a:solidFill>
-        </p:spPr>
-        <p:style>
-          <a:lnRef idx="2">
-            <a:schemeClr val="accent1">
-              <a:shade val="50000"/>
-            </a:schemeClr>
-          </a:lnRef>
-          <a:fillRef idx="1">
-            <a:schemeClr val="accent1"/>
-          </a:fillRef>
-          <a:effectRef idx="0">
-            <a:schemeClr val="accent1"/>
-          </a:effectRef>
-          <a:fontRef idx="minor">
-            <a:schemeClr val="lt1"/>
-          </a:fontRef>
-        </p:style>
-        <p:txBody>
-          <a:bodyPr rtlCol="0" anchor="ctr"/>
-          <a:lstStyle/>
-          <a:p>
-            <a:pPr algn="ctr"/>
-            <a:endParaRPr kumimoji="1" lang="ja-JP" altLang="en-US"/>
-          </a:p>
-        </p:txBody>
-      </p:sp>
-      <p:grpSp>
-        <p:nvGrpSpPr>
-          <p:cNvPr id="18" name="グループ化 17">
-            <a:extLst>
-              <a:ext uri="{FF2B5EF4-FFF2-40B4-BE49-F238E27FC236}">
-                <a16:creationId xmlns:a16="http://schemas.microsoft.com/office/drawing/2014/main" id="{E122872C-5000-8F4D-ACEB-B34853919A56}"/>
-              </a:ext>
-            </a:extLst>
-          </p:cNvPr>
-          <p:cNvGrpSpPr/>
-          <p:nvPr/>
-        </p:nvGrpSpPr>
-        <p:grpSpPr>
-          <a:xfrm>
-            <a:off x="609600" y="1127760"/>
-            <a:ext cx="3738880" cy="3281680"/>
-            <a:chOff x="802640" y="538480"/>
-            <a:chExt cx="3738880" cy="3281680"/>
-          </a:xfrm>
-        </p:grpSpPr>
-        <p:sp>
-          <p:nvSpPr>
-            <p:cNvPr id="2" name="正方形/長方形 1">
-              <a:extLst>
-                <a:ext uri="{FF2B5EF4-FFF2-40B4-BE49-F238E27FC236}">
-                  <a16:creationId xmlns:a16="http://schemas.microsoft.com/office/drawing/2014/main" id="{BDD1ABDC-C21D-7D46-994A-1AADC722A4B6}"/>
-                </a:ext>
-              </a:extLst>
-            </p:cNvPr>
-            <p:cNvSpPr/>
-            <p:nvPr/>
-          </p:nvSpPr>
-          <p:spPr>
-            <a:xfrm>
-              <a:off x="802640" y="548640"/>
-              <a:ext cx="3738880" cy="3271520"/>
-            </a:xfrm>
-            <a:prstGeom prst="rect">
-              <a:avLst/>
-            </a:prstGeom>
-            <a:solidFill>
-              <a:schemeClr val="accent1">
-                <a:lumMod val="20000"/>
-                <a:lumOff val="80000"/>
-              </a:schemeClr>
-            </a:solidFill>
-            <a:ln>
-              <a:solidFill>
-                <a:schemeClr val="tx1"/>
-              </a:solidFill>
-            </a:ln>
-          </p:spPr>
-          <p:style>
-            <a:lnRef idx="2">
-              <a:schemeClr val="accent1">
-                <a:shade val="50000"/>
-              </a:schemeClr>
-            </a:lnRef>
-            <a:fillRef idx="1">
-              <a:schemeClr val="accent1"/>
-            </a:fillRef>
-            <a:effectRef idx="0">
-              <a:schemeClr val="accent1"/>
-            </a:effectRef>
-            <a:fontRef idx="minor">
-              <a:schemeClr val="lt1"/>
-            </a:fontRef>
-          </p:style>
-          <p:txBody>
-            <a:bodyPr rtlCol="0" anchor="ctr"/>
-            <a:lstStyle/>
-            <a:p>
-              <a:pPr algn="ctr"/>
-              <a:endParaRPr kumimoji="1" lang="ja-JP" altLang="en-US" sz="3600">
-                <a:solidFill>
-                  <a:schemeClr val="tx1"/>
-                </a:solidFill>
-              </a:endParaRPr>
-            </a:p>
-          </p:txBody>
-        </p:sp>
-        <p:sp>
-          <p:nvSpPr>
-            <p:cNvPr id="4" name="角丸四角形 3">
-              <a:extLst>
-                <a:ext uri="{FF2B5EF4-FFF2-40B4-BE49-F238E27FC236}">
-                  <a16:creationId xmlns:a16="http://schemas.microsoft.com/office/drawing/2014/main" id="{D64EEFDB-0A07-8A40-82F2-8B551E44D5E6}"/>
-                </a:ext>
-              </a:extLst>
-            </p:cNvPr>
-            <p:cNvSpPr/>
-            <p:nvPr/>
-          </p:nvSpPr>
-          <p:spPr>
-            <a:xfrm>
-              <a:off x="2611120" y="1148080"/>
-              <a:ext cx="1808480" cy="528320"/>
-            </a:xfrm>
-            <a:prstGeom prst="roundRect">
-              <a:avLst/>
-            </a:prstGeom>
-            <a:solidFill>
-              <a:schemeClr val="accent4">
-                <a:lumMod val="20000"/>
-                <a:lumOff val="80000"/>
-              </a:schemeClr>
-            </a:solidFill>
-          </p:spPr>
-          <p:style>
-            <a:lnRef idx="2">
-              <a:schemeClr val="accent1">
-                <a:shade val="50000"/>
-              </a:schemeClr>
-            </a:lnRef>
-            <a:fillRef idx="1">
-              <a:schemeClr val="accent1"/>
-            </a:fillRef>
-            <a:effectRef idx="0">
-              <a:schemeClr val="accent1"/>
-            </a:effectRef>
-            <a:fontRef idx="minor">
-              <a:schemeClr val="lt1"/>
-            </a:fontRef>
-          </p:style>
-          <p:txBody>
-            <a:bodyPr rtlCol="0" anchor="ctr"/>
-            <a:lstStyle/>
-            <a:p>
-              <a:pPr algn="ctr"/>
-              <a:r>
-                <a:rPr kumimoji="1" lang="ja-JP" altLang="en-US">
-                  <a:solidFill>
-                    <a:schemeClr val="tx1"/>
-                  </a:solidFill>
-                </a:rPr>
-                <a:t>Thread</a:t>
-              </a:r>
-            </a:p>
-          </p:txBody>
-        </p:sp>
-        <p:sp>
-          <p:nvSpPr>
-            <p:cNvPr id="5" name="テキスト ボックス 4">
-              <a:extLst>
-                <a:ext uri="{FF2B5EF4-FFF2-40B4-BE49-F238E27FC236}">
-                  <a16:creationId xmlns:a16="http://schemas.microsoft.com/office/drawing/2014/main" id="{71224024-A681-4140-8AB1-DEFB806C77E8}"/>
-                </a:ext>
-              </a:extLst>
-            </p:cNvPr>
-            <p:cNvSpPr txBox="1"/>
-            <p:nvPr/>
-          </p:nvSpPr>
-          <p:spPr>
-            <a:xfrm>
-              <a:off x="812800" y="538480"/>
-              <a:ext cx="3718560" cy="523220"/>
-            </a:xfrm>
-            <a:prstGeom prst="rect">
-              <a:avLst/>
-            </a:prstGeom>
-            <a:noFill/>
-          </p:spPr>
-          <p:txBody>
-            <a:bodyPr wrap="square" rtlCol="0">
-              <a:spAutoFit/>
-            </a:bodyPr>
-            <a:lstStyle/>
-            <a:p>
-              <a:pPr algn="ctr"/>
-              <a:r>
-                <a:rPr kumimoji="1" lang="ja-JP" altLang="en-US" sz="2800"/>
-                <a:t>Process</a:t>
-              </a:r>
-            </a:p>
-          </p:txBody>
-        </p:sp>
-        <p:sp>
-          <p:nvSpPr>
-            <p:cNvPr id="6" name="角丸四角形 5">
-              <a:extLst>
-                <a:ext uri="{FF2B5EF4-FFF2-40B4-BE49-F238E27FC236}">
-                  <a16:creationId xmlns:a16="http://schemas.microsoft.com/office/drawing/2014/main" id="{5B05438C-CD2D-1C46-A718-B9A09B716168}"/>
-                </a:ext>
-              </a:extLst>
-            </p:cNvPr>
-            <p:cNvSpPr/>
-            <p:nvPr/>
-          </p:nvSpPr>
-          <p:spPr>
-            <a:xfrm>
-              <a:off x="2611120" y="1757680"/>
-              <a:ext cx="1808480" cy="528320"/>
-            </a:xfrm>
-            <a:prstGeom prst="roundRect">
-              <a:avLst/>
-            </a:prstGeom>
-            <a:solidFill>
-              <a:schemeClr val="accent4">
-                <a:lumMod val="20000"/>
-                <a:lumOff val="80000"/>
-              </a:schemeClr>
-            </a:solidFill>
-          </p:spPr>
-          <p:style>
-            <a:lnRef idx="2">
-              <a:schemeClr val="accent1">
-                <a:shade val="50000"/>
-              </a:schemeClr>
-            </a:lnRef>
-            <a:fillRef idx="1">
-              <a:schemeClr val="accent1"/>
-            </a:fillRef>
-            <a:effectRef idx="0">
-              <a:schemeClr val="accent1"/>
-            </a:effectRef>
-            <a:fontRef idx="minor">
-              <a:schemeClr val="lt1"/>
-            </a:fontRef>
-          </p:style>
-          <p:txBody>
-            <a:bodyPr rtlCol="0" anchor="ctr"/>
-            <a:lstStyle/>
-            <a:p>
-              <a:pPr algn="ctr"/>
-              <a:r>
-                <a:rPr kumimoji="1" lang="ja-JP" altLang="en-US">
-                  <a:solidFill>
-                    <a:schemeClr val="tx1"/>
-                  </a:solidFill>
-                </a:rPr>
-                <a:t>Thread</a:t>
-              </a:r>
-            </a:p>
-          </p:txBody>
-        </p:sp>
-        <p:sp>
-          <p:nvSpPr>
-            <p:cNvPr id="7" name="角丸四角形 6">
-              <a:extLst>
-                <a:ext uri="{FF2B5EF4-FFF2-40B4-BE49-F238E27FC236}">
-                  <a16:creationId xmlns:a16="http://schemas.microsoft.com/office/drawing/2014/main" id="{42E4E2F0-C26C-5A4D-B3C9-989634459DA6}"/>
-                </a:ext>
-              </a:extLst>
-            </p:cNvPr>
-            <p:cNvSpPr/>
-            <p:nvPr/>
-          </p:nvSpPr>
-          <p:spPr>
-            <a:xfrm>
-              <a:off x="2600960" y="2407920"/>
-              <a:ext cx="1808480" cy="528320"/>
-            </a:xfrm>
-            <a:prstGeom prst="roundRect">
-              <a:avLst/>
-            </a:prstGeom>
-            <a:solidFill>
-              <a:schemeClr val="accent4">
-                <a:lumMod val="20000"/>
-                <a:lumOff val="80000"/>
-              </a:schemeClr>
-            </a:solidFill>
-          </p:spPr>
-          <p:style>
-            <a:lnRef idx="2">
-              <a:schemeClr val="accent1">
-                <a:shade val="50000"/>
-              </a:schemeClr>
-            </a:lnRef>
-            <a:fillRef idx="1">
-              <a:schemeClr val="accent1"/>
-            </a:fillRef>
-            <a:effectRef idx="0">
-              <a:schemeClr val="accent1"/>
-            </a:effectRef>
-            <a:fontRef idx="minor">
-              <a:schemeClr val="lt1"/>
-            </a:fontRef>
-          </p:style>
-          <p:txBody>
-            <a:bodyPr rtlCol="0" anchor="ctr"/>
-            <a:lstStyle/>
-            <a:p>
-              <a:pPr algn="ctr"/>
-              <a:r>
-                <a:rPr kumimoji="1" lang="ja-JP" altLang="en-US">
-                  <a:solidFill>
-                    <a:schemeClr val="tx1"/>
-                  </a:solidFill>
-                </a:rPr>
-                <a:t>Thread</a:t>
-              </a:r>
-            </a:p>
-          </p:txBody>
-        </p:sp>
-        <p:sp>
-          <p:nvSpPr>
-            <p:cNvPr id="8" name="角丸四角形 7">
-              <a:extLst>
-                <a:ext uri="{FF2B5EF4-FFF2-40B4-BE49-F238E27FC236}">
-                  <a16:creationId xmlns:a16="http://schemas.microsoft.com/office/drawing/2014/main" id="{F02A1299-E947-5C40-AD48-DE6F214428CD}"/>
-                </a:ext>
-              </a:extLst>
-            </p:cNvPr>
-            <p:cNvSpPr/>
-            <p:nvPr/>
-          </p:nvSpPr>
-          <p:spPr>
-            <a:xfrm>
-              <a:off x="2600960" y="3017520"/>
-              <a:ext cx="1808480" cy="528320"/>
-            </a:xfrm>
-            <a:prstGeom prst="roundRect">
-              <a:avLst/>
-            </a:prstGeom>
-            <a:solidFill>
-              <a:schemeClr val="accent4">
-                <a:lumMod val="20000"/>
-                <a:lumOff val="80000"/>
-              </a:schemeClr>
-            </a:solidFill>
-          </p:spPr>
-          <p:style>
-            <a:lnRef idx="2">
-              <a:schemeClr val="accent1">
-                <a:shade val="50000"/>
-              </a:schemeClr>
-            </a:lnRef>
-            <a:fillRef idx="1">
-              <a:schemeClr val="accent1"/>
-            </a:fillRef>
-            <a:effectRef idx="0">
-              <a:schemeClr val="accent1"/>
-            </a:effectRef>
-            <a:fontRef idx="minor">
-              <a:schemeClr val="lt1"/>
-            </a:fontRef>
-          </p:style>
-          <p:txBody>
-            <a:bodyPr rtlCol="0" anchor="ctr"/>
-            <a:lstStyle/>
-            <a:p>
-              <a:pPr algn="ctr"/>
-              <a:r>
-                <a:rPr kumimoji="1" lang="ja-JP" altLang="en-US">
-                  <a:solidFill>
-                    <a:schemeClr val="tx1"/>
-                  </a:solidFill>
-                </a:rPr>
-                <a:t>Thread</a:t>
-              </a:r>
-            </a:p>
-          </p:txBody>
-        </p:sp>
-        <p:sp>
-          <p:nvSpPr>
-            <p:cNvPr id="9" name="正方形/長方形 8">
-              <a:extLst>
-                <a:ext uri="{FF2B5EF4-FFF2-40B4-BE49-F238E27FC236}">
-                  <a16:creationId xmlns:a16="http://schemas.microsoft.com/office/drawing/2014/main" id="{B7462198-F07D-B54E-B107-6F742409A5CE}"/>
-                </a:ext>
-              </a:extLst>
-            </p:cNvPr>
-            <p:cNvSpPr/>
-            <p:nvPr/>
-          </p:nvSpPr>
-          <p:spPr>
-            <a:xfrm>
-              <a:off x="914400" y="1422400"/>
-              <a:ext cx="1209040" cy="1717040"/>
-            </a:xfrm>
-            <a:prstGeom prst="rect">
-              <a:avLst/>
-            </a:prstGeom>
-            <a:solidFill>
-              <a:schemeClr val="accent6">
-                <a:lumMod val="20000"/>
-                <a:lumOff val="80000"/>
-              </a:schemeClr>
-            </a:solidFill>
-          </p:spPr>
-          <p:style>
-            <a:lnRef idx="2">
-              <a:schemeClr val="accent1">
-                <a:shade val="50000"/>
-              </a:schemeClr>
-            </a:lnRef>
-            <a:fillRef idx="1">
-              <a:schemeClr val="accent1"/>
-            </a:fillRef>
-            <a:effectRef idx="0">
-              <a:schemeClr val="accent1"/>
-            </a:effectRef>
-            <a:fontRef idx="minor">
-              <a:schemeClr val="lt1"/>
-            </a:fontRef>
-          </p:style>
-          <p:txBody>
-            <a:bodyPr rtlCol="0" anchor="ctr"/>
-            <a:lstStyle/>
-            <a:p>
-              <a:pPr algn="ctr"/>
-              <a:r>
-                <a:rPr kumimoji="1" lang="ja-JP" altLang="en-US">
-                  <a:solidFill>
-                    <a:schemeClr val="tx1"/>
-                  </a:solidFill>
-                </a:rPr>
-                <a:t>Memory</a:t>
-              </a:r>
-            </a:p>
-          </p:txBody>
-        </p:sp>
-        <p:cxnSp>
-          <p:nvCxnSpPr>
-            <p:cNvPr id="11" name="直線矢印コネクタ 10">
-              <a:extLst>
-                <a:ext uri="{FF2B5EF4-FFF2-40B4-BE49-F238E27FC236}">
-                  <a16:creationId xmlns:a16="http://schemas.microsoft.com/office/drawing/2014/main" id="{A4F226BF-5C02-2F48-85DB-4D55D3BC2EFC}"/>
-                </a:ext>
-              </a:extLst>
-            </p:cNvPr>
-            <p:cNvCxnSpPr>
-              <a:stCxn id="4" idx="1"/>
-            </p:cNvCxnSpPr>
-            <p:nvPr/>
-          </p:nvCxnSpPr>
-          <p:spPr>
-            <a:xfrm flipH="1">
-              <a:off x="2123440" y="1412240"/>
-              <a:ext cx="487680" cy="345440"/>
-            </a:xfrm>
-            <a:prstGeom prst="straightConnector1">
-              <a:avLst/>
-            </a:prstGeom>
-            <a:ln>
-              <a:tailEnd type="triangle"/>
-            </a:ln>
-          </p:spPr>
-          <p:style>
-            <a:lnRef idx="1">
-              <a:schemeClr val="accent1"/>
-            </a:lnRef>
-            <a:fillRef idx="0">
-              <a:schemeClr val="accent1"/>
-            </a:fillRef>
-            <a:effectRef idx="0">
-              <a:schemeClr val="accent1"/>
-            </a:effectRef>
-            <a:fontRef idx="minor">
-              <a:schemeClr val="tx1"/>
-            </a:fontRef>
-          </p:style>
-        </p:cxnSp>
-        <p:cxnSp>
-          <p:nvCxnSpPr>
-            <p:cNvPr id="13" name="直線矢印コネクタ 12">
-              <a:extLst>
-                <a:ext uri="{FF2B5EF4-FFF2-40B4-BE49-F238E27FC236}">
-                  <a16:creationId xmlns:a16="http://schemas.microsoft.com/office/drawing/2014/main" id="{3D4046DB-3352-F84D-AF42-ABCBB51F11EC}"/>
-                </a:ext>
-              </a:extLst>
-            </p:cNvPr>
-            <p:cNvCxnSpPr>
-              <a:stCxn id="6" idx="1"/>
-            </p:cNvCxnSpPr>
-            <p:nvPr/>
-          </p:nvCxnSpPr>
-          <p:spPr>
-            <a:xfrm flipH="1">
-              <a:off x="2123440" y="2021840"/>
-              <a:ext cx="487680" cy="101600"/>
-            </a:xfrm>
-            <a:prstGeom prst="straightConnector1">
-              <a:avLst/>
-            </a:prstGeom>
-            <a:ln>
-              <a:tailEnd type="triangle"/>
-            </a:ln>
-          </p:spPr>
-          <p:style>
-            <a:lnRef idx="1">
-              <a:schemeClr val="accent1"/>
-            </a:lnRef>
-            <a:fillRef idx="0">
-              <a:schemeClr val="accent1"/>
-            </a:fillRef>
-            <a:effectRef idx="0">
-              <a:schemeClr val="accent1"/>
-            </a:effectRef>
-            <a:fontRef idx="minor">
-              <a:schemeClr val="tx1"/>
-            </a:fontRef>
-          </p:style>
-        </p:cxnSp>
-        <p:cxnSp>
-          <p:nvCxnSpPr>
-            <p:cNvPr id="15" name="直線矢印コネクタ 14">
-              <a:extLst>
-                <a:ext uri="{FF2B5EF4-FFF2-40B4-BE49-F238E27FC236}">
-                  <a16:creationId xmlns:a16="http://schemas.microsoft.com/office/drawing/2014/main" id="{5D3A5D73-F00B-9648-A6B9-BE10B823E95D}"/>
-                </a:ext>
-              </a:extLst>
-            </p:cNvPr>
-            <p:cNvCxnSpPr>
-              <a:stCxn id="7" idx="1"/>
-            </p:cNvCxnSpPr>
-            <p:nvPr/>
-          </p:nvCxnSpPr>
-          <p:spPr>
-            <a:xfrm flipH="1" flipV="1">
-              <a:off x="2113280" y="2560320"/>
-              <a:ext cx="487680" cy="111760"/>
-            </a:xfrm>
-            <a:prstGeom prst="straightConnector1">
-              <a:avLst/>
-            </a:prstGeom>
-            <a:ln>
-              <a:tailEnd type="triangle"/>
-            </a:ln>
-          </p:spPr>
-          <p:style>
-            <a:lnRef idx="1">
-              <a:schemeClr val="accent1"/>
-            </a:lnRef>
-            <a:fillRef idx="0">
-              <a:schemeClr val="accent1"/>
-            </a:fillRef>
-            <a:effectRef idx="0">
-              <a:schemeClr val="accent1"/>
-            </a:effectRef>
-            <a:fontRef idx="minor">
-              <a:schemeClr val="tx1"/>
-            </a:fontRef>
-          </p:style>
-        </p:cxnSp>
-        <p:cxnSp>
-          <p:nvCxnSpPr>
-            <p:cNvPr id="17" name="直線矢印コネクタ 16">
-              <a:extLst>
-                <a:ext uri="{FF2B5EF4-FFF2-40B4-BE49-F238E27FC236}">
-                  <a16:creationId xmlns:a16="http://schemas.microsoft.com/office/drawing/2014/main" id="{55973968-38A2-4447-9F52-0E7304E751D1}"/>
-                </a:ext>
-              </a:extLst>
-            </p:cNvPr>
-            <p:cNvCxnSpPr/>
-            <p:nvPr/>
-          </p:nvCxnSpPr>
-          <p:spPr>
-            <a:xfrm flipH="1" flipV="1">
-              <a:off x="2153920" y="2936240"/>
-              <a:ext cx="436880" cy="365760"/>
-            </a:xfrm>
-            <a:prstGeom prst="straightConnector1">
-              <a:avLst/>
-            </a:prstGeom>
-            <a:ln>
-              <a:tailEnd type="triangle"/>
-            </a:ln>
-          </p:spPr>
-          <p:style>
-            <a:lnRef idx="1">
-              <a:schemeClr val="accent1"/>
-            </a:lnRef>
-            <a:fillRef idx="0">
-              <a:schemeClr val="accent1"/>
-            </a:fillRef>
-            <a:effectRef idx="0">
-              <a:schemeClr val="accent1"/>
-            </a:effectRef>
-            <a:fontRef idx="minor">
-              <a:schemeClr val="tx1"/>
-            </a:fontRef>
-          </p:style>
-        </p:cxnSp>
-      </p:grpSp>
-      <p:grpSp>
-        <p:nvGrpSpPr>
-          <p:cNvPr id="19" name="グループ化 18">
-            <a:extLst>
-              <a:ext uri="{FF2B5EF4-FFF2-40B4-BE49-F238E27FC236}">
-                <a16:creationId xmlns:a16="http://schemas.microsoft.com/office/drawing/2014/main" id="{088BCE67-2FB4-7846-9899-8B5F0BE946B6}"/>
-              </a:ext>
-            </a:extLst>
-          </p:cNvPr>
-          <p:cNvGrpSpPr/>
-          <p:nvPr/>
-        </p:nvGrpSpPr>
-        <p:grpSpPr>
-          <a:xfrm>
-            <a:off x="4795520" y="1127760"/>
-            <a:ext cx="3738880" cy="3281680"/>
-            <a:chOff x="802640" y="538480"/>
-            <a:chExt cx="3738880" cy="3281680"/>
-          </a:xfrm>
-        </p:grpSpPr>
-        <p:sp>
-          <p:nvSpPr>
-            <p:cNvPr id="20" name="正方形/長方形 19">
-              <a:extLst>
-                <a:ext uri="{FF2B5EF4-FFF2-40B4-BE49-F238E27FC236}">
-                  <a16:creationId xmlns:a16="http://schemas.microsoft.com/office/drawing/2014/main" id="{DBA80B25-73FD-1649-B42A-1A40945944AC}"/>
-                </a:ext>
-              </a:extLst>
-            </p:cNvPr>
-            <p:cNvSpPr/>
-            <p:nvPr/>
-          </p:nvSpPr>
-          <p:spPr>
-            <a:xfrm>
-              <a:off x="802640" y="548640"/>
-              <a:ext cx="3738880" cy="3271520"/>
-            </a:xfrm>
-            <a:prstGeom prst="rect">
-              <a:avLst/>
-            </a:prstGeom>
-            <a:solidFill>
-              <a:schemeClr val="accent1">
-                <a:lumMod val="20000"/>
-                <a:lumOff val="80000"/>
-              </a:schemeClr>
-            </a:solidFill>
-            <a:ln>
-              <a:solidFill>
-                <a:schemeClr val="tx1"/>
-              </a:solidFill>
-            </a:ln>
-          </p:spPr>
-          <p:style>
-            <a:lnRef idx="2">
-              <a:schemeClr val="accent1">
-                <a:shade val="50000"/>
-              </a:schemeClr>
-            </a:lnRef>
-            <a:fillRef idx="1">
-              <a:schemeClr val="accent1"/>
-            </a:fillRef>
-            <a:effectRef idx="0">
-              <a:schemeClr val="accent1"/>
-            </a:effectRef>
-            <a:fontRef idx="minor">
-              <a:schemeClr val="lt1"/>
-            </a:fontRef>
-          </p:style>
-          <p:txBody>
-            <a:bodyPr rtlCol="0" anchor="ctr"/>
-            <a:lstStyle/>
-            <a:p>
-              <a:pPr algn="ctr"/>
-              <a:endParaRPr kumimoji="1" lang="ja-JP" altLang="en-US" sz="3600">
-                <a:solidFill>
-                  <a:schemeClr val="tx1"/>
-                </a:solidFill>
-              </a:endParaRPr>
-            </a:p>
-          </p:txBody>
-        </p:sp>
-        <p:sp>
-          <p:nvSpPr>
-            <p:cNvPr id="21" name="角丸四角形 20">
-              <a:extLst>
-                <a:ext uri="{FF2B5EF4-FFF2-40B4-BE49-F238E27FC236}">
-                  <a16:creationId xmlns:a16="http://schemas.microsoft.com/office/drawing/2014/main" id="{4835A501-1A22-0344-A9A9-28FF2B8F0BBD}"/>
-                </a:ext>
-              </a:extLst>
-            </p:cNvPr>
-            <p:cNvSpPr/>
-            <p:nvPr/>
-          </p:nvSpPr>
-          <p:spPr>
-            <a:xfrm>
-              <a:off x="2611120" y="1148080"/>
-              <a:ext cx="1808480" cy="528320"/>
-            </a:xfrm>
-            <a:prstGeom prst="roundRect">
-              <a:avLst/>
-            </a:prstGeom>
-            <a:solidFill>
-              <a:schemeClr val="accent4">
-                <a:lumMod val="20000"/>
-                <a:lumOff val="80000"/>
-              </a:schemeClr>
-            </a:solidFill>
-          </p:spPr>
-          <p:style>
-            <a:lnRef idx="2">
-              <a:schemeClr val="accent1">
-                <a:shade val="50000"/>
-              </a:schemeClr>
-            </a:lnRef>
-            <a:fillRef idx="1">
-              <a:schemeClr val="accent1"/>
-            </a:fillRef>
-            <a:effectRef idx="0">
-              <a:schemeClr val="accent1"/>
-            </a:effectRef>
-            <a:fontRef idx="minor">
-              <a:schemeClr val="lt1"/>
-            </a:fontRef>
-          </p:style>
-          <p:txBody>
-            <a:bodyPr rtlCol="0" anchor="ctr"/>
-            <a:lstStyle/>
-            <a:p>
-              <a:pPr algn="ctr"/>
-              <a:r>
-                <a:rPr kumimoji="1" lang="ja-JP" altLang="en-US">
-                  <a:solidFill>
-                    <a:schemeClr val="tx1"/>
-                  </a:solidFill>
-                </a:rPr>
-                <a:t>Thread</a:t>
-              </a:r>
-            </a:p>
-          </p:txBody>
-        </p:sp>
-        <p:sp>
-          <p:nvSpPr>
-            <p:cNvPr id="22" name="テキスト ボックス 21">
-              <a:extLst>
-                <a:ext uri="{FF2B5EF4-FFF2-40B4-BE49-F238E27FC236}">
-                  <a16:creationId xmlns:a16="http://schemas.microsoft.com/office/drawing/2014/main" id="{C95FFB1D-036D-0F41-9EA3-400E2283972F}"/>
-                </a:ext>
-              </a:extLst>
-            </p:cNvPr>
-            <p:cNvSpPr txBox="1"/>
-            <p:nvPr/>
-          </p:nvSpPr>
-          <p:spPr>
-            <a:xfrm>
-              <a:off x="812800" y="538480"/>
-              <a:ext cx="3718560" cy="523220"/>
-            </a:xfrm>
-            <a:prstGeom prst="rect">
-              <a:avLst/>
-            </a:prstGeom>
-            <a:noFill/>
-          </p:spPr>
-          <p:txBody>
-            <a:bodyPr wrap="square" rtlCol="0">
-              <a:spAutoFit/>
-            </a:bodyPr>
-            <a:lstStyle/>
-            <a:p>
-              <a:pPr algn="ctr"/>
-              <a:r>
-                <a:rPr kumimoji="1" lang="ja-JP" altLang="en-US" sz="2800"/>
-                <a:t>Process</a:t>
-              </a:r>
-            </a:p>
-          </p:txBody>
-        </p:sp>
-        <p:sp>
-          <p:nvSpPr>
-            <p:cNvPr id="23" name="角丸四角形 22">
-              <a:extLst>
-                <a:ext uri="{FF2B5EF4-FFF2-40B4-BE49-F238E27FC236}">
-                  <a16:creationId xmlns:a16="http://schemas.microsoft.com/office/drawing/2014/main" id="{48727B67-063F-9243-ADB6-CD8DB7003367}"/>
-                </a:ext>
-              </a:extLst>
-            </p:cNvPr>
-            <p:cNvSpPr/>
-            <p:nvPr/>
-          </p:nvSpPr>
-          <p:spPr>
-            <a:xfrm>
-              <a:off x="2611120" y="1757680"/>
-              <a:ext cx="1808480" cy="528320"/>
-            </a:xfrm>
-            <a:prstGeom prst="roundRect">
-              <a:avLst/>
-            </a:prstGeom>
-            <a:solidFill>
-              <a:schemeClr val="accent4">
-                <a:lumMod val="20000"/>
-                <a:lumOff val="80000"/>
-              </a:schemeClr>
-            </a:solidFill>
-          </p:spPr>
-          <p:style>
-            <a:lnRef idx="2">
-              <a:schemeClr val="accent1">
-                <a:shade val="50000"/>
-              </a:schemeClr>
-            </a:lnRef>
-            <a:fillRef idx="1">
-              <a:schemeClr val="accent1"/>
-            </a:fillRef>
-            <a:effectRef idx="0">
-              <a:schemeClr val="accent1"/>
-            </a:effectRef>
-            <a:fontRef idx="minor">
-              <a:schemeClr val="lt1"/>
-            </a:fontRef>
-          </p:style>
-          <p:txBody>
-            <a:bodyPr rtlCol="0" anchor="ctr"/>
-            <a:lstStyle/>
-            <a:p>
-              <a:pPr algn="ctr"/>
-              <a:r>
-                <a:rPr kumimoji="1" lang="ja-JP" altLang="en-US">
-                  <a:solidFill>
-                    <a:schemeClr val="tx1"/>
-                  </a:solidFill>
-                </a:rPr>
-                <a:t>Thread</a:t>
-              </a:r>
-            </a:p>
-          </p:txBody>
-        </p:sp>
-        <p:sp>
-          <p:nvSpPr>
-            <p:cNvPr id="24" name="角丸四角形 23">
-              <a:extLst>
-                <a:ext uri="{FF2B5EF4-FFF2-40B4-BE49-F238E27FC236}">
-                  <a16:creationId xmlns:a16="http://schemas.microsoft.com/office/drawing/2014/main" id="{0E677A89-CC83-1F4B-9F3B-221931D4013A}"/>
-                </a:ext>
-              </a:extLst>
-            </p:cNvPr>
-            <p:cNvSpPr/>
-            <p:nvPr/>
-          </p:nvSpPr>
-          <p:spPr>
-            <a:xfrm>
-              <a:off x="2600960" y="2407920"/>
-              <a:ext cx="1808480" cy="528320"/>
-            </a:xfrm>
-            <a:prstGeom prst="roundRect">
-              <a:avLst/>
-            </a:prstGeom>
-            <a:solidFill>
-              <a:schemeClr val="accent4">
-                <a:lumMod val="20000"/>
-                <a:lumOff val="80000"/>
-              </a:schemeClr>
-            </a:solidFill>
-          </p:spPr>
-          <p:style>
-            <a:lnRef idx="2">
-              <a:schemeClr val="accent1">
-                <a:shade val="50000"/>
-              </a:schemeClr>
-            </a:lnRef>
-            <a:fillRef idx="1">
-              <a:schemeClr val="accent1"/>
-            </a:fillRef>
-            <a:effectRef idx="0">
-              <a:schemeClr val="accent1"/>
-            </a:effectRef>
-            <a:fontRef idx="minor">
-              <a:schemeClr val="lt1"/>
-            </a:fontRef>
-          </p:style>
-          <p:txBody>
-            <a:bodyPr rtlCol="0" anchor="ctr"/>
-            <a:lstStyle/>
-            <a:p>
-              <a:pPr algn="ctr"/>
-              <a:r>
-                <a:rPr kumimoji="1" lang="ja-JP" altLang="en-US">
-                  <a:solidFill>
-                    <a:schemeClr val="tx1"/>
-                  </a:solidFill>
-                </a:rPr>
-                <a:t>Thread</a:t>
-              </a:r>
-            </a:p>
-          </p:txBody>
-        </p:sp>
-        <p:sp>
-          <p:nvSpPr>
-            <p:cNvPr id="25" name="角丸四角形 24">
-              <a:extLst>
-                <a:ext uri="{FF2B5EF4-FFF2-40B4-BE49-F238E27FC236}">
-                  <a16:creationId xmlns:a16="http://schemas.microsoft.com/office/drawing/2014/main" id="{D9048C0A-F44F-B64A-AC34-F94FAD139451}"/>
-                </a:ext>
-              </a:extLst>
-            </p:cNvPr>
-            <p:cNvSpPr/>
-            <p:nvPr/>
-          </p:nvSpPr>
-          <p:spPr>
-            <a:xfrm>
-              <a:off x="2600960" y="3017520"/>
-              <a:ext cx="1808480" cy="528320"/>
-            </a:xfrm>
-            <a:prstGeom prst="roundRect">
-              <a:avLst/>
-            </a:prstGeom>
-            <a:solidFill>
-              <a:schemeClr val="accent4">
-                <a:lumMod val="20000"/>
-                <a:lumOff val="80000"/>
-              </a:schemeClr>
-            </a:solidFill>
-          </p:spPr>
-          <p:style>
-            <a:lnRef idx="2">
-              <a:schemeClr val="accent1">
-                <a:shade val="50000"/>
-              </a:schemeClr>
-            </a:lnRef>
-            <a:fillRef idx="1">
-              <a:schemeClr val="accent1"/>
-            </a:fillRef>
-            <a:effectRef idx="0">
-              <a:schemeClr val="accent1"/>
-            </a:effectRef>
-            <a:fontRef idx="minor">
-              <a:schemeClr val="lt1"/>
-            </a:fontRef>
-          </p:style>
-          <p:txBody>
-            <a:bodyPr rtlCol="0" anchor="ctr"/>
-            <a:lstStyle/>
-            <a:p>
-              <a:pPr algn="ctr"/>
-              <a:r>
-                <a:rPr kumimoji="1" lang="ja-JP" altLang="en-US">
-                  <a:solidFill>
-                    <a:schemeClr val="tx1"/>
-                  </a:solidFill>
-                </a:rPr>
-                <a:t>Thread</a:t>
-              </a:r>
-            </a:p>
-          </p:txBody>
-        </p:sp>
-        <p:sp>
-          <p:nvSpPr>
-            <p:cNvPr id="26" name="正方形/長方形 25">
-              <a:extLst>
-                <a:ext uri="{FF2B5EF4-FFF2-40B4-BE49-F238E27FC236}">
-                  <a16:creationId xmlns:a16="http://schemas.microsoft.com/office/drawing/2014/main" id="{330FA818-5C9C-114B-A680-E9EC7CEDF796}"/>
-                </a:ext>
-              </a:extLst>
-            </p:cNvPr>
-            <p:cNvSpPr/>
-            <p:nvPr/>
-          </p:nvSpPr>
-          <p:spPr>
-            <a:xfrm>
-              <a:off x="914400" y="1422400"/>
-              <a:ext cx="1209040" cy="1717040"/>
-            </a:xfrm>
-            <a:prstGeom prst="rect">
-              <a:avLst/>
-            </a:prstGeom>
-            <a:solidFill>
-              <a:schemeClr val="accent6">
-                <a:lumMod val="20000"/>
-                <a:lumOff val="80000"/>
-              </a:schemeClr>
-            </a:solidFill>
-          </p:spPr>
-          <p:style>
-            <a:lnRef idx="2">
-              <a:schemeClr val="accent1">
-                <a:shade val="50000"/>
-              </a:schemeClr>
-            </a:lnRef>
-            <a:fillRef idx="1">
-              <a:schemeClr val="accent1"/>
-            </a:fillRef>
-            <a:effectRef idx="0">
-              <a:schemeClr val="accent1"/>
-            </a:effectRef>
-            <a:fontRef idx="minor">
-              <a:schemeClr val="lt1"/>
-            </a:fontRef>
-          </p:style>
-          <p:txBody>
-            <a:bodyPr rtlCol="0" anchor="ctr"/>
-            <a:lstStyle/>
-            <a:p>
-              <a:pPr algn="ctr"/>
-              <a:r>
-                <a:rPr kumimoji="1" lang="ja-JP" altLang="en-US">
-                  <a:solidFill>
-                    <a:schemeClr val="tx1"/>
-                  </a:solidFill>
-                </a:rPr>
-                <a:t>Memory</a:t>
-              </a:r>
-            </a:p>
-          </p:txBody>
-        </p:sp>
-        <p:cxnSp>
-          <p:nvCxnSpPr>
-            <p:cNvPr id="27" name="直線矢印コネクタ 26">
-              <a:extLst>
-                <a:ext uri="{FF2B5EF4-FFF2-40B4-BE49-F238E27FC236}">
-                  <a16:creationId xmlns:a16="http://schemas.microsoft.com/office/drawing/2014/main" id="{5A00E4D0-82DB-4643-91C1-5D572B862321}"/>
-                </a:ext>
-              </a:extLst>
-            </p:cNvPr>
-            <p:cNvCxnSpPr>
-              <a:stCxn id="21" idx="1"/>
-            </p:cNvCxnSpPr>
-            <p:nvPr/>
-          </p:nvCxnSpPr>
-          <p:spPr>
-            <a:xfrm flipH="1">
-              <a:off x="2123440" y="1412240"/>
-              <a:ext cx="487680" cy="345440"/>
-            </a:xfrm>
-            <a:prstGeom prst="straightConnector1">
-              <a:avLst/>
-            </a:prstGeom>
-            <a:ln>
-              <a:tailEnd type="triangle"/>
-            </a:ln>
-          </p:spPr>
-          <p:style>
-            <a:lnRef idx="1">
-              <a:schemeClr val="accent1"/>
-            </a:lnRef>
-            <a:fillRef idx="0">
-              <a:schemeClr val="accent1"/>
-            </a:fillRef>
-            <a:effectRef idx="0">
-              <a:schemeClr val="accent1"/>
-            </a:effectRef>
-            <a:fontRef idx="minor">
-              <a:schemeClr val="tx1"/>
-            </a:fontRef>
-          </p:style>
-        </p:cxnSp>
-        <p:cxnSp>
-          <p:nvCxnSpPr>
-            <p:cNvPr id="28" name="直線矢印コネクタ 27">
-              <a:extLst>
-                <a:ext uri="{FF2B5EF4-FFF2-40B4-BE49-F238E27FC236}">
-                  <a16:creationId xmlns:a16="http://schemas.microsoft.com/office/drawing/2014/main" id="{FA4F4795-0A53-124A-98A4-2DFA4D2F3A0A}"/>
-                </a:ext>
-              </a:extLst>
-            </p:cNvPr>
-            <p:cNvCxnSpPr>
-              <a:stCxn id="23" idx="1"/>
-            </p:cNvCxnSpPr>
-            <p:nvPr/>
-          </p:nvCxnSpPr>
-          <p:spPr>
-            <a:xfrm flipH="1">
-              <a:off x="2123440" y="2021840"/>
-              <a:ext cx="487680" cy="101600"/>
-            </a:xfrm>
-            <a:prstGeom prst="straightConnector1">
-              <a:avLst/>
-            </a:prstGeom>
-            <a:ln>
-              <a:tailEnd type="triangle"/>
-            </a:ln>
-          </p:spPr>
-          <p:style>
-            <a:lnRef idx="1">
-              <a:schemeClr val="accent1"/>
-            </a:lnRef>
-            <a:fillRef idx="0">
-              <a:schemeClr val="accent1"/>
-            </a:fillRef>
-            <a:effectRef idx="0">
-              <a:schemeClr val="accent1"/>
-            </a:effectRef>
-            <a:fontRef idx="minor">
-              <a:schemeClr val="tx1"/>
-            </a:fontRef>
-          </p:style>
-        </p:cxnSp>
-        <p:cxnSp>
-          <p:nvCxnSpPr>
-            <p:cNvPr id="29" name="直線矢印コネクタ 28">
-              <a:extLst>
-                <a:ext uri="{FF2B5EF4-FFF2-40B4-BE49-F238E27FC236}">
-                  <a16:creationId xmlns:a16="http://schemas.microsoft.com/office/drawing/2014/main" id="{6BAA0578-D656-394E-AD8C-D23C0F114548}"/>
-                </a:ext>
-              </a:extLst>
-            </p:cNvPr>
-            <p:cNvCxnSpPr>
-              <a:stCxn id="24" idx="1"/>
-            </p:cNvCxnSpPr>
-            <p:nvPr/>
-          </p:nvCxnSpPr>
-          <p:spPr>
-            <a:xfrm flipH="1" flipV="1">
-              <a:off x="2113280" y="2560320"/>
-              <a:ext cx="487680" cy="111760"/>
-            </a:xfrm>
-            <a:prstGeom prst="straightConnector1">
-              <a:avLst/>
-            </a:prstGeom>
-            <a:ln>
-              <a:tailEnd type="triangle"/>
-            </a:ln>
-          </p:spPr>
-          <p:style>
-            <a:lnRef idx="1">
-              <a:schemeClr val="accent1"/>
-            </a:lnRef>
-            <a:fillRef idx="0">
-              <a:schemeClr val="accent1"/>
-            </a:fillRef>
-            <a:effectRef idx="0">
-              <a:schemeClr val="accent1"/>
-            </a:effectRef>
-            <a:fontRef idx="minor">
-              <a:schemeClr val="tx1"/>
-            </a:fontRef>
-          </p:style>
-        </p:cxnSp>
-        <p:cxnSp>
-          <p:nvCxnSpPr>
-            <p:cNvPr id="30" name="直線矢印コネクタ 29">
-              <a:extLst>
-                <a:ext uri="{FF2B5EF4-FFF2-40B4-BE49-F238E27FC236}">
-                  <a16:creationId xmlns:a16="http://schemas.microsoft.com/office/drawing/2014/main" id="{E064F325-A9E2-9049-9921-239E07261BB6}"/>
-                </a:ext>
-              </a:extLst>
-            </p:cNvPr>
-            <p:cNvCxnSpPr/>
-            <p:nvPr/>
-          </p:nvCxnSpPr>
-          <p:spPr>
-            <a:xfrm flipH="1" flipV="1">
-              <a:off x="2153920" y="2936240"/>
-              <a:ext cx="436880" cy="365760"/>
-            </a:xfrm>
-            <a:prstGeom prst="straightConnector1">
-              <a:avLst/>
-            </a:prstGeom>
-            <a:ln>
-              <a:tailEnd type="triangle"/>
-            </a:ln>
-          </p:spPr>
-          <p:style>
-            <a:lnRef idx="1">
-              <a:schemeClr val="accent1"/>
-            </a:lnRef>
-            <a:fillRef idx="0">
-              <a:schemeClr val="accent1"/>
-            </a:fillRef>
-            <a:effectRef idx="0">
-              <a:schemeClr val="accent1"/>
-            </a:effectRef>
-            <a:fontRef idx="minor">
-              <a:schemeClr val="tx1"/>
-            </a:fontRef>
-          </p:style>
-        </p:cxnSp>
-      </p:grpSp>
-      <p:sp>
-        <p:nvSpPr>
-          <p:cNvPr id="32" name="テキスト ボックス 31">
-            <a:extLst>
-              <a:ext uri="{FF2B5EF4-FFF2-40B4-BE49-F238E27FC236}">
-                <a16:creationId xmlns:a16="http://schemas.microsoft.com/office/drawing/2014/main" id="{D5E00358-5100-2241-9388-54364F76C123}"/>
-              </a:ext>
-            </a:extLst>
-          </p:cNvPr>
-          <p:cNvSpPr txBox="1"/>
-          <p:nvPr/>
-        </p:nvSpPr>
-        <p:spPr>
-          <a:xfrm>
-            <a:off x="152400" y="375920"/>
-            <a:ext cx="8879840" cy="461665"/>
-          </a:xfrm>
-          <a:prstGeom prst="rect">
-            <a:avLst/>
-          </a:prstGeom>
-          <a:noFill/>
-        </p:spPr>
-        <p:txBody>
-          <a:bodyPr wrap="square" rtlCol="0">
-            <a:spAutoFit/>
-          </a:bodyPr>
-          <a:lstStyle/>
-          <a:p>
-            <a:pPr algn="ctr"/>
-            <a:r>
-              <a:rPr kumimoji="1" lang="ja-JP" altLang="en-US" sz="2400"/>
-              <a:t>Operating system (OS)</a:t>
-            </a:r>
-            <a:endParaRPr kumimoji="1" lang="ja-JP" altLang="en-US" sz="2400"/>
-          </a:p>
-        </p:txBody>
-      </p:sp>
-    </p:spTree>
-    <p:extLst>
-      <p:ext uri="{BB962C8B-B14F-4D97-AF65-F5344CB8AC3E}">
-        <p14:creationId xmlns:p14="http://schemas.microsoft.com/office/powerpoint/2010/main" val="2411882396"/>
-      </p:ext>
-    </p:extLst>
-  </p:cSld>
-  <p:clrMapOvr>
-    <a:masterClrMapping/>
-  </p:clrMapOvr>
-</p:sld>
-</file>
-
-<file path=ppt/slides/slide6.xml><?xml version="1.0" encoding="utf-8"?>
-<p:sld xmlns:a="http://schemas.openxmlformats.org/drawingml/2006/main" xmlns:r="http://schemas.openxmlformats.org/officeDocument/2006/relationships" xmlns:p="http://schemas.openxmlformats.org/presentationml/2006/main">
-  <p:cSld>
-    <p:spTree>
-      <p:nvGrpSpPr>
-        <p:cNvPr id="1" name=""/>
-        <p:cNvGrpSpPr/>
-        <p:nvPr/>
-      </p:nvGrpSpPr>
-      <p:grpSpPr>
-        <a:xfrm>
-          <a:off x="0" y="0"/>
-          <a:ext cx="0" cy="0"/>
-          <a:chOff x="0" y="0"/>
-          <a:chExt cx="0" cy="0"/>
-        </a:xfrm>
-      </p:grpSpPr>
-      <p:grpSp>
-        <p:nvGrpSpPr>
-          <p:cNvPr id="16" name="グループ化 15">
-            <a:extLst>
-              <a:ext uri="{FF2B5EF4-FFF2-40B4-BE49-F238E27FC236}">
-                <a16:creationId xmlns:a16="http://schemas.microsoft.com/office/drawing/2014/main" id="{AEE8C4B8-9868-054A-9A8A-207681878AC6}"/>
-              </a:ext>
-            </a:extLst>
-          </p:cNvPr>
-          <p:cNvGrpSpPr/>
-          <p:nvPr/>
-        </p:nvGrpSpPr>
-        <p:grpSpPr>
-          <a:xfrm>
-            <a:off x="497840" y="629920"/>
-            <a:ext cx="3627842" cy="3535680"/>
-            <a:chOff x="152400" y="325120"/>
-            <a:chExt cx="4399280" cy="4287520"/>
-          </a:xfrm>
-        </p:grpSpPr>
-        <p:sp>
-          <p:nvSpPr>
-            <p:cNvPr id="15" name="正方形/長方形 14">
-              <a:extLst>
-                <a:ext uri="{FF2B5EF4-FFF2-40B4-BE49-F238E27FC236}">
-                  <a16:creationId xmlns:a16="http://schemas.microsoft.com/office/drawing/2014/main" id="{3F28E56B-46F7-894F-8C58-467006BB23CB}"/>
-                </a:ext>
-              </a:extLst>
-            </p:cNvPr>
-            <p:cNvSpPr/>
-            <p:nvPr/>
-          </p:nvSpPr>
-          <p:spPr>
-            <a:xfrm>
-              <a:off x="172720" y="325120"/>
-              <a:ext cx="4378960" cy="4287520"/>
-            </a:xfrm>
-            <a:prstGeom prst="rect">
-              <a:avLst/>
-            </a:prstGeom>
-            <a:solidFill>
-              <a:schemeClr val="accent2">
-                <a:lumMod val="20000"/>
-                <a:lumOff val="80000"/>
-              </a:schemeClr>
-            </a:solidFill>
-          </p:spPr>
-          <p:style>
-            <a:lnRef idx="2">
-              <a:schemeClr val="accent1">
-                <a:shade val="50000"/>
-              </a:schemeClr>
-            </a:lnRef>
-            <a:fillRef idx="1">
-              <a:schemeClr val="accent1"/>
-            </a:fillRef>
-            <a:effectRef idx="0">
-              <a:schemeClr val="accent1"/>
-            </a:effectRef>
-            <a:fontRef idx="minor">
-              <a:schemeClr val="lt1"/>
-            </a:fontRef>
-          </p:style>
-          <p:txBody>
-            <a:bodyPr rtlCol="0" anchor="ctr"/>
-            <a:lstStyle/>
-            <a:p>
-              <a:pPr algn="ctr"/>
-              <a:endParaRPr kumimoji="1" lang="ja-JP" altLang="en-US" sz="1600"/>
-            </a:p>
-          </p:txBody>
-        </p:sp>
-        <p:grpSp>
-          <p:nvGrpSpPr>
-            <p:cNvPr id="2" name="グループ化 1">
-              <a:extLst>
-                <a:ext uri="{FF2B5EF4-FFF2-40B4-BE49-F238E27FC236}">
-                  <a16:creationId xmlns:a16="http://schemas.microsoft.com/office/drawing/2014/main" id="{C9E00260-194B-5242-A410-A730F5BB1C27}"/>
-                </a:ext>
-              </a:extLst>
-            </p:cNvPr>
-            <p:cNvGrpSpPr/>
-            <p:nvPr/>
-          </p:nvGrpSpPr>
-          <p:grpSpPr>
-            <a:xfrm>
-              <a:off x="609600" y="1127760"/>
-              <a:ext cx="3738880" cy="3281680"/>
-              <a:chOff x="802640" y="538480"/>
-              <a:chExt cx="3738880" cy="3281680"/>
-            </a:xfrm>
-          </p:grpSpPr>
-          <p:sp>
-            <p:nvSpPr>
-              <p:cNvPr id="3" name="正方形/長方形 2">
-                <a:extLst>
-                  <a:ext uri="{FF2B5EF4-FFF2-40B4-BE49-F238E27FC236}">
-                    <a16:creationId xmlns:a16="http://schemas.microsoft.com/office/drawing/2014/main" id="{E068502C-7BB1-874B-97CC-6832231A681E}"/>
-                  </a:ext>
-                </a:extLst>
-              </p:cNvPr>
-              <p:cNvSpPr/>
-              <p:nvPr/>
-            </p:nvSpPr>
-            <p:spPr>
-              <a:xfrm>
-                <a:off x="802640" y="548640"/>
-                <a:ext cx="3738880" cy="3271520"/>
-              </a:xfrm>
-              <a:prstGeom prst="rect">
-                <a:avLst/>
-              </a:prstGeom>
-              <a:solidFill>
-                <a:schemeClr val="accent1">
-                  <a:lumMod val="20000"/>
-                  <a:lumOff val="80000"/>
-                </a:schemeClr>
-              </a:solidFill>
-              <a:ln>
-                <a:solidFill>
-                  <a:schemeClr val="tx1"/>
-                </a:solidFill>
-              </a:ln>
-            </p:spPr>
-            <p:style>
-              <a:lnRef idx="2">
-                <a:schemeClr val="accent1">
-                  <a:shade val="50000"/>
-                </a:schemeClr>
-              </a:lnRef>
-              <a:fillRef idx="1">
-                <a:schemeClr val="accent1"/>
-              </a:fillRef>
-              <a:effectRef idx="0">
-                <a:schemeClr val="accent1"/>
-              </a:effectRef>
-              <a:fontRef idx="minor">
-                <a:schemeClr val="lt1"/>
-              </a:fontRef>
-            </p:style>
-            <p:txBody>
-              <a:bodyPr rtlCol="0" anchor="ctr"/>
-              <a:lstStyle/>
-              <a:p>
-                <a:pPr algn="ctr"/>
-                <a:endParaRPr kumimoji="1" lang="ja-JP" altLang="en-US" sz="3200">
-                  <a:solidFill>
-                    <a:schemeClr val="tx1"/>
-                  </a:solidFill>
-                </a:endParaRPr>
-              </a:p>
-            </p:txBody>
-          </p:sp>
-          <p:sp>
-            <p:nvSpPr>
-              <p:cNvPr id="4" name="角丸四角形 3">
-                <a:extLst>
-                  <a:ext uri="{FF2B5EF4-FFF2-40B4-BE49-F238E27FC236}">
-                    <a16:creationId xmlns:a16="http://schemas.microsoft.com/office/drawing/2014/main" id="{3F355A3C-F8D1-2947-89D3-EB88CF82A7F3}"/>
-                  </a:ext>
-                </a:extLst>
-              </p:cNvPr>
-              <p:cNvSpPr/>
-              <p:nvPr/>
-            </p:nvSpPr>
-            <p:spPr>
-              <a:xfrm>
-                <a:off x="2611120" y="1148080"/>
-                <a:ext cx="1808480" cy="528320"/>
-              </a:xfrm>
-              <a:prstGeom prst="roundRect">
-                <a:avLst/>
-              </a:prstGeom>
-              <a:solidFill>
-                <a:schemeClr val="accent4">
-                  <a:lumMod val="20000"/>
-                  <a:lumOff val="80000"/>
-                </a:schemeClr>
-              </a:solidFill>
-            </p:spPr>
-            <p:style>
-              <a:lnRef idx="2">
-                <a:schemeClr val="accent1">
-                  <a:shade val="50000"/>
-                </a:schemeClr>
-              </a:lnRef>
-              <a:fillRef idx="1">
-                <a:schemeClr val="accent1"/>
-              </a:fillRef>
-              <a:effectRef idx="0">
-                <a:schemeClr val="accent1"/>
-              </a:effectRef>
-              <a:fontRef idx="minor">
-                <a:schemeClr val="lt1"/>
-              </a:fontRef>
-            </p:style>
-            <p:txBody>
-              <a:bodyPr rtlCol="0" anchor="ctr"/>
-              <a:lstStyle/>
-              <a:p>
-                <a:pPr algn="ctr"/>
-                <a:r>
-                  <a:rPr kumimoji="1" lang="ja-JP" altLang="en-US" sz="1600">
-                    <a:solidFill>
-                      <a:schemeClr val="tx1"/>
-                    </a:solidFill>
-                  </a:rPr>
-                  <a:t>Thread</a:t>
-                </a:r>
-              </a:p>
-            </p:txBody>
-          </p:sp>
-          <p:sp>
-            <p:nvSpPr>
-              <p:cNvPr id="5" name="テキスト ボックス 4">
-                <a:extLst>
-                  <a:ext uri="{FF2B5EF4-FFF2-40B4-BE49-F238E27FC236}">
-                    <a16:creationId xmlns:a16="http://schemas.microsoft.com/office/drawing/2014/main" id="{FC74CAE7-82B7-E749-A2C4-25FB75978E62}"/>
-                  </a:ext>
-                </a:extLst>
-              </p:cNvPr>
-              <p:cNvSpPr txBox="1"/>
-              <p:nvPr/>
-            </p:nvSpPr>
-            <p:spPr>
-              <a:xfrm>
-                <a:off x="812800" y="538480"/>
-                <a:ext cx="3718560" cy="559835"/>
-              </a:xfrm>
-              <a:prstGeom prst="rect">
-                <a:avLst/>
-              </a:prstGeom>
-              <a:noFill/>
-            </p:spPr>
-            <p:txBody>
-              <a:bodyPr wrap="square" rtlCol="0">
-                <a:spAutoFit/>
-              </a:bodyPr>
-              <a:lstStyle/>
-              <a:p>
-                <a:pPr algn="ctr"/>
-                <a:r>
-                  <a:rPr kumimoji="1" lang="ja-JP" altLang="en-US" sz="2400"/>
-                  <a:t>Process</a:t>
-                </a:r>
-              </a:p>
-            </p:txBody>
-          </p:sp>
-          <p:sp>
-            <p:nvSpPr>
-              <p:cNvPr id="6" name="角丸四角形 5">
-                <a:extLst>
-                  <a:ext uri="{FF2B5EF4-FFF2-40B4-BE49-F238E27FC236}">
-                    <a16:creationId xmlns:a16="http://schemas.microsoft.com/office/drawing/2014/main" id="{FB1D3261-FE03-A045-9428-5B752DA3BFE2}"/>
-                  </a:ext>
-                </a:extLst>
-              </p:cNvPr>
-              <p:cNvSpPr/>
-              <p:nvPr/>
-            </p:nvSpPr>
-            <p:spPr>
-              <a:xfrm>
-                <a:off x="2611120" y="1757680"/>
-                <a:ext cx="1808480" cy="528320"/>
-              </a:xfrm>
-              <a:prstGeom prst="roundRect">
-                <a:avLst/>
-              </a:prstGeom>
-              <a:solidFill>
-                <a:schemeClr val="accent4">
-                  <a:lumMod val="20000"/>
-                  <a:lumOff val="80000"/>
-                </a:schemeClr>
-              </a:solidFill>
-            </p:spPr>
-            <p:style>
-              <a:lnRef idx="2">
-                <a:schemeClr val="accent1">
-                  <a:shade val="50000"/>
-                </a:schemeClr>
-              </a:lnRef>
-              <a:fillRef idx="1">
-                <a:schemeClr val="accent1"/>
-              </a:fillRef>
-              <a:effectRef idx="0">
-                <a:schemeClr val="accent1"/>
-              </a:effectRef>
-              <a:fontRef idx="minor">
-                <a:schemeClr val="lt1"/>
-              </a:fontRef>
-            </p:style>
-            <p:txBody>
-              <a:bodyPr rtlCol="0" anchor="ctr"/>
-              <a:lstStyle/>
-              <a:p>
-                <a:pPr algn="ctr"/>
-                <a:r>
-                  <a:rPr kumimoji="1" lang="ja-JP" altLang="en-US" sz="1600">
-                    <a:solidFill>
-                      <a:schemeClr val="tx1"/>
-                    </a:solidFill>
-                  </a:rPr>
-                  <a:t>Thread</a:t>
-                </a:r>
-              </a:p>
-            </p:txBody>
-          </p:sp>
-          <p:sp>
-            <p:nvSpPr>
-              <p:cNvPr id="7" name="角丸四角形 6">
-                <a:extLst>
-                  <a:ext uri="{FF2B5EF4-FFF2-40B4-BE49-F238E27FC236}">
-                    <a16:creationId xmlns:a16="http://schemas.microsoft.com/office/drawing/2014/main" id="{CBC1103E-EF20-4B46-AA6C-B5C5176E2165}"/>
-                  </a:ext>
-                </a:extLst>
-              </p:cNvPr>
-              <p:cNvSpPr/>
-              <p:nvPr/>
-            </p:nvSpPr>
-            <p:spPr>
-              <a:xfrm>
-                <a:off x="2600960" y="2407920"/>
-                <a:ext cx="1808480" cy="528320"/>
-              </a:xfrm>
-              <a:prstGeom prst="roundRect">
-                <a:avLst/>
-              </a:prstGeom>
-              <a:solidFill>
-                <a:schemeClr val="accent4">
-                  <a:lumMod val="20000"/>
-                  <a:lumOff val="80000"/>
-                </a:schemeClr>
-              </a:solidFill>
-            </p:spPr>
-            <p:style>
-              <a:lnRef idx="2">
-                <a:schemeClr val="accent1">
-                  <a:shade val="50000"/>
-                </a:schemeClr>
-              </a:lnRef>
-              <a:fillRef idx="1">
-                <a:schemeClr val="accent1"/>
-              </a:fillRef>
-              <a:effectRef idx="0">
-                <a:schemeClr val="accent1"/>
-              </a:effectRef>
-              <a:fontRef idx="minor">
-                <a:schemeClr val="lt1"/>
-              </a:fontRef>
-            </p:style>
-            <p:txBody>
-              <a:bodyPr rtlCol="0" anchor="ctr"/>
-              <a:lstStyle/>
-              <a:p>
-                <a:pPr algn="ctr"/>
-                <a:r>
-                  <a:rPr kumimoji="1" lang="ja-JP" altLang="en-US" sz="1600">
-                    <a:solidFill>
-                      <a:schemeClr val="tx1"/>
-                    </a:solidFill>
-                  </a:rPr>
-                  <a:t>Thread</a:t>
-                </a:r>
-              </a:p>
-            </p:txBody>
-          </p:sp>
-          <p:sp>
-            <p:nvSpPr>
-              <p:cNvPr id="8" name="角丸四角形 7">
-                <a:extLst>
-                  <a:ext uri="{FF2B5EF4-FFF2-40B4-BE49-F238E27FC236}">
-                    <a16:creationId xmlns:a16="http://schemas.microsoft.com/office/drawing/2014/main" id="{0FB6D8BD-BC47-6341-BB2D-E1F1DBE342A7}"/>
-                  </a:ext>
-                </a:extLst>
-              </p:cNvPr>
-              <p:cNvSpPr/>
-              <p:nvPr/>
-            </p:nvSpPr>
-            <p:spPr>
-              <a:xfrm>
-                <a:off x="2600960" y="3017520"/>
-                <a:ext cx="1808480" cy="528320"/>
-              </a:xfrm>
-              <a:prstGeom prst="roundRect">
-                <a:avLst/>
-              </a:prstGeom>
-              <a:solidFill>
-                <a:schemeClr val="accent4">
-                  <a:lumMod val="20000"/>
-                  <a:lumOff val="80000"/>
-                </a:schemeClr>
-              </a:solidFill>
-            </p:spPr>
-            <p:style>
-              <a:lnRef idx="2">
-                <a:schemeClr val="accent1">
-                  <a:shade val="50000"/>
-                </a:schemeClr>
-              </a:lnRef>
-              <a:fillRef idx="1">
-                <a:schemeClr val="accent1"/>
-              </a:fillRef>
-              <a:effectRef idx="0">
-                <a:schemeClr val="accent1"/>
-              </a:effectRef>
-              <a:fontRef idx="minor">
-                <a:schemeClr val="lt1"/>
-              </a:fontRef>
-            </p:style>
-            <p:txBody>
-              <a:bodyPr rtlCol="0" anchor="ctr"/>
-              <a:lstStyle/>
-              <a:p>
-                <a:pPr algn="ctr"/>
-                <a:r>
-                  <a:rPr kumimoji="1" lang="ja-JP" altLang="en-US" sz="1600">
-                    <a:solidFill>
-                      <a:schemeClr val="tx1"/>
-                    </a:solidFill>
-                  </a:rPr>
-                  <a:t>Thread</a:t>
-                </a:r>
-              </a:p>
-            </p:txBody>
-          </p:sp>
-          <p:sp>
-            <p:nvSpPr>
-              <p:cNvPr id="9" name="正方形/長方形 8">
-                <a:extLst>
-                  <a:ext uri="{FF2B5EF4-FFF2-40B4-BE49-F238E27FC236}">
-                    <a16:creationId xmlns:a16="http://schemas.microsoft.com/office/drawing/2014/main" id="{408221E3-C623-6847-BC0D-9D33B06EA2EA}"/>
-                  </a:ext>
-                </a:extLst>
-              </p:cNvPr>
-              <p:cNvSpPr/>
-              <p:nvPr/>
-            </p:nvSpPr>
-            <p:spPr>
-              <a:xfrm>
-                <a:off x="914400" y="1422400"/>
-                <a:ext cx="1209040" cy="1717040"/>
-              </a:xfrm>
-              <a:prstGeom prst="rect">
-                <a:avLst/>
-              </a:prstGeom>
-              <a:solidFill>
-                <a:schemeClr val="accent6">
-                  <a:lumMod val="20000"/>
-                  <a:lumOff val="80000"/>
-                </a:schemeClr>
-              </a:solidFill>
-            </p:spPr>
-            <p:style>
-              <a:lnRef idx="2">
-                <a:schemeClr val="accent1">
-                  <a:shade val="50000"/>
-                </a:schemeClr>
-              </a:lnRef>
-              <a:fillRef idx="1">
-                <a:schemeClr val="accent1"/>
-              </a:fillRef>
-              <a:effectRef idx="0">
-                <a:schemeClr val="accent1"/>
-              </a:effectRef>
-              <a:fontRef idx="minor">
-                <a:schemeClr val="lt1"/>
-              </a:fontRef>
-            </p:style>
-            <p:txBody>
-              <a:bodyPr rtlCol="0" anchor="ctr"/>
-              <a:lstStyle/>
-              <a:p>
-                <a:pPr algn="ctr"/>
-                <a:r>
-                  <a:rPr kumimoji="1" lang="ja-JP" altLang="en-US" sz="1600">
-                    <a:solidFill>
-                      <a:schemeClr val="tx1"/>
-                    </a:solidFill>
-                  </a:rPr>
-                  <a:t>Memory</a:t>
-                </a:r>
-              </a:p>
-            </p:txBody>
-          </p:sp>
-          <p:cxnSp>
-            <p:nvCxnSpPr>
-              <p:cNvPr id="10" name="直線矢印コネクタ 9">
-                <a:extLst>
-                  <a:ext uri="{FF2B5EF4-FFF2-40B4-BE49-F238E27FC236}">
-                    <a16:creationId xmlns:a16="http://schemas.microsoft.com/office/drawing/2014/main" id="{B5612549-49EF-1546-B145-697FEEE343CD}"/>
-                  </a:ext>
-                </a:extLst>
-              </p:cNvPr>
-              <p:cNvCxnSpPr>
-                <a:stCxn id="4" idx="1"/>
-              </p:cNvCxnSpPr>
-              <p:nvPr/>
-            </p:nvCxnSpPr>
-            <p:spPr>
-              <a:xfrm flipH="1">
-                <a:off x="2123440" y="1412240"/>
-                <a:ext cx="487680" cy="345440"/>
-              </a:xfrm>
-              <a:prstGeom prst="straightConnector1">
-                <a:avLst/>
-              </a:prstGeom>
-              <a:ln>
-                <a:tailEnd type="triangle"/>
-              </a:ln>
-            </p:spPr>
-            <p:style>
-              <a:lnRef idx="1">
-                <a:schemeClr val="accent1"/>
-              </a:lnRef>
-              <a:fillRef idx="0">
-                <a:schemeClr val="accent1"/>
-              </a:fillRef>
-              <a:effectRef idx="0">
-                <a:schemeClr val="accent1"/>
-              </a:effectRef>
-              <a:fontRef idx="minor">
-                <a:schemeClr val="tx1"/>
-              </a:fontRef>
-            </p:style>
-          </p:cxnSp>
-          <p:cxnSp>
-            <p:nvCxnSpPr>
-              <p:cNvPr id="11" name="直線矢印コネクタ 10">
-                <a:extLst>
-                  <a:ext uri="{FF2B5EF4-FFF2-40B4-BE49-F238E27FC236}">
-                    <a16:creationId xmlns:a16="http://schemas.microsoft.com/office/drawing/2014/main" id="{71A96666-5166-2D43-90CD-53C7711EB536}"/>
-                  </a:ext>
-                </a:extLst>
-              </p:cNvPr>
-              <p:cNvCxnSpPr>
-                <a:stCxn id="6" idx="1"/>
-              </p:cNvCxnSpPr>
-              <p:nvPr/>
-            </p:nvCxnSpPr>
-            <p:spPr>
-              <a:xfrm flipH="1">
-                <a:off x="2123440" y="2021840"/>
-                <a:ext cx="487680" cy="101600"/>
-              </a:xfrm>
-              <a:prstGeom prst="straightConnector1">
-                <a:avLst/>
-              </a:prstGeom>
-              <a:ln>
-                <a:tailEnd type="triangle"/>
-              </a:ln>
-            </p:spPr>
-            <p:style>
-              <a:lnRef idx="1">
-                <a:schemeClr val="accent1"/>
-              </a:lnRef>
-              <a:fillRef idx="0">
-                <a:schemeClr val="accent1"/>
-              </a:fillRef>
-              <a:effectRef idx="0">
-                <a:schemeClr val="accent1"/>
-              </a:effectRef>
-              <a:fontRef idx="minor">
-                <a:schemeClr val="tx1"/>
-              </a:fontRef>
-            </p:style>
-          </p:cxnSp>
-          <p:cxnSp>
-            <p:nvCxnSpPr>
-              <p:cNvPr id="12" name="直線矢印コネクタ 11">
-                <a:extLst>
-                  <a:ext uri="{FF2B5EF4-FFF2-40B4-BE49-F238E27FC236}">
-                    <a16:creationId xmlns:a16="http://schemas.microsoft.com/office/drawing/2014/main" id="{6C931A63-9819-4444-BDE1-7CEA60A45EFE}"/>
-                  </a:ext>
-                </a:extLst>
-              </p:cNvPr>
-              <p:cNvCxnSpPr>
-                <a:stCxn id="7" idx="1"/>
-              </p:cNvCxnSpPr>
-              <p:nvPr/>
-            </p:nvCxnSpPr>
-            <p:spPr>
-              <a:xfrm flipH="1" flipV="1">
-                <a:off x="2113280" y="2560320"/>
-                <a:ext cx="487680" cy="111760"/>
-              </a:xfrm>
-              <a:prstGeom prst="straightConnector1">
-                <a:avLst/>
-              </a:prstGeom>
-              <a:ln>
-                <a:tailEnd type="triangle"/>
-              </a:ln>
-            </p:spPr>
-            <p:style>
-              <a:lnRef idx="1">
-                <a:schemeClr val="accent1"/>
-              </a:lnRef>
-              <a:fillRef idx="0">
-                <a:schemeClr val="accent1"/>
-              </a:fillRef>
-              <a:effectRef idx="0">
-                <a:schemeClr val="accent1"/>
-              </a:effectRef>
-              <a:fontRef idx="minor">
-                <a:schemeClr val="tx1"/>
-              </a:fontRef>
-            </p:style>
-          </p:cxnSp>
-          <p:cxnSp>
-            <p:nvCxnSpPr>
-              <p:cNvPr id="13" name="直線矢印コネクタ 12">
-                <a:extLst>
-                  <a:ext uri="{FF2B5EF4-FFF2-40B4-BE49-F238E27FC236}">
-                    <a16:creationId xmlns:a16="http://schemas.microsoft.com/office/drawing/2014/main" id="{1682C217-9496-9048-ACFE-33B938197C91}"/>
-                  </a:ext>
-                </a:extLst>
-              </p:cNvPr>
-              <p:cNvCxnSpPr/>
-              <p:nvPr/>
-            </p:nvCxnSpPr>
-            <p:spPr>
-              <a:xfrm flipH="1" flipV="1">
-                <a:off x="2153920" y="2936240"/>
-                <a:ext cx="436880" cy="365760"/>
-              </a:xfrm>
-              <a:prstGeom prst="straightConnector1">
-                <a:avLst/>
-              </a:prstGeom>
-              <a:ln>
-                <a:tailEnd type="triangle"/>
-              </a:ln>
-            </p:spPr>
-            <p:style>
-              <a:lnRef idx="1">
-                <a:schemeClr val="accent1"/>
-              </a:lnRef>
-              <a:fillRef idx="0">
-                <a:schemeClr val="accent1"/>
-              </a:fillRef>
-              <a:effectRef idx="0">
-                <a:schemeClr val="accent1"/>
-              </a:effectRef>
-              <a:fontRef idx="minor">
-                <a:schemeClr val="tx1"/>
-              </a:fontRef>
-            </p:style>
-          </p:cxnSp>
-        </p:grpSp>
-        <p:sp>
-          <p:nvSpPr>
-            <p:cNvPr id="14" name="テキスト ボックス 13">
-              <a:extLst>
-                <a:ext uri="{FF2B5EF4-FFF2-40B4-BE49-F238E27FC236}">
-                  <a16:creationId xmlns:a16="http://schemas.microsoft.com/office/drawing/2014/main" id="{3ABDFB2A-FFE3-C34F-8842-9E86A76AB72A}"/>
-                </a:ext>
-              </a:extLst>
-            </p:cNvPr>
-            <p:cNvSpPr txBox="1"/>
-            <p:nvPr/>
-          </p:nvSpPr>
-          <p:spPr>
-            <a:xfrm>
-              <a:off x="152400" y="375920"/>
-              <a:ext cx="4358639" cy="485191"/>
-            </a:xfrm>
-            <a:prstGeom prst="rect">
-              <a:avLst/>
-            </a:prstGeom>
-            <a:noFill/>
-          </p:spPr>
-          <p:txBody>
-            <a:bodyPr wrap="square" rtlCol="0">
-              <a:spAutoFit/>
-            </a:bodyPr>
-            <a:lstStyle/>
-            <a:p>
-              <a:pPr algn="ctr"/>
-              <a:r>
-                <a:rPr kumimoji="1" lang="en-US" altLang="ja-JP" sz="2000"/>
-                <a:t>OS</a:t>
-              </a:r>
-              <a:endParaRPr kumimoji="1" lang="ja-JP" altLang="en-US" sz="2000"/>
-            </a:p>
-          </p:txBody>
-        </p:sp>
-      </p:grpSp>
-      <p:sp>
-        <p:nvSpPr>
-          <p:cNvPr id="17" name="テキスト ボックス 16">
-            <a:extLst>
-              <a:ext uri="{FF2B5EF4-FFF2-40B4-BE49-F238E27FC236}">
-                <a16:creationId xmlns:a16="http://schemas.microsoft.com/office/drawing/2014/main" id="{05839114-3F9D-2F41-A69D-B17642279861}"/>
-              </a:ext>
-            </a:extLst>
-          </p:cNvPr>
-          <p:cNvSpPr txBox="1"/>
-          <p:nvPr/>
-        </p:nvSpPr>
-        <p:spPr>
-          <a:xfrm>
-            <a:off x="1300480" y="101600"/>
-            <a:ext cx="2031325" cy="461665"/>
-          </a:xfrm>
-          <a:prstGeom prst="rect">
-            <a:avLst/>
-          </a:prstGeom>
-          <a:noFill/>
-        </p:spPr>
-        <p:txBody>
-          <a:bodyPr wrap="none" rtlCol="0">
-            <a:spAutoFit/>
-          </a:bodyPr>
-          <a:lstStyle/>
-          <a:p>
-            <a:r>
-              <a:rPr kumimoji="1" lang="ja-JP" altLang="en-US" sz="2400"/>
-              <a:t>Thread parallelism</a:t>
-            </a:r>
-          </a:p>
-        </p:txBody>
-      </p:sp>
-      <p:pic>
-        <p:nvPicPr>
-          <p:cNvPr id="19" name="図 18">
-            <a:extLst>
-              <a:ext uri="{FF2B5EF4-FFF2-40B4-BE49-F238E27FC236}">
-                <a16:creationId xmlns:a16="http://schemas.microsoft.com/office/drawing/2014/main" id="{D7C7935E-7383-B445-95C0-511C2C889591}"/>
-              </a:ext>
-            </a:extLst>
-          </p:cNvPr>
-          <p:cNvPicPr>
-            <a:picLocks noChangeAspect="1"/>
-          </p:cNvPicPr>
-          <p:nvPr/>
-        </p:nvPicPr>
-        <p:blipFill>
-          <a:blip r:embed="rId2"/>
-          <a:stretch>
-            <a:fillRect/>
-          </a:stretch>
-        </p:blipFill>
-        <p:spPr>
-          <a:xfrm>
-            <a:off x="482600" y="4360544"/>
-            <a:ext cx="584200" cy="569595"/>
-          </a:xfrm>
-          <a:prstGeom prst="rect">
-            <a:avLst/>
-          </a:prstGeom>
-        </p:spPr>
-      </p:pic>
-      <p:pic>
-        <p:nvPicPr>
-          <p:cNvPr id="20" name="図 19">
-            <a:extLst>
-              <a:ext uri="{FF2B5EF4-FFF2-40B4-BE49-F238E27FC236}">
-                <a16:creationId xmlns:a16="http://schemas.microsoft.com/office/drawing/2014/main" id="{BF743EA6-FF9E-9B4E-A62A-10480E6ADB9E}"/>
-              </a:ext>
-            </a:extLst>
-          </p:cNvPr>
-          <p:cNvPicPr>
-            <a:picLocks noChangeAspect="1"/>
-          </p:cNvPicPr>
-          <p:nvPr/>
-        </p:nvPicPr>
-        <p:blipFill>
-          <a:blip r:embed="rId3"/>
-          <a:stretch>
-            <a:fillRect/>
-          </a:stretch>
-        </p:blipFill>
-        <p:spPr>
-          <a:xfrm>
-            <a:off x="492760" y="5384800"/>
-            <a:ext cx="554892" cy="541020"/>
-          </a:xfrm>
-          <a:prstGeom prst="rect">
-            <a:avLst/>
-          </a:prstGeom>
-        </p:spPr>
-      </p:pic>
-      <p:sp>
-        <p:nvSpPr>
-          <p:cNvPr id="21" name="テキスト ボックス 20">
-            <a:extLst>
-              <a:ext uri="{FF2B5EF4-FFF2-40B4-BE49-F238E27FC236}">
-                <a16:creationId xmlns:a16="http://schemas.microsoft.com/office/drawing/2014/main" id="{C88D5FBC-5E86-8049-875A-5DDA0F579E44}"/>
-              </a:ext>
-            </a:extLst>
-          </p:cNvPr>
-          <p:cNvSpPr txBox="1"/>
-          <p:nvPr/>
-        </p:nvSpPr>
-        <p:spPr>
-          <a:xfrm>
-            <a:off x="1198880" y="4378960"/>
-            <a:ext cx="2723823" cy="646331"/>
-          </a:xfrm>
-          <a:prstGeom prst="rect">
-            <a:avLst/>
-          </a:prstGeom>
-          <a:noFill/>
-        </p:spPr>
-        <p:txBody>
-          <a:bodyPr wrap="none" rtlCol="0">
-            <a:spAutoFit/>
-          </a:bodyPr>
-          <a:lstStyle/>
-          <a:p>
-            <a:r>
-              <a:rPr kumimoji="1" lang="ja-JP" altLang="en-US"/>
-              <a:t>Easy to try casually</a:t>
-            </a:r>
-            <a:endParaRPr kumimoji="1" lang="en-US" altLang="ja-JP"/>
-          </a:p>
-          <a:p>
-            <a:r>
-              <a:rPr kumimoji="1" lang="ja-JP" altLang="en-US"/>
-              <a:t>Simple when it is simple</a:t>
-            </a:r>
-            <a:endParaRPr kumimoji="1" lang="en-US" altLang="ja-JP"/>
-          </a:p>
-        </p:txBody>
-      </p:sp>
-      <p:sp>
-        <p:nvSpPr>
-          <p:cNvPr id="22" name="テキスト ボックス 21">
-            <a:extLst>
-              <a:ext uri="{FF2B5EF4-FFF2-40B4-BE49-F238E27FC236}">
-                <a16:creationId xmlns:a16="http://schemas.microsoft.com/office/drawing/2014/main" id="{D80AD358-B4FF-8C41-A97A-A4C243CD6EAB}"/>
-              </a:ext>
-            </a:extLst>
-          </p:cNvPr>
-          <p:cNvSpPr txBox="1"/>
-          <p:nvPr/>
-        </p:nvSpPr>
-        <p:spPr>
-          <a:xfrm>
-            <a:off x="1097280" y="5354320"/>
-            <a:ext cx="3416320" cy="646331"/>
-          </a:xfrm>
-          <a:prstGeom prst="rect">
-            <a:avLst/>
-          </a:prstGeom>
-          <a:noFill/>
-        </p:spPr>
-        <p:txBody>
-          <a:bodyPr wrap="none" rtlCol="0">
-            <a:spAutoFit/>
-          </a:bodyPr>
-          <a:lstStyle/>
-          <a:p>
-            <a:r>
-              <a:rPr kumimoji="1" lang="ja-JP" altLang="en-US" b="1">
-                <a:solidFill>
-                  <a:srgbClr val="FF0000"/>
-                </a:solidFill>
-              </a:rPr>
-              <a:t>Cannot span multiple nodes</a:t>
-            </a:r>
-            <a:endParaRPr kumimoji="1" lang="en-US" altLang="ja-JP" b="1">
-              <a:solidFill>
-                <a:srgbClr val="FF0000"/>
-              </a:solidFill>
-            </a:endParaRPr>
-          </a:p>
-          <a:p>
-            <a:r>
-              <a:rPr kumimoji="1" lang="ja-JP" altLang="en-US" b="1">
-                <a:solidFill>
-                  <a:srgbClr val="FF0000"/>
-                </a:solidFill>
-              </a:rPr>
-              <a:t>Getting performance is surprisingly hard</a:t>
-            </a:r>
-            <a:endParaRPr kumimoji="1" lang="en-US" altLang="ja-JP" b="1">
-              <a:solidFill>
-                <a:srgbClr val="FF0000"/>
-              </a:solidFill>
-            </a:endParaRPr>
-          </a:p>
-        </p:txBody>
-      </p:sp>
-      <p:sp>
-        <p:nvSpPr>
-          <p:cNvPr id="51" name="テキスト ボックス 50">
-            <a:extLst>
-              <a:ext uri="{FF2B5EF4-FFF2-40B4-BE49-F238E27FC236}">
-                <a16:creationId xmlns:a16="http://schemas.microsoft.com/office/drawing/2014/main" id="{14389323-333F-4249-9372-E6355BC30F3F}"/>
-              </a:ext>
-            </a:extLst>
-          </p:cNvPr>
-          <p:cNvSpPr txBox="1"/>
-          <p:nvPr/>
-        </p:nvSpPr>
-        <p:spPr>
-          <a:xfrm>
-            <a:off x="6136640" y="81280"/>
-            <a:ext cx="2031325" cy="461665"/>
-          </a:xfrm>
-          <a:prstGeom prst="rect">
-            <a:avLst/>
-          </a:prstGeom>
-          <a:noFill/>
-        </p:spPr>
-        <p:txBody>
-          <a:bodyPr wrap="none" rtlCol="0">
-            <a:spAutoFit/>
-          </a:bodyPr>
-          <a:lstStyle/>
-          <a:p>
-            <a:r>
-              <a:rPr kumimoji="1" lang="ja-JP" altLang="en-US" sz="2400"/>
-              <a:t>Process parallelism</a:t>
-            </a:r>
-          </a:p>
-        </p:txBody>
-      </p:sp>
-      <p:grpSp>
-        <p:nvGrpSpPr>
-          <p:cNvPr id="53" name="グループ化 52">
-            <a:extLst>
-              <a:ext uri="{FF2B5EF4-FFF2-40B4-BE49-F238E27FC236}">
-                <a16:creationId xmlns:a16="http://schemas.microsoft.com/office/drawing/2014/main" id="{422E7C5D-4C23-014E-AD9D-AF26F105F2E5}"/>
-              </a:ext>
-            </a:extLst>
-          </p:cNvPr>
-          <p:cNvGrpSpPr/>
-          <p:nvPr/>
-        </p:nvGrpSpPr>
-        <p:grpSpPr>
-          <a:xfrm>
-            <a:off x="4822437" y="619760"/>
-            <a:ext cx="1984763" cy="3556000"/>
-            <a:chOff x="4822437" y="619760"/>
-            <a:chExt cx="1984763" cy="3556000"/>
-          </a:xfrm>
-        </p:grpSpPr>
-        <p:sp>
-          <p:nvSpPr>
-            <p:cNvPr id="24" name="正方形/長方形 23">
-              <a:extLst>
-                <a:ext uri="{FF2B5EF4-FFF2-40B4-BE49-F238E27FC236}">
-                  <a16:creationId xmlns:a16="http://schemas.microsoft.com/office/drawing/2014/main" id="{80C1AF87-D94B-3741-86E7-7670B0E6F18C}"/>
-                </a:ext>
-              </a:extLst>
-            </p:cNvPr>
-            <p:cNvSpPr/>
-            <p:nvPr/>
-          </p:nvSpPr>
-          <p:spPr>
-            <a:xfrm>
-              <a:off x="4822437" y="619760"/>
-              <a:ext cx="1984763" cy="3556000"/>
-            </a:xfrm>
-            <a:prstGeom prst="rect">
-              <a:avLst/>
-            </a:prstGeom>
-            <a:solidFill>
-              <a:schemeClr val="accent2">
-                <a:lumMod val="20000"/>
-                <a:lumOff val="80000"/>
-              </a:schemeClr>
-            </a:solidFill>
-          </p:spPr>
-          <p:style>
-            <a:lnRef idx="2">
-              <a:schemeClr val="accent1">
-                <a:shade val="50000"/>
-              </a:schemeClr>
-            </a:lnRef>
-            <a:fillRef idx="1">
-              <a:schemeClr val="accent1"/>
-            </a:fillRef>
-            <a:effectRef idx="0">
-              <a:schemeClr val="accent1"/>
-            </a:effectRef>
-            <a:fontRef idx="minor">
-              <a:schemeClr val="lt1"/>
-            </a:fontRef>
-          </p:style>
-          <p:txBody>
-            <a:bodyPr rtlCol="0" anchor="ctr"/>
-            <a:lstStyle/>
-            <a:p>
-              <a:pPr algn="ctr"/>
-              <a:endParaRPr kumimoji="1" lang="ja-JP" altLang="en-US" sz="1600"/>
-            </a:p>
-          </p:txBody>
-        </p:sp>
-        <p:sp>
-          <p:nvSpPr>
-            <p:cNvPr id="26" name="テキスト ボックス 25">
-              <a:extLst>
-                <a:ext uri="{FF2B5EF4-FFF2-40B4-BE49-F238E27FC236}">
-                  <a16:creationId xmlns:a16="http://schemas.microsoft.com/office/drawing/2014/main" id="{C9391D23-6F20-5442-BFE5-65EE69623A80}"/>
-                </a:ext>
-              </a:extLst>
-            </p:cNvPr>
-            <p:cNvSpPr txBox="1"/>
-            <p:nvPr/>
-          </p:nvSpPr>
-          <p:spPr>
-            <a:xfrm>
-              <a:off x="4826000" y="671812"/>
-              <a:ext cx="1981200" cy="400110"/>
-            </a:xfrm>
-            <a:prstGeom prst="rect">
-              <a:avLst/>
-            </a:prstGeom>
-            <a:noFill/>
-          </p:spPr>
-          <p:txBody>
-            <a:bodyPr wrap="square" rtlCol="0">
-              <a:spAutoFit/>
-            </a:bodyPr>
-            <a:lstStyle/>
-            <a:p>
-              <a:pPr algn="ctr"/>
-              <a:r>
-                <a:rPr kumimoji="1" lang="en-US" altLang="ja-JP" sz="2000"/>
-                <a:t>OS</a:t>
-              </a:r>
-              <a:endParaRPr kumimoji="1" lang="ja-JP" altLang="en-US" sz="2000"/>
-            </a:p>
-          </p:txBody>
-        </p:sp>
-        <p:sp>
-          <p:nvSpPr>
-            <p:cNvPr id="39" name="正方形/長方形 38">
-              <a:extLst>
-                <a:ext uri="{FF2B5EF4-FFF2-40B4-BE49-F238E27FC236}">
-                  <a16:creationId xmlns:a16="http://schemas.microsoft.com/office/drawing/2014/main" id="{93F86033-95B5-BE41-A09F-EF9007A8B5EF}"/>
-                </a:ext>
-              </a:extLst>
-            </p:cNvPr>
-            <p:cNvSpPr/>
-            <p:nvPr/>
-          </p:nvSpPr>
-          <p:spPr>
-            <a:xfrm>
-              <a:off x="5008880" y="1656080"/>
-              <a:ext cx="1696720" cy="497840"/>
-            </a:xfrm>
-            <a:prstGeom prst="rect">
-              <a:avLst/>
-            </a:prstGeom>
-            <a:solidFill>
-              <a:schemeClr val="accent1">
-                <a:lumMod val="20000"/>
-                <a:lumOff val="80000"/>
-              </a:schemeClr>
-            </a:solidFill>
-            <a:ln>
-              <a:solidFill>
-                <a:schemeClr val="tx1"/>
-              </a:solidFill>
-            </a:ln>
-          </p:spPr>
-          <p:style>
-            <a:lnRef idx="2">
-              <a:schemeClr val="accent1">
-                <a:shade val="50000"/>
-              </a:schemeClr>
-            </a:lnRef>
-            <a:fillRef idx="1">
-              <a:schemeClr val="accent1"/>
-            </a:fillRef>
-            <a:effectRef idx="0">
-              <a:schemeClr val="accent1"/>
-            </a:effectRef>
-            <a:fontRef idx="minor">
-              <a:schemeClr val="lt1"/>
-            </a:fontRef>
-          </p:style>
-          <p:txBody>
-            <a:bodyPr rtlCol="0" anchor="ctr"/>
-            <a:lstStyle/>
-            <a:p>
-              <a:pPr algn="ctr"/>
-              <a:r>
-                <a:rPr lang="ja-JP" altLang="en-US" sz="2000">
-                  <a:solidFill>
-                    <a:schemeClr val="tx1"/>
-                  </a:solidFill>
-                </a:rPr>
-                <a:t>Process</a:t>
-              </a:r>
-            </a:p>
-          </p:txBody>
-        </p:sp>
-        <p:sp>
-          <p:nvSpPr>
-            <p:cNvPr id="50" name="正方形/長方形 49">
-              <a:extLst>
-                <a:ext uri="{FF2B5EF4-FFF2-40B4-BE49-F238E27FC236}">
-                  <a16:creationId xmlns:a16="http://schemas.microsoft.com/office/drawing/2014/main" id="{EF2359AD-C93F-C64E-8996-8189D6D9D908}"/>
-                </a:ext>
-              </a:extLst>
-            </p:cNvPr>
-            <p:cNvSpPr/>
-            <p:nvPr/>
-          </p:nvSpPr>
-          <p:spPr>
-            <a:xfrm>
-              <a:off x="4998720" y="2946400"/>
-              <a:ext cx="1696720" cy="497840"/>
-            </a:xfrm>
-            <a:prstGeom prst="rect">
-              <a:avLst/>
-            </a:prstGeom>
-            <a:solidFill>
-              <a:schemeClr val="accent1">
-                <a:lumMod val="20000"/>
-                <a:lumOff val="80000"/>
-              </a:schemeClr>
-            </a:solidFill>
-            <a:ln>
-              <a:solidFill>
-                <a:schemeClr val="tx1"/>
-              </a:solidFill>
-            </a:ln>
-          </p:spPr>
-          <p:style>
-            <a:lnRef idx="2">
-              <a:schemeClr val="accent1">
-                <a:shade val="50000"/>
-              </a:schemeClr>
-            </a:lnRef>
-            <a:fillRef idx="1">
-              <a:schemeClr val="accent1"/>
-            </a:fillRef>
-            <a:effectRef idx="0">
-              <a:schemeClr val="accent1"/>
-            </a:effectRef>
-            <a:fontRef idx="minor">
-              <a:schemeClr val="lt1"/>
-            </a:fontRef>
-          </p:style>
-          <p:txBody>
-            <a:bodyPr rtlCol="0" anchor="ctr"/>
-            <a:lstStyle/>
-            <a:p>
-              <a:pPr algn="ctr"/>
-              <a:r>
-                <a:rPr lang="ja-JP" altLang="en-US" sz="2000">
-                  <a:solidFill>
-                    <a:schemeClr val="tx1"/>
-                  </a:solidFill>
-                </a:rPr>
-                <a:t>Process</a:t>
-              </a:r>
-            </a:p>
-          </p:txBody>
-        </p:sp>
-        <p:sp>
-          <p:nvSpPr>
-            <p:cNvPr id="52" name="上下矢印 51">
-              <a:extLst>
-                <a:ext uri="{FF2B5EF4-FFF2-40B4-BE49-F238E27FC236}">
-                  <a16:creationId xmlns:a16="http://schemas.microsoft.com/office/drawing/2014/main" id="{8FF997E0-65F8-B447-AB4B-C661572BC61B}"/>
-                </a:ext>
-              </a:extLst>
-            </p:cNvPr>
-            <p:cNvSpPr/>
-            <p:nvPr/>
-          </p:nvSpPr>
-          <p:spPr>
-            <a:xfrm>
-              <a:off x="5638800" y="2225040"/>
-              <a:ext cx="355600" cy="670560"/>
-            </a:xfrm>
-            <a:prstGeom prst="upDownArrow">
-              <a:avLst/>
-            </a:prstGeom>
-            <a:solidFill>
-              <a:srgbClr val="FF0000"/>
-            </a:solidFill>
-            <a:ln>
-              <a:solidFill>
-                <a:schemeClr val="tx1"/>
-              </a:solidFill>
-            </a:ln>
-          </p:spPr>
-          <p:style>
-            <a:lnRef idx="2">
-              <a:schemeClr val="accent1">
-                <a:shade val="50000"/>
-              </a:schemeClr>
-            </a:lnRef>
-            <a:fillRef idx="1">
-              <a:schemeClr val="accent1"/>
-            </a:fillRef>
-            <a:effectRef idx="0">
-              <a:schemeClr val="accent1"/>
-            </a:effectRef>
-            <a:fontRef idx="minor">
-              <a:schemeClr val="lt1"/>
-            </a:fontRef>
-          </p:style>
-          <p:txBody>
-            <a:bodyPr rtlCol="0" anchor="ctr"/>
-            <a:lstStyle/>
-            <a:p>
-              <a:pPr algn="ctr"/>
-              <a:endParaRPr kumimoji="1" lang="ja-JP" altLang="en-US"/>
-            </a:p>
-          </p:txBody>
-        </p:sp>
-      </p:grpSp>
-      <p:grpSp>
-        <p:nvGrpSpPr>
-          <p:cNvPr id="55" name="グループ化 54">
-            <a:extLst>
-              <a:ext uri="{FF2B5EF4-FFF2-40B4-BE49-F238E27FC236}">
-                <a16:creationId xmlns:a16="http://schemas.microsoft.com/office/drawing/2014/main" id="{5468A919-4BC9-5E4F-8E54-FED383B3028B}"/>
-              </a:ext>
-            </a:extLst>
-          </p:cNvPr>
-          <p:cNvGrpSpPr/>
-          <p:nvPr/>
-        </p:nvGrpSpPr>
-        <p:grpSpPr>
-          <a:xfrm>
-            <a:off x="7606277" y="640080"/>
-            <a:ext cx="1984763" cy="3556000"/>
-            <a:chOff x="4822437" y="619760"/>
-            <a:chExt cx="1984763" cy="3556000"/>
-          </a:xfrm>
-        </p:grpSpPr>
-        <p:sp>
-          <p:nvSpPr>
-            <p:cNvPr id="56" name="正方形/長方形 55">
-              <a:extLst>
-                <a:ext uri="{FF2B5EF4-FFF2-40B4-BE49-F238E27FC236}">
-                  <a16:creationId xmlns:a16="http://schemas.microsoft.com/office/drawing/2014/main" id="{DB52FB18-8F7C-7E43-8086-B7F331643495}"/>
-                </a:ext>
-              </a:extLst>
-            </p:cNvPr>
-            <p:cNvSpPr/>
-            <p:nvPr/>
-          </p:nvSpPr>
-          <p:spPr>
-            <a:xfrm>
-              <a:off x="4822437" y="619760"/>
-              <a:ext cx="1984763" cy="3556000"/>
-            </a:xfrm>
-            <a:prstGeom prst="rect">
-              <a:avLst/>
-            </a:prstGeom>
-            <a:solidFill>
-              <a:schemeClr val="accent2">
-                <a:lumMod val="20000"/>
-                <a:lumOff val="80000"/>
-              </a:schemeClr>
-            </a:solidFill>
-          </p:spPr>
-          <p:style>
-            <a:lnRef idx="2">
-              <a:schemeClr val="accent1">
-                <a:shade val="50000"/>
-              </a:schemeClr>
-            </a:lnRef>
-            <a:fillRef idx="1">
-              <a:schemeClr val="accent1"/>
-            </a:fillRef>
-            <a:effectRef idx="0">
-              <a:schemeClr val="accent1"/>
-            </a:effectRef>
-            <a:fontRef idx="minor">
-              <a:schemeClr val="lt1"/>
-            </a:fontRef>
-          </p:style>
-          <p:txBody>
-            <a:bodyPr rtlCol="0" anchor="ctr"/>
-            <a:lstStyle/>
-            <a:p>
-              <a:pPr algn="ctr"/>
-              <a:endParaRPr kumimoji="1" lang="ja-JP" altLang="en-US" sz="1600"/>
-            </a:p>
-          </p:txBody>
-        </p:sp>
-        <p:sp>
-          <p:nvSpPr>
-            <p:cNvPr id="57" name="テキスト ボックス 56">
-              <a:extLst>
-                <a:ext uri="{FF2B5EF4-FFF2-40B4-BE49-F238E27FC236}">
-                  <a16:creationId xmlns:a16="http://schemas.microsoft.com/office/drawing/2014/main" id="{5424E1CC-DFB6-984C-B527-EF157F38292F}"/>
-                </a:ext>
-              </a:extLst>
-            </p:cNvPr>
-            <p:cNvSpPr txBox="1"/>
-            <p:nvPr/>
-          </p:nvSpPr>
-          <p:spPr>
-            <a:xfrm>
-              <a:off x="4826000" y="671812"/>
-              <a:ext cx="1981200" cy="400110"/>
-            </a:xfrm>
-            <a:prstGeom prst="rect">
-              <a:avLst/>
-            </a:prstGeom>
-            <a:noFill/>
-          </p:spPr>
-          <p:txBody>
-            <a:bodyPr wrap="square" rtlCol="0">
-              <a:spAutoFit/>
-            </a:bodyPr>
-            <a:lstStyle/>
-            <a:p>
-              <a:pPr algn="ctr"/>
-              <a:r>
-                <a:rPr kumimoji="1" lang="en-US" altLang="ja-JP" sz="2000"/>
-                <a:t>OS</a:t>
-              </a:r>
-              <a:endParaRPr kumimoji="1" lang="ja-JP" altLang="en-US" sz="2000"/>
-            </a:p>
-          </p:txBody>
-        </p:sp>
-        <p:sp>
-          <p:nvSpPr>
-            <p:cNvPr id="58" name="正方形/長方形 57">
-              <a:extLst>
-                <a:ext uri="{FF2B5EF4-FFF2-40B4-BE49-F238E27FC236}">
-                  <a16:creationId xmlns:a16="http://schemas.microsoft.com/office/drawing/2014/main" id="{184777AF-D532-3F42-B2D0-7FE42771BF0C}"/>
-                </a:ext>
-              </a:extLst>
-            </p:cNvPr>
-            <p:cNvSpPr/>
-            <p:nvPr/>
-          </p:nvSpPr>
-          <p:spPr>
-            <a:xfrm>
-              <a:off x="5008880" y="1656080"/>
-              <a:ext cx="1696720" cy="497840"/>
-            </a:xfrm>
-            <a:prstGeom prst="rect">
-              <a:avLst/>
-            </a:prstGeom>
-            <a:solidFill>
-              <a:schemeClr val="accent1">
-                <a:lumMod val="20000"/>
-                <a:lumOff val="80000"/>
-              </a:schemeClr>
-            </a:solidFill>
-            <a:ln>
-              <a:solidFill>
-                <a:schemeClr val="tx1"/>
-              </a:solidFill>
-            </a:ln>
-          </p:spPr>
-          <p:style>
-            <a:lnRef idx="2">
-              <a:schemeClr val="accent1">
-                <a:shade val="50000"/>
-              </a:schemeClr>
-            </a:lnRef>
-            <a:fillRef idx="1">
-              <a:schemeClr val="accent1"/>
-            </a:fillRef>
-            <a:effectRef idx="0">
-              <a:schemeClr val="accent1"/>
-            </a:effectRef>
-            <a:fontRef idx="minor">
-              <a:schemeClr val="lt1"/>
-            </a:fontRef>
-          </p:style>
-          <p:txBody>
-            <a:bodyPr rtlCol="0" anchor="ctr"/>
-            <a:lstStyle/>
-            <a:p>
-              <a:pPr algn="ctr"/>
-              <a:r>
-                <a:rPr lang="ja-JP" altLang="en-US" sz="2000">
-                  <a:solidFill>
-                    <a:schemeClr val="tx1"/>
-                  </a:solidFill>
-                </a:rPr>
-                <a:t>Process</a:t>
-              </a:r>
-            </a:p>
-          </p:txBody>
-        </p:sp>
-        <p:sp>
-          <p:nvSpPr>
-            <p:cNvPr id="59" name="正方形/長方形 58">
-              <a:extLst>
-                <a:ext uri="{FF2B5EF4-FFF2-40B4-BE49-F238E27FC236}">
-                  <a16:creationId xmlns:a16="http://schemas.microsoft.com/office/drawing/2014/main" id="{20B97EE5-C136-3745-820E-049A4448BE0A}"/>
-                </a:ext>
-              </a:extLst>
-            </p:cNvPr>
-            <p:cNvSpPr/>
-            <p:nvPr/>
-          </p:nvSpPr>
-          <p:spPr>
-            <a:xfrm>
-              <a:off x="4998720" y="2946400"/>
-              <a:ext cx="1696720" cy="497840"/>
-            </a:xfrm>
-            <a:prstGeom prst="rect">
-              <a:avLst/>
-            </a:prstGeom>
-            <a:solidFill>
-              <a:schemeClr val="accent1">
-                <a:lumMod val="20000"/>
-                <a:lumOff val="80000"/>
-              </a:schemeClr>
-            </a:solidFill>
-            <a:ln>
-              <a:solidFill>
-                <a:schemeClr val="tx1"/>
-              </a:solidFill>
-            </a:ln>
-          </p:spPr>
-          <p:style>
-            <a:lnRef idx="2">
-              <a:schemeClr val="accent1">
-                <a:shade val="50000"/>
-              </a:schemeClr>
-            </a:lnRef>
-            <a:fillRef idx="1">
-              <a:schemeClr val="accent1"/>
-            </a:fillRef>
-            <a:effectRef idx="0">
-              <a:schemeClr val="accent1"/>
-            </a:effectRef>
-            <a:fontRef idx="minor">
-              <a:schemeClr val="lt1"/>
-            </a:fontRef>
-          </p:style>
-          <p:txBody>
-            <a:bodyPr rtlCol="0" anchor="ctr"/>
-            <a:lstStyle/>
-            <a:p>
-              <a:pPr algn="ctr"/>
-              <a:r>
-                <a:rPr lang="ja-JP" altLang="en-US" sz="2000">
-                  <a:solidFill>
-                    <a:schemeClr val="tx1"/>
-                  </a:solidFill>
-                </a:rPr>
-                <a:t>Process</a:t>
-              </a:r>
-            </a:p>
-          </p:txBody>
-        </p:sp>
-        <p:sp>
-          <p:nvSpPr>
-            <p:cNvPr id="60" name="上下矢印 59">
-              <a:extLst>
-                <a:ext uri="{FF2B5EF4-FFF2-40B4-BE49-F238E27FC236}">
-                  <a16:creationId xmlns:a16="http://schemas.microsoft.com/office/drawing/2014/main" id="{FD59A557-FDE1-7F4A-AA4C-2DBBB79E47EB}"/>
-                </a:ext>
-              </a:extLst>
-            </p:cNvPr>
-            <p:cNvSpPr/>
-            <p:nvPr/>
-          </p:nvSpPr>
-          <p:spPr>
-            <a:xfrm>
-              <a:off x="5638800" y="2225040"/>
-              <a:ext cx="355600" cy="670560"/>
-            </a:xfrm>
-            <a:prstGeom prst="upDownArrow">
-              <a:avLst/>
-            </a:prstGeom>
-            <a:solidFill>
-              <a:srgbClr val="FF0000"/>
-            </a:solidFill>
-            <a:ln>
-              <a:solidFill>
-                <a:schemeClr val="tx1"/>
-              </a:solidFill>
-            </a:ln>
-          </p:spPr>
-          <p:style>
-            <a:lnRef idx="2">
-              <a:schemeClr val="accent1">
-                <a:shade val="50000"/>
-              </a:schemeClr>
-            </a:lnRef>
-            <a:fillRef idx="1">
-              <a:schemeClr val="accent1"/>
-            </a:fillRef>
-            <a:effectRef idx="0">
-              <a:schemeClr val="accent1"/>
-            </a:effectRef>
-            <a:fontRef idx="minor">
-              <a:schemeClr val="lt1"/>
-            </a:fontRef>
-          </p:style>
-          <p:txBody>
-            <a:bodyPr rtlCol="0" anchor="ctr"/>
-            <a:lstStyle/>
-            <a:p>
-              <a:pPr algn="ctr"/>
-              <a:endParaRPr kumimoji="1" lang="ja-JP" altLang="en-US"/>
-            </a:p>
-          </p:txBody>
-        </p:sp>
-      </p:grpSp>
-      <p:sp>
-        <p:nvSpPr>
-          <p:cNvPr id="61" name="上下矢印 60">
-            <a:extLst>
-              <a:ext uri="{FF2B5EF4-FFF2-40B4-BE49-F238E27FC236}">
-                <a16:creationId xmlns:a16="http://schemas.microsoft.com/office/drawing/2014/main" id="{43CAB16A-EFCD-C547-9E63-C813969FB8E4}"/>
-              </a:ext>
-            </a:extLst>
-          </p:cNvPr>
-          <p:cNvSpPr/>
-          <p:nvPr/>
-        </p:nvSpPr>
-        <p:spPr>
-          <a:xfrm rot="5400000">
-            <a:off x="7040880" y="1595120"/>
-            <a:ext cx="355600" cy="670560"/>
-          </a:xfrm>
-          <a:prstGeom prst="upDownArrow">
-            <a:avLst/>
-          </a:prstGeom>
-          <a:solidFill>
-            <a:srgbClr val="FF0000"/>
-          </a:solidFill>
-          <a:ln>
-            <a:solidFill>
-              <a:schemeClr val="tx1"/>
-            </a:solidFill>
-          </a:ln>
-        </p:spPr>
-        <p:style>
-          <a:lnRef idx="2">
-            <a:schemeClr val="accent1">
-              <a:shade val="50000"/>
-            </a:schemeClr>
-          </a:lnRef>
-          <a:fillRef idx="1">
-            <a:schemeClr val="accent1"/>
-          </a:fillRef>
-          <a:effectRef idx="0">
-            <a:schemeClr val="accent1"/>
-          </a:effectRef>
-          <a:fontRef idx="minor">
-            <a:schemeClr val="lt1"/>
-          </a:fontRef>
-        </p:style>
-        <p:txBody>
-          <a:bodyPr rtlCol="0" anchor="ctr"/>
-          <a:lstStyle/>
-          <a:p>
-            <a:pPr algn="ctr"/>
-            <a:endParaRPr kumimoji="1" lang="ja-JP" altLang="en-US"/>
-          </a:p>
-        </p:txBody>
-      </p:sp>
-      <p:sp>
-        <p:nvSpPr>
-          <p:cNvPr id="62" name="上下矢印 61">
-            <a:extLst>
-              <a:ext uri="{FF2B5EF4-FFF2-40B4-BE49-F238E27FC236}">
-                <a16:creationId xmlns:a16="http://schemas.microsoft.com/office/drawing/2014/main" id="{5EB2BD24-C5A1-0C4C-B7EE-760F5A1F05FB}"/>
-              </a:ext>
-            </a:extLst>
-          </p:cNvPr>
-          <p:cNvSpPr/>
-          <p:nvPr/>
-        </p:nvSpPr>
-        <p:spPr>
-          <a:xfrm rot="5400000">
-            <a:off x="7030720" y="2854960"/>
-            <a:ext cx="355600" cy="670560"/>
-          </a:xfrm>
-          <a:prstGeom prst="upDownArrow">
-            <a:avLst/>
-          </a:prstGeom>
-          <a:solidFill>
-            <a:srgbClr val="FF0000"/>
-          </a:solidFill>
-          <a:ln>
-            <a:solidFill>
-              <a:schemeClr val="tx1"/>
-            </a:solidFill>
-          </a:ln>
-        </p:spPr>
-        <p:style>
-          <a:lnRef idx="2">
-            <a:schemeClr val="accent1">
-              <a:shade val="50000"/>
-            </a:schemeClr>
-          </a:lnRef>
-          <a:fillRef idx="1">
-            <a:schemeClr val="accent1"/>
-          </a:fillRef>
-          <a:effectRef idx="0">
-            <a:schemeClr val="accent1"/>
-          </a:effectRef>
-          <a:fontRef idx="minor">
-            <a:schemeClr val="lt1"/>
-          </a:fontRef>
-        </p:style>
-        <p:txBody>
-          <a:bodyPr rtlCol="0" anchor="ctr"/>
-          <a:lstStyle/>
-          <a:p>
-            <a:pPr algn="ctr"/>
-            <a:endParaRPr kumimoji="1" lang="ja-JP" altLang="en-US"/>
-          </a:p>
-        </p:txBody>
-      </p:sp>
-      <p:sp>
-        <p:nvSpPr>
-          <p:cNvPr id="63" name="テキスト ボックス 62">
-            <a:extLst>
-              <a:ext uri="{FF2B5EF4-FFF2-40B4-BE49-F238E27FC236}">
-                <a16:creationId xmlns:a16="http://schemas.microsoft.com/office/drawing/2014/main" id="{73198895-B055-F64D-AFA4-D017CFE1DDA9}"/>
-              </a:ext>
-            </a:extLst>
-          </p:cNvPr>
-          <p:cNvSpPr txBox="1"/>
-          <p:nvPr/>
-        </p:nvSpPr>
-        <p:spPr>
-          <a:xfrm>
-            <a:off x="5913120" y="2377440"/>
-            <a:ext cx="646331" cy="369332"/>
-          </a:xfrm>
-          <a:prstGeom prst="rect">
-            <a:avLst/>
-          </a:prstGeom>
-          <a:noFill/>
-        </p:spPr>
-        <p:txBody>
-          <a:bodyPr wrap="none" rtlCol="0">
-            <a:spAutoFit/>
-          </a:bodyPr>
-          <a:lstStyle/>
-          <a:p>
-            <a:r>
-              <a:rPr kumimoji="1" lang="ja-JP" altLang="en-US"/>
-              <a:t>Communication</a:t>
-            </a:r>
-          </a:p>
-        </p:txBody>
-      </p:sp>
-      <p:sp>
-        <p:nvSpPr>
-          <p:cNvPr id="64" name="テキスト ボックス 63">
-            <a:extLst>
-              <a:ext uri="{FF2B5EF4-FFF2-40B4-BE49-F238E27FC236}">
-                <a16:creationId xmlns:a16="http://schemas.microsoft.com/office/drawing/2014/main" id="{CFDC4B11-35AC-504B-A3AE-6357F65589A8}"/>
-              </a:ext>
-            </a:extLst>
-          </p:cNvPr>
-          <p:cNvSpPr txBox="1"/>
-          <p:nvPr/>
-        </p:nvSpPr>
-        <p:spPr>
-          <a:xfrm>
-            <a:off x="8788400" y="2407920"/>
-            <a:ext cx="646331" cy="369332"/>
-          </a:xfrm>
-          <a:prstGeom prst="rect">
-            <a:avLst/>
-          </a:prstGeom>
-          <a:noFill/>
-        </p:spPr>
-        <p:txBody>
-          <a:bodyPr wrap="none" rtlCol="0">
-            <a:spAutoFit/>
-          </a:bodyPr>
-          <a:lstStyle/>
-          <a:p>
-            <a:r>
-              <a:rPr kumimoji="1" lang="ja-JP" altLang="en-US"/>
-              <a:t>Communication</a:t>
-            </a:r>
-          </a:p>
-        </p:txBody>
-      </p:sp>
-      <p:sp>
-        <p:nvSpPr>
-          <p:cNvPr id="65" name="テキスト ボックス 64">
-            <a:extLst>
-              <a:ext uri="{FF2B5EF4-FFF2-40B4-BE49-F238E27FC236}">
-                <a16:creationId xmlns:a16="http://schemas.microsoft.com/office/drawing/2014/main" id="{5F484C2D-C7E6-124E-9CDE-F865081091BC}"/>
-              </a:ext>
-            </a:extLst>
-          </p:cNvPr>
-          <p:cNvSpPr txBox="1"/>
-          <p:nvPr/>
-        </p:nvSpPr>
-        <p:spPr>
-          <a:xfrm>
-            <a:off x="6878320" y="1361440"/>
-            <a:ext cx="646331" cy="369332"/>
-          </a:xfrm>
-          <a:prstGeom prst="rect">
-            <a:avLst/>
-          </a:prstGeom>
-          <a:noFill/>
-        </p:spPr>
-        <p:txBody>
-          <a:bodyPr wrap="none" rtlCol="0">
-            <a:spAutoFit/>
-          </a:bodyPr>
-          <a:lstStyle/>
-          <a:p>
-            <a:r>
-              <a:rPr kumimoji="1" lang="ja-JP" altLang="en-US"/>
-              <a:t>Communication</a:t>
-            </a:r>
-          </a:p>
-        </p:txBody>
-      </p:sp>
-      <p:sp>
-        <p:nvSpPr>
-          <p:cNvPr id="66" name="テキスト ボックス 65">
-            <a:extLst>
-              <a:ext uri="{FF2B5EF4-FFF2-40B4-BE49-F238E27FC236}">
-                <a16:creationId xmlns:a16="http://schemas.microsoft.com/office/drawing/2014/main" id="{AA592A2A-A288-9045-BDCA-0B08A956B73C}"/>
-              </a:ext>
-            </a:extLst>
-          </p:cNvPr>
-          <p:cNvSpPr txBox="1"/>
-          <p:nvPr/>
-        </p:nvSpPr>
-        <p:spPr>
-          <a:xfrm>
-            <a:off x="6898640" y="2611120"/>
-            <a:ext cx="646331" cy="369332"/>
-          </a:xfrm>
-          <a:prstGeom prst="rect">
-            <a:avLst/>
-          </a:prstGeom>
-          <a:noFill/>
-        </p:spPr>
-        <p:txBody>
-          <a:bodyPr wrap="none" rtlCol="0">
-            <a:spAutoFit/>
-          </a:bodyPr>
-          <a:lstStyle/>
-          <a:p>
-            <a:r>
-              <a:rPr kumimoji="1" lang="ja-JP" altLang="en-US"/>
-              <a:t>Communication</a:t>
-            </a:r>
-          </a:p>
-        </p:txBody>
-      </p:sp>
-      <p:pic>
-        <p:nvPicPr>
-          <p:cNvPr id="67" name="図 66">
-            <a:extLst>
-              <a:ext uri="{FF2B5EF4-FFF2-40B4-BE49-F238E27FC236}">
-                <a16:creationId xmlns:a16="http://schemas.microsoft.com/office/drawing/2014/main" id="{558E4129-C645-7D4D-B39B-EABB813B168B}"/>
-              </a:ext>
-            </a:extLst>
-          </p:cNvPr>
-          <p:cNvPicPr>
-            <a:picLocks noChangeAspect="1"/>
-          </p:cNvPicPr>
-          <p:nvPr/>
-        </p:nvPicPr>
-        <p:blipFill>
-          <a:blip r:embed="rId2"/>
-          <a:stretch>
-            <a:fillRect/>
-          </a:stretch>
-        </p:blipFill>
-        <p:spPr>
-          <a:xfrm>
-            <a:off x="5064760" y="4319904"/>
-            <a:ext cx="584200" cy="569595"/>
-          </a:xfrm>
-          <a:prstGeom prst="rect">
-            <a:avLst/>
-          </a:prstGeom>
-        </p:spPr>
-      </p:pic>
-      <p:pic>
-        <p:nvPicPr>
-          <p:cNvPr id="68" name="図 67">
-            <a:extLst>
-              <a:ext uri="{FF2B5EF4-FFF2-40B4-BE49-F238E27FC236}">
-                <a16:creationId xmlns:a16="http://schemas.microsoft.com/office/drawing/2014/main" id="{4D5E76E2-7424-C749-8D98-1DA59BDC27F7}"/>
-              </a:ext>
-            </a:extLst>
-          </p:cNvPr>
-          <p:cNvPicPr>
-            <a:picLocks noChangeAspect="1"/>
-          </p:cNvPicPr>
-          <p:nvPr/>
-        </p:nvPicPr>
-        <p:blipFill>
-          <a:blip r:embed="rId3"/>
-          <a:stretch>
-            <a:fillRect/>
-          </a:stretch>
-        </p:blipFill>
-        <p:spPr>
-          <a:xfrm>
-            <a:off x="5074920" y="5344160"/>
-            <a:ext cx="554892" cy="541020"/>
-          </a:xfrm>
-          <a:prstGeom prst="rect">
-            <a:avLst/>
-          </a:prstGeom>
-        </p:spPr>
-      </p:pic>
-      <p:sp>
-        <p:nvSpPr>
-          <p:cNvPr id="69" name="テキスト ボックス 68">
-            <a:extLst>
-              <a:ext uri="{FF2B5EF4-FFF2-40B4-BE49-F238E27FC236}">
-                <a16:creationId xmlns:a16="http://schemas.microsoft.com/office/drawing/2014/main" id="{279DDBE8-16CE-1C46-A37A-197F87F96329}"/>
-              </a:ext>
-            </a:extLst>
-          </p:cNvPr>
-          <p:cNvSpPr txBox="1"/>
-          <p:nvPr/>
-        </p:nvSpPr>
-        <p:spPr>
-          <a:xfrm>
-            <a:off x="5628640" y="4307840"/>
-            <a:ext cx="3185487" cy="369332"/>
-          </a:xfrm>
-          <a:prstGeom prst="rect">
-            <a:avLst/>
-          </a:prstGeom>
-          <a:noFill/>
-        </p:spPr>
-        <p:txBody>
-          <a:bodyPr wrap="none" rtlCol="0">
-            <a:spAutoFit/>
-          </a:bodyPr>
-          <a:lstStyle/>
-          <a:p>
-            <a:r>
-              <a:rPr kumimoji="1" lang="ja-JP" altLang="en-US" b="1">
-                <a:solidFill>
-                  <a:srgbClr val="FF0000"/>
-                </a:solidFill>
-              </a:rPr>
-              <a:t>Can span multiple nodes</a:t>
-            </a:r>
-          </a:p>
-        </p:txBody>
-      </p:sp>
-      <p:sp>
-        <p:nvSpPr>
-          <p:cNvPr id="71" name="正方形/長方形 70">
-            <a:extLst>
-              <a:ext uri="{FF2B5EF4-FFF2-40B4-BE49-F238E27FC236}">
-                <a16:creationId xmlns:a16="http://schemas.microsoft.com/office/drawing/2014/main" id="{35EDFEB0-9D0E-1C4D-B66E-ED72450A8F28}"/>
-              </a:ext>
-            </a:extLst>
-          </p:cNvPr>
-          <p:cNvSpPr/>
-          <p:nvPr/>
-        </p:nvSpPr>
-        <p:spPr>
-          <a:xfrm>
-            <a:off x="5660072" y="4636254"/>
-            <a:ext cx="2954655" cy="369332"/>
-          </a:xfrm>
-          <a:prstGeom prst="rect">
-            <a:avLst/>
-          </a:prstGeom>
-        </p:spPr>
-        <p:txBody>
-          <a:bodyPr wrap="none">
-            <a:spAutoFit/>
-          </a:bodyPr>
-          <a:lstStyle/>
-          <a:p>
-            <a:r>
-              <a:rPr lang="ja-JP" altLang="en-US"/>
-              <a:t>Parallelized exactly as written</a:t>
-            </a:r>
-          </a:p>
-        </p:txBody>
-      </p:sp>
-      <p:sp>
-        <p:nvSpPr>
-          <p:cNvPr id="72" name="正方形/長方形 71">
-            <a:extLst>
-              <a:ext uri="{FF2B5EF4-FFF2-40B4-BE49-F238E27FC236}">
-                <a16:creationId xmlns:a16="http://schemas.microsoft.com/office/drawing/2014/main" id="{D7B1A7AD-79FB-EA43-8B54-5EAE186E8885}"/>
-              </a:ext>
-            </a:extLst>
-          </p:cNvPr>
-          <p:cNvSpPr/>
-          <p:nvPr/>
-        </p:nvSpPr>
-        <p:spPr>
-          <a:xfrm>
-            <a:off x="5609272" y="5438894"/>
-            <a:ext cx="4108817" cy="369332"/>
-          </a:xfrm>
-          <a:prstGeom prst="rect">
-            <a:avLst/>
-          </a:prstGeom>
-        </p:spPr>
-        <p:txBody>
-          <a:bodyPr wrap="none">
-            <a:spAutoFit/>
-          </a:bodyPr>
-          <a:lstStyle/>
-          <a:p>
-            <a:r>
-              <a:rPr lang="ja-JP" altLang="en-US"/>
-              <a:t>Communication must be written explicitly</a:t>
-            </a:r>
-          </a:p>
-        </p:txBody>
-      </p:sp>
-    </p:spTree>
-    <p:extLst>
-      <p:ext uri="{BB962C8B-B14F-4D97-AF65-F5344CB8AC3E}">
-        <p14:creationId xmlns:p14="http://schemas.microsoft.com/office/powerpoint/2010/main" val="2823907590"/>
-      </p:ext>
-    </p:extLst>
-  </p:cSld>
-  <p:clrMapOvr>
-    <a:masterClrMapping/>
-  </p:clrMapOvr>
-</p:sld>
-</file>
-
-<file path=ppt/slides/slide7.xml><?xml version="1.0" encoding="utf-8"?>
-<p:sld xmlns:a="http://schemas.openxmlformats.org/drawingml/2006/main" xmlns:r="http://schemas.openxmlformats.org/officeDocument/2006/relationships" xmlns:p="http://schemas.openxmlformats.org/presentationml/2006/main">
-  <p:cSld>
-    <p:spTree>
-      <p:nvGrpSpPr>
-        <p:cNvPr id="1" name=""/>
-        <p:cNvGrpSpPr/>
-        <p:nvPr/>
-      </p:nvGrpSpPr>
-      <p:grpSpPr>
-        <a:xfrm>
-          <a:off x="0" y="0"/>
-          <a:ext cx="0" cy="0"/>
-          <a:chOff x="0" y="0"/>
-          <a:chExt cx="0" cy="0"/>
-        </a:xfrm>
-      </p:grpSpPr>
-      <p:pic>
-        <p:nvPicPr>
-          <p:cNvPr id="2" name="図 1">
-            <a:extLst>
-              <a:ext uri="{FF2B5EF4-FFF2-40B4-BE49-F238E27FC236}">
-                <a16:creationId xmlns:a16="http://schemas.microsoft.com/office/drawing/2014/main" id="{3677A06B-B589-8F4F-92E7-0B86823C5525}"/>
-              </a:ext>
-            </a:extLst>
-          </p:cNvPr>
-          <p:cNvPicPr>
-            <a:picLocks noChangeAspect="1"/>
-          </p:cNvPicPr>
-          <p:nvPr/>
-        </p:nvPicPr>
-        <p:blipFill>
-          <a:blip r:embed="rId2"/>
-          <a:stretch>
-            <a:fillRect/>
-          </a:stretch>
-        </p:blipFill>
-        <p:spPr>
-          <a:xfrm>
-            <a:off x="1412240" y="2255520"/>
-            <a:ext cx="1557223" cy="1996440"/>
-          </a:xfrm>
-          <a:prstGeom prst="rect">
-            <a:avLst/>
-          </a:prstGeom>
-        </p:spPr>
-      </p:pic>
-      <p:pic>
-        <p:nvPicPr>
-          <p:cNvPr id="3" name="図 2">
-            <a:extLst>
-              <a:ext uri="{FF2B5EF4-FFF2-40B4-BE49-F238E27FC236}">
-                <a16:creationId xmlns:a16="http://schemas.microsoft.com/office/drawing/2014/main" id="{2E5F2145-8B68-634A-8108-EB3F339E0B24}"/>
-              </a:ext>
-            </a:extLst>
-          </p:cNvPr>
-          <p:cNvPicPr>
-            <a:picLocks noChangeAspect="1"/>
-          </p:cNvPicPr>
-          <p:nvPr/>
-        </p:nvPicPr>
-        <p:blipFill>
-          <a:blip r:embed="rId3"/>
-          <a:stretch>
-            <a:fillRect/>
-          </a:stretch>
-        </p:blipFill>
-        <p:spPr>
-          <a:xfrm>
-            <a:off x="4211320" y="1798320"/>
-            <a:ext cx="2656840" cy="2656840"/>
-          </a:xfrm>
-          <a:prstGeom prst="rect">
-            <a:avLst/>
-          </a:prstGeom>
-        </p:spPr>
-      </p:pic>
-      <p:sp>
-        <p:nvSpPr>
-          <p:cNvPr id="4" name="角丸四角形吹き出し 3">
-            <a:extLst>
-              <a:ext uri="{FF2B5EF4-FFF2-40B4-BE49-F238E27FC236}">
-                <a16:creationId xmlns:a16="http://schemas.microsoft.com/office/drawing/2014/main" id="{767C01C5-EC1D-5140-80E4-BB5BF08A6FA0}"/>
-              </a:ext>
-            </a:extLst>
-          </p:cNvPr>
-          <p:cNvSpPr/>
-          <p:nvPr/>
-        </p:nvSpPr>
-        <p:spPr>
-          <a:xfrm>
-            <a:off x="2143760" y="1148080"/>
-            <a:ext cx="3281680" cy="853440"/>
-          </a:xfrm>
-          <a:prstGeom prst="wedgeRoundRectCallout">
-            <a:avLst>
-              <a:gd name="adj1" fmla="val -39961"/>
-              <a:gd name="adj2" fmla="val 73026"/>
-              <a:gd name="adj3" fmla="val 16667"/>
-            </a:avLst>
-          </a:prstGeom>
-          <a:noFill/>
-          <a:ln>
-            <a:solidFill>
-              <a:schemeClr val="tx1"/>
-            </a:solidFill>
-          </a:ln>
-        </p:spPr>
-        <p:style>
-          <a:lnRef idx="2">
-            <a:schemeClr val="accent1">
-              <a:shade val="50000"/>
-            </a:schemeClr>
-          </a:lnRef>
-          <a:fillRef idx="1">
-            <a:schemeClr val="accent1"/>
-          </a:fillRef>
-          <a:effectRef idx="0">
-            <a:schemeClr val="accent1"/>
-          </a:effectRef>
-          <a:fontRef idx="minor">
-            <a:schemeClr val="lt1"/>
-          </a:fontRef>
-        </p:style>
-        <p:txBody>
-          <a:bodyPr rtlCol="0" anchor="ctr"/>
-          <a:lstStyle/>
-          <a:p>
-            <a:pPr algn="ctr"/>
-            <a:endParaRPr kumimoji="1" lang="ja-JP" altLang="en-US"/>
-          </a:p>
-        </p:txBody>
-      </p:sp>
-      <p:sp>
-        <p:nvSpPr>
-          <p:cNvPr id="5" name="テキスト ボックス 4">
-            <a:extLst>
-              <a:ext uri="{FF2B5EF4-FFF2-40B4-BE49-F238E27FC236}">
-                <a16:creationId xmlns:a16="http://schemas.microsoft.com/office/drawing/2014/main" id="{E7C03675-205D-D148-B026-50B4FF131134}"/>
-              </a:ext>
-            </a:extLst>
-          </p:cNvPr>
-          <p:cNvSpPr txBox="1"/>
-          <p:nvPr/>
-        </p:nvSpPr>
-        <p:spPr>
-          <a:xfrm>
-            <a:off x="2346960" y="1239520"/>
-            <a:ext cx="2954655" cy="646331"/>
-          </a:xfrm>
-          <a:prstGeom prst="rect">
-            <a:avLst/>
-          </a:prstGeom>
-          <a:noFill/>
-        </p:spPr>
-        <p:txBody>
-          <a:bodyPr wrap="none" rtlCol="0">
-            <a:spAutoFit/>
-          </a:bodyPr>
-          <a:lstStyle/>
-          <a:p>
-            <a:r>
-              <a:rPr kumimoji="1" lang="ja-JP" altLang="en-US"/>
-              <a:t>That job running over there?</a:t>
-            </a:r>
-            <a:endParaRPr kumimoji="1" lang="en-US" altLang="ja-JP"/>
-          </a:p>
-          <a:p>
-            <a:r>
-              <a:rPr kumimoji="1" lang="ja-JP" altLang="en-US"/>
-              <a:t>It's mine, haha.</a:t>
-            </a:r>
-            <a:endParaRPr kumimoji="1" lang="en-US" altLang="ja-JP"/>
-          </a:p>
-        </p:txBody>
-      </p:sp>
-      <p:sp>
-        <p:nvSpPr>
-          <p:cNvPr id="6" name="テキスト ボックス 5">
-            <a:extLst>
-              <a:ext uri="{FF2B5EF4-FFF2-40B4-BE49-F238E27FC236}">
-                <a16:creationId xmlns:a16="http://schemas.microsoft.com/office/drawing/2014/main" id="{78612310-C3E5-9145-B279-69B89F96B852}"/>
-              </a:ext>
-            </a:extLst>
-          </p:cNvPr>
-          <p:cNvSpPr txBox="1"/>
-          <p:nvPr/>
-        </p:nvSpPr>
-        <p:spPr>
-          <a:xfrm>
-            <a:off x="1981200" y="4521200"/>
-            <a:ext cx="3877985" cy="461665"/>
-          </a:xfrm>
-          <a:prstGeom prst="rect">
-            <a:avLst/>
-          </a:prstGeom>
-          <a:noFill/>
-        </p:spPr>
-        <p:txBody>
-          <a:bodyPr wrap="none" rtlCol="0">
-            <a:spAutoFit/>
-          </a:bodyPr>
-          <a:lstStyle/>
-          <a:p>
-            <a:r>
-              <a:rPr kumimoji="1" lang="ja-JP" altLang="en-US" sz="2400"/>
-              <a:t>Using a supercomputer is fun</a:t>
-            </a:r>
-          </a:p>
-        </p:txBody>
-      </p:sp>
-    </p:spTree>
-    <p:extLst>
-      <p:ext uri="{BB962C8B-B14F-4D97-AF65-F5344CB8AC3E}">
-        <p14:creationId xmlns:p14="http://schemas.microsoft.com/office/powerpoint/2010/main" val="3383041225"/>
-      </p:ext>
-    </p:extLst>
-  </p:cSld>
-  <p:clrMapOvr>
-    <a:masterClrMapping/>
-  </p:clrMapOvr>
-</p:sld>
-</file>
-
 <file path=ppt/slides/slide8.xml><?xml version="1.0" encoding="utf-8"?>
 <p:sld xmlns:a="http://schemas.openxmlformats.org/drawingml/2006/main" xmlns:r="http://schemas.openxmlformats.org/officeDocument/2006/relationships" xmlns:p="http://schemas.openxmlformats.org/presentationml/2006/main">
   <p:cSld>
@@ -8206,20 +8286,24 @@
           <a:noFill/>
         </p:spPr>
         <p:txBody>
-          <a:bodyPr wrap="none" rtlCol="0">
-            <a:spAutoFit/>
-          </a:bodyPr>
+          <a:bodyPr wrap="square" rtlCol="0"/>
           <a:lstStyle/>
           <a:p>
+            <a:pPr>
+              <a:defRPr sz="1500"/>
+            </a:pPr>
             <a:r>
-              <a:rPr kumimoji="1" lang="ja-JP" altLang="en-US" dirty="0"/>
+              <a:rPr kumimoji="1" lang="ja-JP" altLang="en-US" dirty="0" sz="1500"/>
               <a:t>That job running over there?</a:t>
             </a:r>
             <a:endParaRPr kumimoji="1" lang="en-US" altLang="ja-JP" dirty="0"/>
           </a:p>
           <a:p>
+            <a:pPr>
+              <a:defRPr sz="1500"/>
+            </a:pPr>
             <a:r>
-              <a:rPr kumimoji="1" lang="ja-JP" altLang="en-US" dirty="0"/>
+              <a:rPr kumimoji="1" lang="ja-JP" altLang="en-US" dirty="0" sz="1500"/>
               <a:t>It's mine, haha.</a:t>
             </a:r>
             <a:endParaRPr kumimoji="1" lang="en-US" altLang="ja-JP" dirty="0"/>
@@ -8242,13 +8326,14 @@
           </a:prstGeom>
         </p:spPr>
         <p:txBody>
-          <a:bodyPr wrap="none">
-            <a:spAutoFit/>
-          </a:bodyPr>
+          <a:bodyPr wrap="square"/>
           <a:lstStyle/>
           <a:p>
+            <a:pPr>
+              <a:defRPr sz="3000"/>
+            </a:pPr>
             <a:r>
-              <a:rPr lang="ja-JP" altLang="en-US" sz="3600" dirty="0">
+              <a:rPr lang="ja-JP" altLang="en-US" sz="3000" dirty="0">
                 <a:latin typeface="UD デジタル 教科書体 N-B" panose="02020700000000000000" pitchFamily="17" charset="-128"/>
                 <a:ea typeface="UD デジタル 教科書体 N-B" panose="02020700000000000000" pitchFamily="17" charset="-128"/>
               </a:rPr>
@@ -8273,13 +8358,14 @@
           </a:prstGeom>
         </p:spPr>
         <p:txBody>
-          <a:bodyPr wrap="none">
-            <a:spAutoFit/>
-          </a:bodyPr>
+          <a:bodyPr wrap="square"/>
           <a:lstStyle/>
           <a:p>
+            <a:pPr>
+              <a:defRPr sz="1950"/>
+            </a:pPr>
             <a:r>
-              <a:rPr lang="ja-JP" altLang="en-US" sz="2400" dirty="0"/>
+              <a:rPr lang="ja-JP" altLang="en-US" sz="1950" dirty="0"/>
               <a:t>https://kaityo256.github.io/sevendayshpc/</a:t>
             </a:r>
           </a:p>

--- a/site-assets/sources/day1/fig-ja-en.pptx
+++ b/site-assets/sources/day1/fig-ja-en.pptx
@@ -5,17 +5,17 @@
     <p:sldMasterId id="2147483660" r:id="rId1"/>
   </p:sldMasterIdLst>
   <p:notesMasterIdLst>
-    <p:notesMasterId r:id="rId6"/>
+    <p:notesMasterId r:id="rId10"/>
   </p:notesMasterIdLst>
   <p:sldIdLst>
     <p:sldId id="256" r:id="rId2"/>
-    <p:sldId id="260" r:id="rId11"/>
-    <p:sldId id="257" r:id="rId3"/>
-    <p:sldId id="261" r:id="rId12"/>
-    <p:sldId id="258" r:id="rId4"/>
-    <p:sldId id="262" r:id="rId13"/>
-    <p:sldId id="259" r:id="rId5"/>
-    <p:sldId id="263" r:id="rId14"/>
+    <p:sldId id="260" r:id="rId3"/>
+    <p:sldId id="257" r:id="rId4"/>
+    <p:sldId id="261" r:id="rId5"/>
+    <p:sldId id="258" r:id="rId6"/>
+    <p:sldId id="262" r:id="rId7"/>
+    <p:sldId id="259" r:id="rId8"/>
+    <p:sldId id="263" r:id="rId9"/>
   </p:sldIdLst>
   <p:sldSz cx="9906000" cy="6858000" type="A4"/>
   <p:notesSz cx="6858000" cy="9144000"/>
@@ -206,7 +206,7 @@
           </a:lstStyle>
           <a:p>
             <a:fld id="{234B1B89-6D29-7849-8E65-921CEBC6CA4C}" type="datetimeFigureOut">
-              <a:t>2019/9/5</a:t>
+              <a:t>2026/8/5</a:t>
             </a:fld>
             <a:endParaRPr kumimoji="1" lang="ja-JP" altLang="en-US"/>
           </a:p>
@@ -3352,7 +3352,7 @@
         <p:spPr>
           <a:xfrm>
             <a:off x="152400" y="375920"/>
-            <a:ext cx="8879840" cy="461665"/>
+            <a:ext cx="8879840" cy="650240"/>
           </a:xfrm>
           <a:prstGeom prst="rect">
             <a:avLst/>
@@ -3367,10 +3367,9 @@
               <a:defRPr sz="2300"/>
             </a:pPr>
             <a:r>
-              <a:rPr kumimoji="1" lang="ja-JP" altLang="en-US" sz="2300"/>
+              <a:rPr kumimoji="1" lang="en-US" altLang="ja-JP" sz="2800"/>
               <a:t>Operating system (OS)</a:t>
             </a:r>
-            <a:endParaRPr kumimoji="1" lang="ja-JP" altLang="en-US" sz="2400"/>
           </a:p>
         </p:txBody>
       </p:sp>
@@ -6071,10 +6070,7 @@
             <a:pPr>
               <a:defRPr/>
             </a:pPr>
-            <a:r>
-              <a:rPr kumimoji="1" lang="ja-JP" altLang="en-US" sz="2400"/>
-              <a:t>Thread parallelism</a:t>
-            </a:r>
+            <a:endParaRPr kumimoji="1" lang="en-US" altLang="ja-JP" sz="2000"/>
           </a:p>
         </p:txBody>
       </p:sp>
@@ -6140,53 +6136,6 @@
       </p:pic>
       <p:sp>
         <p:nvSpPr>
-          <p:cNvPr id="21" name="テキスト ボックス 20">
-            <a:extLst>
-              <a:ext uri="{FF2B5EF4-FFF2-40B4-BE49-F238E27FC236}">
-                <a16:creationId xmlns:a16="http://schemas.microsoft.com/office/drawing/2014/main" id="{C88D5FBC-5E86-8049-875A-5DDA0F579E44}"/>
-              </a:ext>
-            </a:extLst>
-          </p:cNvPr>
-          <p:cNvSpPr txBox="1"/>
-          <p:nvPr/>
-        </p:nvSpPr>
-        <p:spPr>
-          <a:xfrm>
-            <a:off x="1198880" y="4378960"/>
-            <a:ext cx="2723823" cy="646331"/>
-          </a:xfrm>
-          <a:prstGeom prst="rect">
-            <a:avLst/>
-          </a:prstGeom>
-          <a:noFill/>
-        </p:spPr>
-        <p:txBody>
-          <a:bodyPr wrap="square" rtlCol="0"/>
-          <a:lstStyle/>
-          <a:p>
-            <a:pPr>
-              <a:defRPr sz="1600"/>
-            </a:pPr>
-            <a:r>
-              <a:rPr kumimoji="1" lang="ja-JP" altLang="en-US" sz="1600"/>
-              <a:t>Easy to try casually</a:t>
-            </a:r>
-            <a:endParaRPr kumimoji="1" lang="en-US" altLang="ja-JP"/>
-          </a:p>
-          <a:p>
-            <a:pPr>
-              <a:defRPr sz="1600"/>
-            </a:pPr>
-            <a:r>
-              <a:rPr kumimoji="1" lang="ja-JP" altLang="en-US" sz="1600"/>
-              <a:t>Simple when it is simple</a:t>
-            </a:r>
-            <a:endParaRPr kumimoji="1" lang="en-US" altLang="ja-JP"/>
-          </a:p>
-        </p:txBody>
-      </p:sp>
-      <p:sp>
-        <p:nvSpPr>
           <p:cNvPr id="22" name="テキスト ボックス 21">
             <a:extLst>
               <a:ext uri="{FF2B5EF4-FFF2-40B4-BE49-F238E27FC236}">
@@ -6216,75 +6165,11 @@
             <a:pPr>
               <a:defRPr/>
             </a:pPr>
-            <a:r>
-              <a:rPr kumimoji="1" lang="ja-JP" altLang="en-US" b="1">
-                <a:solidFill>
-                  <a:srgbClr val="FF0000"/>
-                </a:solidFill>
-              </a:rPr>
-              <a:t>Cannot span multiple nodes</a:t>
-            </a:r>
             <a:endParaRPr kumimoji="1" lang="en-US" altLang="ja-JP" b="1">
               <a:solidFill>
                 <a:srgbClr val="FF0000"/>
               </a:solidFill>
             </a:endParaRPr>
-          </a:p>
-          <a:p>
-            <a:pPr>
-              <a:defRPr/>
-            </a:pPr>
-            <a:r>
-              <a:rPr kumimoji="1" lang="ja-JP" altLang="en-US" b="1">
-                <a:solidFill>
-                  <a:srgbClr val="FF0000"/>
-                </a:solidFill>
-              </a:rPr>
-              <a:t>Getting performance is surprisingly hard</a:t>
-            </a:r>
-            <a:endParaRPr kumimoji="1" lang="en-US" altLang="ja-JP" b="1">
-              <a:solidFill>
-                <a:srgbClr val="FF0000"/>
-              </a:solidFill>
-            </a:endParaRPr>
-          </a:p>
-        </p:txBody>
-      </p:sp>
-      <p:sp>
-        <p:nvSpPr>
-          <p:cNvPr id="51" name="テキスト ボックス 50">
-            <a:extLst>
-              <a:ext uri="{FF2B5EF4-FFF2-40B4-BE49-F238E27FC236}">
-                <a16:creationId xmlns:a16="http://schemas.microsoft.com/office/drawing/2014/main" id="{14389323-333F-4249-9372-E6355BC30F3F}"/>
-              </a:ext>
-            </a:extLst>
-          </p:cNvPr>
-          <p:cNvSpPr txBox="1"/>
-          <p:nvPr/>
-        </p:nvSpPr>
-        <p:spPr>
-          <a:xfrm>
-            <a:off x="6136640" y="81280"/>
-            <a:ext cx="2031325" cy="461665"/>
-          </a:xfrm>
-          <a:prstGeom prst="rect">
-            <a:avLst/>
-          </a:prstGeom>
-          <a:noFill/>
-        </p:spPr>
-        <p:txBody>
-          <a:bodyPr wrap="square" rtlCol="0">
-            <a:normAutofit/>
-          </a:bodyPr>
-          <a:lstStyle/>
-          <a:p>
-            <a:pPr>
-              <a:defRPr/>
-            </a:pPr>
-            <a:r>
-              <a:rPr kumimoji="1" lang="ja-JP" altLang="en-US" sz="2400"/>
-              <a:t>Process parallelism</a:t>
-            </a:r>
           </a:p>
         </p:txBody>
       </p:sp>
@@ -7003,7 +6888,7 @@
         <p:spPr>
           <a:xfrm>
             <a:off x="5913120" y="2377440"/>
-            <a:ext cx="646331" cy="369332"/>
+            <a:ext cx="1198880" cy="233680"/>
           </a:xfrm>
           <a:prstGeom prst="rect">
             <a:avLst/>
@@ -7012,131 +6897,14 @@
         </p:spPr>
         <p:txBody>
           <a:bodyPr wrap="square" rtlCol="0">
-            <a:normAutofit/>
+            <a:normAutofit fontScale="62500" lnSpcReduction="20000"/>
           </a:bodyPr>
           <a:lstStyle/>
           <a:p>
             <a:pPr>
               <a:defRPr/>
             </a:pPr>
-            <a:r>
-              <a:rPr kumimoji="1" lang="ja-JP" altLang="en-US"/>
-              <a:t>Communication</a:t>
-            </a:r>
-          </a:p>
-        </p:txBody>
-      </p:sp>
-      <p:sp>
-        <p:nvSpPr>
-          <p:cNvPr id="64" name="テキスト ボックス 63">
-            <a:extLst>
-              <a:ext uri="{FF2B5EF4-FFF2-40B4-BE49-F238E27FC236}">
-                <a16:creationId xmlns:a16="http://schemas.microsoft.com/office/drawing/2014/main" id="{CFDC4B11-35AC-504B-A3AE-6357F65589A8}"/>
-              </a:ext>
-            </a:extLst>
-          </p:cNvPr>
-          <p:cNvSpPr txBox="1"/>
-          <p:nvPr/>
-        </p:nvSpPr>
-        <p:spPr>
-          <a:xfrm>
-            <a:off x="8788400" y="2407920"/>
-            <a:ext cx="646331" cy="369332"/>
-          </a:xfrm>
-          <a:prstGeom prst="rect">
-            <a:avLst/>
-          </a:prstGeom>
-          <a:noFill/>
-        </p:spPr>
-        <p:txBody>
-          <a:bodyPr wrap="square" rtlCol="0">
-            <a:normAutofit/>
-          </a:bodyPr>
-          <a:lstStyle/>
-          <a:p>
-            <a:pPr>
-              <a:defRPr/>
-            </a:pPr>
-            <a:r>
-              <a:rPr kumimoji="1" lang="ja-JP" altLang="en-US"/>
-              <a:t>Communication</a:t>
-            </a:r>
-          </a:p>
-        </p:txBody>
-      </p:sp>
-      <p:sp>
-        <p:nvSpPr>
-          <p:cNvPr id="65" name="テキスト ボックス 64">
-            <a:extLst>
-              <a:ext uri="{FF2B5EF4-FFF2-40B4-BE49-F238E27FC236}">
-                <a16:creationId xmlns:a16="http://schemas.microsoft.com/office/drawing/2014/main" id="{5F484C2D-C7E6-124E-9CDE-F865081091BC}"/>
-              </a:ext>
-            </a:extLst>
-          </p:cNvPr>
-          <p:cNvSpPr txBox="1"/>
-          <p:nvPr/>
-        </p:nvSpPr>
-        <p:spPr>
-          <a:xfrm>
-            <a:off x="6878320" y="1361440"/>
-            <a:ext cx="646331" cy="369332"/>
-          </a:xfrm>
-          <a:prstGeom prst="rect">
-            <a:avLst/>
-          </a:prstGeom>
-          <a:noFill/>
-        </p:spPr>
-        <p:txBody>
-          <a:bodyPr wrap="square" rtlCol="0">
-            <a:normAutofit/>
-          </a:bodyPr>
-          <a:lstStyle/>
-          <a:p>
-            <a:pPr>
-              <a:defRPr/>
-            </a:pPr>
-            <a:r>
-              <a:rPr kumimoji="1" lang="ja-JP" altLang="en-US"/>
-              <a:t>Communication</a:t>
-            </a:r>
-          </a:p>
-        </p:txBody>
-      </p:sp>
-      <p:sp>
-        <p:nvSpPr>
-          <p:cNvPr id="66" name="テキスト ボックス 65">
-            <a:extLst>
-              <a:ext uri="{FF2B5EF4-FFF2-40B4-BE49-F238E27FC236}">
-                <a16:creationId xmlns:a16="http://schemas.microsoft.com/office/drawing/2014/main" id="{AA592A2A-A288-9045-BDCA-0B08A956B73C}"/>
-              </a:ext>
-            </a:extLst>
-          </p:cNvPr>
-          <p:cNvSpPr txBox="1"/>
-          <p:nvPr/>
-        </p:nvSpPr>
-        <p:spPr>
-          <a:xfrm>
-            <a:off x="6898640" y="2611120"/>
-            <a:ext cx="646331" cy="369332"/>
-          </a:xfrm>
-          <a:prstGeom prst="rect">
-            <a:avLst/>
-          </a:prstGeom>
-          <a:noFill/>
-        </p:spPr>
-        <p:txBody>
-          <a:bodyPr wrap="square" rtlCol="0">
-            <a:normAutofit/>
-          </a:bodyPr>
-          <a:lstStyle/>
-          <a:p>
-            <a:pPr>
-              <a:defRPr/>
-            </a:pPr>
-            <a:r>
-              <a:rPr kumimoji="1" lang="ja-JP" altLang="en-US"/>
-              <a:t>Communication</a:t>
-            </a:r>
+            <a:endParaRPr kumimoji="1" lang="ja-JP" altLang="en-US"/>
           </a:p>
         </p:txBody>
       </p:sp>
@@ -7202,83 +6970,6 @@
       </p:pic>
       <p:sp>
         <p:nvSpPr>
-          <p:cNvPr id="69" name="テキスト ボックス 68">
-            <a:extLst>
-              <a:ext uri="{FF2B5EF4-FFF2-40B4-BE49-F238E27FC236}">
-                <a16:creationId xmlns:a16="http://schemas.microsoft.com/office/drawing/2014/main" id="{279DDBE8-16CE-1C46-A37A-197F87F96329}"/>
-              </a:ext>
-            </a:extLst>
-          </p:cNvPr>
-          <p:cNvSpPr txBox="1"/>
-          <p:nvPr/>
-        </p:nvSpPr>
-        <p:spPr>
-          <a:xfrm>
-            <a:off x="5628640" y="4307840"/>
-            <a:ext cx="3185487" cy="369332"/>
-          </a:xfrm>
-          <a:prstGeom prst="rect">
-            <a:avLst/>
-          </a:prstGeom>
-          <a:noFill/>
-        </p:spPr>
-        <p:txBody>
-          <a:bodyPr wrap="none" rtlCol="0">
-            <a:spAutoFit/>
-          </a:bodyPr>
-          <a:lstStyle/>
-          <a:p>
-            <a:pPr>
-              <a:defRPr/>
-            </a:pPr>
-            <a:r>
-              <a:rPr kumimoji="1" lang="ja-JP" altLang="en-US" b="1">
-                <a:solidFill>
-                  <a:srgbClr val="FF0000"/>
-                </a:solidFill>
-              </a:rPr>
-              <a:t>Can span multiple nodes</a:t>
-            </a:r>
-          </a:p>
-        </p:txBody>
-      </p:sp>
-      <p:sp>
-        <p:nvSpPr>
-          <p:cNvPr id="71" name="正方形/長方形 70">
-            <a:extLst>
-              <a:ext uri="{FF2B5EF4-FFF2-40B4-BE49-F238E27FC236}">
-                <a16:creationId xmlns:a16="http://schemas.microsoft.com/office/drawing/2014/main" id="{35EDFEB0-9D0E-1C4D-B66E-ED72450A8F28}"/>
-              </a:ext>
-            </a:extLst>
-          </p:cNvPr>
-          <p:cNvSpPr/>
-          <p:nvPr/>
-        </p:nvSpPr>
-        <p:spPr>
-          <a:xfrm>
-            <a:off x="5660072" y="4636254"/>
-            <a:ext cx="2954655" cy="369332"/>
-          </a:xfrm>
-          <a:prstGeom prst="rect">
-            <a:avLst/>
-          </a:prstGeom>
-        </p:spPr>
-        <p:txBody>
-          <a:bodyPr wrap="square"/>
-          <a:lstStyle/>
-          <a:p>
-            <a:pPr>
-              <a:defRPr sz="1350"/>
-            </a:pPr>
-            <a:r>
-              <a:rPr lang="ja-JP" altLang="en-US" sz="1350"/>
-              <a:t>Parallelized exactly as written</a:t>
-            </a:r>
-          </a:p>
-        </p:txBody>
-      </p:sp>
-      <p:sp>
-        <p:nvSpPr>
           <p:cNvPr id="72" name="正方形/長方形 71">
             <a:extLst>
               <a:ext uri="{FF2B5EF4-FFF2-40B4-BE49-F238E27FC236}">
@@ -7291,7 +6982,7 @@
         </p:nvSpPr>
         <p:spPr>
           <a:xfrm>
-            <a:off x="5609272" y="5438894"/>
+            <a:off x="5609272" y="5421868"/>
             <a:ext cx="4108817" cy="369332"/>
           </a:xfrm>
           <a:prstGeom prst="rect">
@@ -7305,9 +6996,281 @@
             <a:pPr>
               <a:defRPr sz="1450"/>
             </a:pPr>
+            <a:endParaRPr lang="ja-JP" altLang="en-US" sz="1450"/>
+          </a:p>
+        </p:txBody>
+      </p:sp>
+      <p:sp>
+        <p:nvSpPr>
+          <p:cNvPr id="23" name="テキスト ボックス 22">
+            <a:extLst>
+              <a:ext uri="{FF2B5EF4-FFF2-40B4-BE49-F238E27FC236}">
+                <a16:creationId xmlns:a16="http://schemas.microsoft.com/office/drawing/2014/main" id="{91E6229A-CFA1-3E1D-72A7-B5B3AB2B5CAD}"/>
+              </a:ext>
+            </a:extLst>
+          </p:cNvPr>
+          <p:cNvSpPr txBox="1"/>
+          <p:nvPr/>
+        </p:nvSpPr>
+        <p:spPr>
+          <a:xfrm>
+            <a:off x="1198880" y="0"/>
+            <a:ext cx="2893288" cy="523220"/>
+          </a:xfrm>
+          <a:prstGeom prst="rect">
+            <a:avLst/>
+          </a:prstGeom>
+          <a:noFill/>
+        </p:spPr>
+        <p:txBody>
+          <a:bodyPr wrap="square">
+            <a:spAutoFit/>
+          </a:bodyPr>
+          <a:lstStyle/>
+          <a:p>
             <a:r>
-              <a:rPr lang="ja-JP" altLang="en-US" sz="1450"/>
+              <a:rPr lang="en-US" altLang="ja-JP" sz="2800"/>
+              <a:t>Thread parallelism</a:t>
+            </a:r>
+          </a:p>
+        </p:txBody>
+      </p:sp>
+      <p:sp>
+        <p:nvSpPr>
+          <p:cNvPr id="27" name="テキスト ボックス 26">
+            <a:extLst>
+              <a:ext uri="{FF2B5EF4-FFF2-40B4-BE49-F238E27FC236}">
+                <a16:creationId xmlns:a16="http://schemas.microsoft.com/office/drawing/2014/main" id="{EE0C2D8B-93AB-466A-8DA0-B5EE47EFC177}"/>
+              </a:ext>
+            </a:extLst>
+          </p:cNvPr>
+          <p:cNvSpPr txBox="1"/>
+          <p:nvPr/>
+        </p:nvSpPr>
+        <p:spPr>
+          <a:xfrm>
+            <a:off x="5638800" y="-5100"/>
+            <a:ext cx="3068320" cy="523220"/>
+          </a:xfrm>
+          <a:prstGeom prst="rect">
+            <a:avLst/>
+          </a:prstGeom>
+          <a:noFill/>
+        </p:spPr>
+        <p:txBody>
+          <a:bodyPr wrap="square">
+            <a:spAutoFit/>
+          </a:bodyPr>
+          <a:lstStyle/>
+          <a:p>
+            <a:r>
+              <a:rPr lang="en-US" altLang="ja-JP" sz="2800"/>
+              <a:t>Process parallelism</a:t>
+            </a:r>
+          </a:p>
+        </p:txBody>
+      </p:sp>
+      <p:sp>
+        <p:nvSpPr>
+          <p:cNvPr id="29" name="テキスト ボックス 28">
+            <a:extLst>
+              <a:ext uri="{FF2B5EF4-FFF2-40B4-BE49-F238E27FC236}">
+                <a16:creationId xmlns:a16="http://schemas.microsoft.com/office/drawing/2014/main" id="{3E2351D0-6051-37E2-D961-1866B2A63A64}"/>
+              </a:ext>
+            </a:extLst>
+          </p:cNvPr>
+          <p:cNvSpPr txBox="1"/>
+          <p:nvPr/>
+        </p:nvSpPr>
+        <p:spPr>
+          <a:xfrm>
+            <a:off x="6296660" y="2387456"/>
+            <a:ext cx="1912620" cy="369332"/>
+          </a:xfrm>
+          <a:prstGeom prst="rect">
+            <a:avLst/>
+          </a:prstGeom>
+          <a:noFill/>
+        </p:spPr>
+        <p:txBody>
+          <a:bodyPr wrap="square">
+            <a:spAutoFit/>
+          </a:bodyPr>
+          <a:lstStyle/>
+          <a:p>
+            <a:r>
+              <a:rPr lang="en-US" altLang="ja-JP"/>
+              <a:t>Communication</a:t>
+            </a:r>
+          </a:p>
+        </p:txBody>
+      </p:sp>
+      <p:sp>
+        <p:nvSpPr>
+          <p:cNvPr id="31" name="テキスト ボックス 30">
+            <a:extLst>
+              <a:ext uri="{FF2B5EF4-FFF2-40B4-BE49-F238E27FC236}">
+                <a16:creationId xmlns:a16="http://schemas.microsoft.com/office/drawing/2014/main" id="{62FA97E5-6D3A-D098-48E9-2C34C00049B9}"/>
+              </a:ext>
+            </a:extLst>
+          </p:cNvPr>
+          <p:cNvSpPr txBox="1"/>
+          <p:nvPr/>
+        </p:nvSpPr>
+        <p:spPr>
+          <a:xfrm>
+            <a:off x="1198880" y="4283808"/>
+            <a:ext cx="2750855" cy="646331"/>
+          </a:xfrm>
+          <a:prstGeom prst="rect">
+            <a:avLst/>
+          </a:prstGeom>
+          <a:noFill/>
+        </p:spPr>
+        <p:txBody>
+          <a:bodyPr wrap="square">
+            <a:spAutoFit/>
+          </a:bodyPr>
+          <a:lstStyle/>
+          <a:p>
+            <a:r>
+              <a:rPr lang="en-US" altLang="ja-JP"/>
+              <a:t>Easy to try casually</a:t>
+            </a:r>
+          </a:p>
+          <a:p>
+            <a:r>
+              <a:rPr lang="en-US" altLang="ja-JP"/>
+              <a:t>Simple when it is simple</a:t>
+            </a:r>
+          </a:p>
+        </p:txBody>
+      </p:sp>
+      <p:sp>
+        <p:nvSpPr>
+          <p:cNvPr id="33" name="テキスト ボックス 32">
+            <a:extLst>
+              <a:ext uri="{FF2B5EF4-FFF2-40B4-BE49-F238E27FC236}">
+                <a16:creationId xmlns:a16="http://schemas.microsoft.com/office/drawing/2014/main" id="{89DA7352-4AE4-E20C-D059-EC21AC3884E8}"/>
+              </a:ext>
+            </a:extLst>
+          </p:cNvPr>
+          <p:cNvSpPr txBox="1"/>
+          <p:nvPr/>
+        </p:nvSpPr>
+        <p:spPr>
+          <a:xfrm>
+            <a:off x="5732780" y="4332603"/>
+            <a:ext cx="3136900" cy="646331"/>
+          </a:xfrm>
+          <a:prstGeom prst="rect">
+            <a:avLst/>
+          </a:prstGeom>
+          <a:noFill/>
+        </p:spPr>
+        <p:txBody>
+          <a:bodyPr wrap="square">
+            <a:spAutoFit/>
+          </a:bodyPr>
+          <a:lstStyle/>
+          <a:p>
+            <a:r>
+              <a:rPr lang="en-US" altLang="ja-JP">
+                <a:solidFill>
+                  <a:srgbClr val="FF0000"/>
+                </a:solidFill>
+              </a:rPr>
+              <a:t>Can span multiple nodes</a:t>
+            </a:r>
+          </a:p>
+          <a:p>
+            <a:r>
+              <a:rPr lang="en-US" altLang="ja-JP"/>
+              <a:t>Parallelized exactly as written</a:t>
+            </a:r>
+          </a:p>
+        </p:txBody>
+      </p:sp>
+      <p:sp>
+        <p:nvSpPr>
+          <p:cNvPr id="37" name="テキスト ボックス 36">
+            <a:extLst>
+              <a:ext uri="{FF2B5EF4-FFF2-40B4-BE49-F238E27FC236}">
+                <a16:creationId xmlns:a16="http://schemas.microsoft.com/office/drawing/2014/main" id="{542EE62D-9959-971B-BF83-328FF9F4E640}"/>
+              </a:ext>
+            </a:extLst>
+          </p:cNvPr>
+          <p:cNvSpPr txBox="1"/>
+          <p:nvPr/>
+        </p:nvSpPr>
+        <p:spPr>
+          <a:xfrm>
+            <a:off x="5648960" y="5421868"/>
+            <a:ext cx="4953000" cy="369332"/>
+          </a:xfrm>
+          <a:prstGeom prst="rect">
+            <a:avLst/>
+          </a:prstGeom>
+          <a:noFill/>
+        </p:spPr>
+        <p:txBody>
+          <a:bodyPr wrap="square">
+            <a:spAutoFit/>
+          </a:bodyPr>
+          <a:lstStyle/>
+          <a:p>
+            <a:r>
+              <a:rPr lang="en-US" altLang="ja-JP"/>
               <a:t>Communication must be written explicitly</a:t>
+            </a:r>
+          </a:p>
+        </p:txBody>
+      </p:sp>
+      <p:sp>
+        <p:nvSpPr>
+          <p:cNvPr id="40" name="テキスト ボックス 39">
+            <a:extLst>
+              <a:ext uri="{FF2B5EF4-FFF2-40B4-BE49-F238E27FC236}">
+                <a16:creationId xmlns:a16="http://schemas.microsoft.com/office/drawing/2014/main" id="{79C857D1-3B9D-DD56-B77B-C0655665E68B}"/>
+              </a:ext>
+            </a:extLst>
+          </p:cNvPr>
+          <p:cNvSpPr txBox="1"/>
+          <p:nvPr/>
+        </p:nvSpPr>
+        <p:spPr>
+          <a:xfrm>
+            <a:off x="993140" y="5297855"/>
+            <a:ext cx="3924300" cy="646331"/>
+          </a:xfrm>
+          <a:prstGeom prst="rect">
+            <a:avLst/>
+          </a:prstGeom>
+          <a:noFill/>
+        </p:spPr>
+        <p:txBody>
+          <a:bodyPr wrap="square">
+            <a:spAutoFit/>
+          </a:bodyPr>
+          <a:lstStyle/>
+          <a:p>
+            <a:r>
+              <a:rPr lang="en-US" altLang="ja-JP">
+                <a:solidFill>
+                  <a:srgbClr val="FF0000"/>
+                </a:solidFill>
+              </a:rPr>
+              <a:t>Cannot span multiple nodes</a:t>
+            </a:r>
+          </a:p>
+          <a:p>
+            <a:r>
+              <a:rPr lang="en-US" altLang="ja-JP">
+                <a:solidFill>
+                  <a:srgbClr val="FF0000"/>
+                </a:solidFill>
+              </a:rPr>
+              <a:t>Getting performance is surprisingly hard</a:t>
             </a:r>
           </a:p>
         </p:txBody>
@@ -7715,21 +7678,9 @@
             <a:pPr>
               <a:defRPr sz="1500"/>
             </a:pPr>
-            <a:r>
-              <a:rPr kumimoji="1" lang="ja-JP" altLang="en-US" sz="1500"/>
-              <a:t>That job running over there?</a:t>
-            </a:r>
-            <a:endParaRPr kumimoji="1" lang="en-US" altLang="ja-JP"/>
-          </a:p>
-          <a:p>
-            <a:pPr>
-              <a:defRPr sz="1500"/>
-            </a:pPr>
-            <a:r>
-              <a:rPr kumimoji="1" lang="ja-JP" altLang="en-US" sz="1500"/>
-              <a:t>It's mine, haha.</a:t>
-            </a:r>
-            <a:endParaRPr kumimoji="1" lang="en-US" altLang="ja-JP"/>
+            <a:endParaRPr kumimoji="1" lang="en-US" altLang="ja-JP" sz="1600">
+              <a:latin typeface="+mj-lt"/>
+            </a:endParaRPr>
           </a:p>
         </p:txBody>
       </p:sp>
@@ -7762,9 +7713,82 @@
             <a:pPr>
               <a:defRPr sz="1950"/>
             </a:pPr>
+            <a:endParaRPr kumimoji="1" lang="ja-JP" altLang="en-US" sz="1950"/>
+          </a:p>
+        </p:txBody>
+      </p:sp>
+      <p:sp>
+        <p:nvSpPr>
+          <p:cNvPr id="9" name="テキスト ボックス 8">
+            <a:extLst>
+              <a:ext uri="{FF2B5EF4-FFF2-40B4-BE49-F238E27FC236}">
+                <a16:creationId xmlns:a16="http://schemas.microsoft.com/office/drawing/2014/main" id="{6B4871FD-0EB6-9E9A-D0C3-DAA0B1C33D3C}"/>
+              </a:ext>
+            </a:extLst>
+          </p:cNvPr>
+          <p:cNvSpPr txBox="1"/>
+          <p:nvPr/>
+        </p:nvSpPr>
+        <p:spPr>
+          <a:xfrm>
+            <a:off x="2184400" y="1192779"/>
+            <a:ext cx="3312160" cy="707886"/>
+          </a:xfrm>
+          <a:prstGeom prst="rect">
+            <a:avLst/>
+          </a:prstGeom>
+          <a:noFill/>
+        </p:spPr>
+        <p:txBody>
+          <a:bodyPr wrap="square">
+            <a:spAutoFit/>
+          </a:bodyPr>
+          <a:lstStyle/>
+          <a:p>
             <a:r>
-              <a:rPr kumimoji="1" lang="ja-JP" altLang="en-US" sz="1950"/>
-              <a:t>Using a supercomputer is fun</a:t>
+              <a:rPr lang="en-US" altLang="ja-JP" sz="2000"/>
+              <a:t>That job running over there?</a:t>
+            </a:r>
+          </a:p>
+          <a:p>
+            <a:r>
+              <a:rPr lang="en-US" altLang="ja-JP" sz="2000"/>
+              <a:t>It's mine, haha.</a:t>
+            </a:r>
+          </a:p>
+        </p:txBody>
+      </p:sp>
+      <p:sp>
+        <p:nvSpPr>
+          <p:cNvPr id="11" name="テキスト ボックス 10">
+            <a:extLst>
+              <a:ext uri="{FF2B5EF4-FFF2-40B4-BE49-F238E27FC236}">
+                <a16:creationId xmlns:a16="http://schemas.microsoft.com/office/drawing/2014/main" id="{179CFC5B-7413-266A-2BC3-98C5F2A4391F}"/>
+              </a:ext>
+            </a:extLst>
+          </p:cNvPr>
+          <p:cNvSpPr txBox="1"/>
+          <p:nvPr/>
+        </p:nvSpPr>
+        <p:spPr>
+          <a:xfrm>
+            <a:off x="1554480" y="4467999"/>
+            <a:ext cx="5455920" cy="584775"/>
+          </a:xfrm>
+          <a:prstGeom prst="rect">
+            <a:avLst/>
+          </a:prstGeom>
+          <a:noFill/>
+        </p:spPr>
+        <p:txBody>
+          <a:bodyPr wrap="square">
+            <a:spAutoFit/>
+          </a:bodyPr>
+          <a:lstStyle/>
+          <a:p>
+            <a:r>
+              <a:rPr lang="en-US" altLang="ja-JP" sz="3200"/>
+              <a:t>Using a supercomputer is fun!</a:t>
             </a:r>
           </a:p>
         </p:txBody>
@@ -7998,11 +8022,7 @@
           <a:p>
             <a:r>
               <a:rPr lang="ja-JP" altLang="en-US" dirty="0"/>
-              <a:t>俺のなん</a:t>
-            </a:r>
-            <a:r>
-              <a:rPr lang="ja-JP" altLang="en-US" dirty="0"/>
-              <a:t>すよ</a:t>
+              <a:t>俺のなんすよ</a:t>
             </a:r>
             <a:r>
               <a:rPr lang="en-US" altLang="ja-JP" dirty="0"/>
@@ -8293,7 +8313,7 @@
               <a:defRPr sz="1500"/>
             </a:pPr>
             <a:r>
-              <a:rPr kumimoji="1" lang="ja-JP" altLang="en-US" dirty="0" sz="1500"/>
+              <a:rPr kumimoji="1" lang="ja-JP" altLang="en-US" sz="1500" dirty="0"/>
               <a:t>That job running over there?</a:t>
             </a:r>
             <a:endParaRPr kumimoji="1" lang="en-US" altLang="ja-JP" dirty="0"/>
@@ -8303,7 +8323,7 @@
               <a:defRPr sz="1500"/>
             </a:pPr>
             <a:r>
-              <a:rPr kumimoji="1" lang="ja-JP" altLang="en-US" dirty="0" sz="1500"/>
+              <a:rPr kumimoji="1" lang="ja-JP" altLang="en-US" sz="1500" dirty="0"/>
               <a:t>It's mine, haha.</a:t>
             </a:r>
             <a:endParaRPr kumimoji="1" lang="en-US" altLang="ja-JP" dirty="0"/>
